--- a/RAC/09장/9장_ASM뷰와asmcmd.pptx
+++ b/RAC/09장/9장_ASM뷰와asmcmd.pptx
@@ -4,61 +4,64 @@
   <p:sldMasterIdLst>
     <p:sldMasterId id="2147483648" r:id="rId1"/>
   </p:sldMasterIdLst>
+  <p:notesMasterIdLst>
+    <p:notesMasterId r:id="rId54"/>
+  </p:notesMasterIdLst>
   <p:sldIdLst>
-    <p:sldId id="256" r:id="rId7"/>
-    <p:sldId id="257" r:id="rId8"/>
-    <p:sldId id="258" r:id="rId9"/>
-    <p:sldId id="259" r:id="rId10"/>
-    <p:sldId id="260" r:id="rId12"/>
-    <p:sldId id="261" r:id="rId13"/>
-    <p:sldId id="262" r:id="rId14"/>
-    <p:sldId id="263" r:id="rId15"/>
-    <p:sldId id="264" r:id="rId16"/>
-    <p:sldId id="265" r:id="rId17"/>
-    <p:sldId id="266" r:id="rId18"/>
-    <p:sldId id="267" r:id="rId19"/>
-    <p:sldId id="268" r:id="rId20"/>
-    <p:sldId id="269" r:id="rId21"/>
-    <p:sldId id="270" r:id="rId22"/>
-    <p:sldId id="271" r:id="rId23"/>
-    <p:sldId id="272" r:id="rId24"/>
-    <p:sldId id="273" r:id="rId25"/>
-    <p:sldId id="274" r:id="rId26"/>
-    <p:sldId id="275" r:id="rId27"/>
-    <p:sldId id="276" r:id="rId28"/>
-    <p:sldId id="277" r:id="rId29"/>
-    <p:sldId id="278" r:id="rId30"/>
-    <p:sldId id="279" r:id="rId31"/>
-    <p:sldId id="280" r:id="rId32"/>
-    <p:sldId id="281" r:id="rId33"/>
-    <p:sldId id="282" r:id="rId34"/>
-    <p:sldId id="283" r:id="rId35"/>
-    <p:sldId id="284" r:id="rId36"/>
-    <p:sldId id="285" r:id="rId37"/>
-    <p:sldId id="286" r:id="rId38"/>
-    <p:sldId id="287" r:id="rId39"/>
-    <p:sldId id="288" r:id="rId40"/>
-    <p:sldId id="289" r:id="rId41"/>
-    <p:sldId id="290" r:id="rId42"/>
-    <p:sldId id="291" r:id="rId43"/>
-    <p:sldId id="292" r:id="rId44"/>
-    <p:sldId id="293" r:id="rId45"/>
-    <p:sldId id="294" r:id="rId46"/>
-    <p:sldId id="295" r:id="rId47"/>
-    <p:sldId id="296" r:id="rId48"/>
-    <p:sldId id="297" r:id="rId49"/>
-    <p:sldId id="298" r:id="rId50"/>
-    <p:sldId id="299" r:id="rId51"/>
-    <p:sldId id="300" r:id="rId52"/>
-    <p:sldId id="301" r:id="rId53"/>
-    <p:sldId id="302" r:id="rId54"/>
-    <p:sldId id="303" r:id="rId55"/>
-    <p:sldId id="304" r:id="rId56"/>
-    <p:sldId id="305" r:id="rId57"/>
-    <p:sldId id="306" r:id="rId58"/>
-    <p:sldId id="307" r:id="rId59"/>
+    <p:sldId id="256" r:id="rId2"/>
+    <p:sldId id="257" r:id="rId3"/>
+    <p:sldId id="258" r:id="rId4"/>
+    <p:sldId id="259" r:id="rId5"/>
+    <p:sldId id="260" r:id="rId6"/>
+    <p:sldId id="261" r:id="rId7"/>
+    <p:sldId id="262" r:id="rId8"/>
+    <p:sldId id="263" r:id="rId9"/>
+    <p:sldId id="264" r:id="rId10"/>
+    <p:sldId id="265" r:id="rId11"/>
+    <p:sldId id="266" r:id="rId12"/>
+    <p:sldId id="267" r:id="rId13"/>
+    <p:sldId id="268" r:id="rId14"/>
+    <p:sldId id="269" r:id="rId15"/>
+    <p:sldId id="270" r:id="rId16"/>
+    <p:sldId id="271" r:id="rId17"/>
+    <p:sldId id="272" r:id="rId18"/>
+    <p:sldId id="273" r:id="rId19"/>
+    <p:sldId id="274" r:id="rId20"/>
+    <p:sldId id="275" r:id="rId21"/>
+    <p:sldId id="276" r:id="rId22"/>
+    <p:sldId id="277" r:id="rId23"/>
+    <p:sldId id="278" r:id="rId24"/>
+    <p:sldId id="279" r:id="rId25"/>
+    <p:sldId id="280" r:id="rId26"/>
+    <p:sldId id="281" r:id="rId27"/>
+    <p:sldId id="282" r:id="rId28"/>
+    <p:sldId id="283" r:id="rId29"/>
+    <p:sldId id="284" r:id="rId30"/>
+    <p:sldId id="285" r:id="rId31"/>
+    <p:sldId id="286" r:id="rId32"/>
+    <p:sldId id="287" r:id="rId33"/>
+    <p:sldId id="288" r:id="rId34"/>
+    <p:sldId id="289" r:id="rId35"/>
+    <p:sldId id="290" r:id="rId36"/>
+    <p:sldId id="291" r:id="rId37"/>
+    <p:sldId id="292" r:id="rId38"/>
+    <p:sldId id="293" r:id="rId39"/>
+    <p:sldId id="294" r:id="rId40"/>
+    <p:sldId id="295" r:id="rId41"/>
+    <p:sldId id="296" r:id="rId42"/>
+    <p:sldId id="297" r:id="rId43"/>
+    <p:sldId id="298" r:id="rId44"/>
+    <p:sldId id="299" r:id="rId45"/>
+    <p:sldId id="300" r:id="rId46"/>
+    <p:sldId id="301" r:id="rId47"/>
+    <p:sldId id="302" r:id="rId48"/>
+    <p:sldId id="303" r:id="rId49"/>
+    <p:sldId id="304" r:id="rId50"/>
+    <p:sldId id="305" r:id="rId51"/>
+    <p:sldId id="306" r:id="rId52"/>
+    <p:sldId id="307" r:id="rId53"/>
   </p:sldIdLst>
-  <p:sldSz cx="12191695" cy="6858000" type="screen4x3"/>
+  <p:sldSz cx="12192000" cy="6858000"/>
   <p:notesSz cx="6858000" cy="9144000"/>
   <p:defaultTextStyle>
     <a:defPPr>
@@ -155,11 +158,27 @@
       </a:defRPr>
     </a:lvl9pPr>
   </p:defaultTextStyle>
+  <p:extLst>
+    <p:ext uri="{EFAFB233-063F-42B5-8137-9DF3F51BA10A}">
+      <p15:sldGuideLst xmlns:p15="http://schemas.microsoft.com/office/powerpoint/2012/main">
+        <p15:guide id="1" orient="horz" pos="2160">
+          <p15:clr>
+            <a:srgbClr val="A4A3A4"/>
+          </p15:clr>
+        </p15:guide>
+        <p15:guide id="2" pos="2880">
+          <p15:clr>
+            <a:srgbClr val="A4A3A4"/>
+          </p15:clr>
+        </p15:guide>
+      </p15:sldGuideLst>
+    </p:ext>
+  </p:extLst>
 </p:presentation>
 </file>
 
 <file path=ppt/notesMasters/notesMaster1.xml><?xml version="1.0" encoding="utf-8"?>
-<p:notesMaster xmlns:a="http://schemas.openxmlformats.org/drawingml/2006/main" xmlns:p="http://schemas.openxmlformats.org/presentationml/2006/main" xmlns:r="http://schemas.openxmlformats.org/officeDocument/2006/relationships">
+<p:notesMaster xmlns:a="http://schemas.openxmlformats.org/drawingml/2006/main" xmlns:r="http://schemas.openxmlformats.org/officeDocument/2006/relationships" xmlns:p="http://schemas.openxmlformats.org/presentationml/2006/main">
   <p:cSld>
     <p:bg>
       <p:bgRef idx="1001">
@@ -182,7 +201,7 @@
       </p:grpSpPr>
       <p:sp>
         <p:nvSpPr>
-          <p:cNvPr id="2" name="Header Placeholder 1"/>
+          <p:cNvPr id="2" name="머리글 개체 틀 1"/>
           <p:cNvSpPr>
             <a:spLocks noGrp="1"/>
           </p:cNvSpPr>
@@ -193,7 +212,7 @@
         <p:spPr>
           <a:xfrm>
             <a:off x="0" y="0"/>
-            <a:ext cx="2971800" cy="457200"/>
+            <a:ext cx="2971800" cy="458788"/>
           </a:xfrm>
           <a:prstGeom prst="rect">
             <a:avLst/>
@@ -207,13 +226,13 @@
             </a:lvl1pPr>
           </a:lstStyle>
           <a:p>
-            <a:endParaRPr lang="en-US"/>
-          </a:p>
-        </p:txBody>
-      </p:sp>
-      <p:sp>
-        <p:nvSpPr>
-          <p:cNvPr id="3" name="Date Placeholder 2"/>
+            <a:endParaRPr lang="ko-KR" altLang="en-US"/>
+          </a:p>
+        </p:txBody>
+      </p:sp>
+      <p:sp>
+        <p:nvSpPr>
+          <p:cNvPr id="3" name="날짜 개체 틀 2"/>
           <p:cNvSpPr>
             <a:spLocks noGrp="1"/>
           </p:cNvSpPr>
@@ -224,7 +243,7 @@
         <p:spPr>
           <a:xfrm>
             <a:off x="3884613" y="0"/>
-            <a:ext cx="2971800" cy="457200"/>
+            <a:ext cx="2971800" cy="458788"/>
           </a:xfrm>
           <a:prstGeom prst="rect">
             <a:avLst/>
@@ -238,17 +257,17 @@
             </a:lvl1pPr>
           </a:lstStyle>
           <a:p>
-            <a:fld id="{0F89C1C7-3DCD-1040-A9CF-14679D8B5DDD}" type="datetimeFigureOut">
-              <a:rPr lang="en-US" smtClean="0"/>
-              <a:t>10/17/16</a:t>
+            <a:fld id="{580117D0-DA67-464D-89F1-ACEB5F5533D8}" type="datetimeFigureOut">
+              <a:rPr lang="ko-KR" altLang="en-US" smtClean="0"/>
+              <a:t>2026-10-29</a:t>
             </a:fld>
-            <a:endParaRPr lang="en-US"/>
-          </a:p>
-        </p:txBody>
-      </p:sp>
-      <p:sp>
-        <p:nvSpPr>
-          <p:cNvPr id="4" name="Slide Image Placeholder 3"/>
+            <a:endParaRPr lang="ko-KR" altLang="en-US"/>
+          </a:p>
+        </p:txBody>
+      </p:sp>
+      <p:sp>
+        <p:nvSpPr>
+          <p:cNvPr id="4" name="슬라이드 이미지 개체 틀 3"/>
           <p:cNvSpPr>
             <a:spLocks noGrp="1" noRot="1" noChangeAspect="1"/>
           </p:cNvSpPr>
@@ -258,8 +277,8 @@
         </p:nvSpPr>
         <p:spPr>
           <a:xfrm>
-            <a:off x="1143000" y="685800"/>
-            <a:ext cx="4572000" cy="3429000"/>
+            <a:off x="685800" y="1143000"/>
+            <a:ext cx="5486400" cy="3086100"/>
           </a:xfrm>
           <a:prstGeom prst="rect">
             <a:avLst/>
@@ -275,13 +294,13 @@
           <a:bodyPr vert="horz" lIns="91440" tIns="45720" rIns="91440" bIns="45720" rtlCol="0" anchor="ctr"/>
           <a:lstStyle/>
           <a:p>
-            <a:endParaRPr lang="en-US"/>
-          </a:p>
-        </p:txBody>
-      </p:sp>
-      <p:sp>
-        <p:nvSpPr>
-          <p:cNvPr id="5" name="Notes Placeholder 4"/>
+            <a:endParaRPr lang="ko-KR" altLang="en-US"/>
+          </a:p>
+        </p:txBody>
+      </p:sp>
+      <p:sp>
+        <p:nvSpPr>
+          <p:cNvPr id="5" name="슬라이드 노트 개체 틀 4"/>
           <p:cNvSpPr>
             <a:spLocks noGrp="1"/>
           </p:cNvSpPr>
@@ -291,8 +310,8 @@
         </p:nvSpPr>
         <p:spPr>
           <a:xfrm>
-            <a:off x="685800" y="4343400"/>
-            <a:ext cx="5486400" cy="4114800"/>
+            <a:off x="685800" y="4400550"/>
+            <a:ext cx="5486400" cy="3600450"/>
           </a:xfrm>
           <a:prstGeom prst="rect">
             <a:avLst/>
@@ -304,44 +323,43 @@
           <a:p>
             <a:pPr lvl="0"/>
             <a:r>
-              <a:rPr lang="en-US" smtClean="0"/>
-              <a:t>Click to edit Master text styles</a:t>
+              <a:rPr lang="ko-KR" altLang="en-US"/>
+              <a:t>마스터 텍스트 스타일을 편집하려면 클릭</a:t>
             </a:r>
           </a:p>
           <a:p>
             <a:pPr lvl="1"/>
             <a:r>
-              <a:rPr lang="en-US" smtClean="0"/>
-              <a:t>Second level</a:t>
+              <a:rPr lang="ko-KR" altLang="en-US"/>
+              <a:t>두 번째 수준</a:t>
             </a:r>
           </a:p>
           <a:p>
             <a:pPr lvl="2"/>
             <a:r>
-              <a:rPr lang="en-US" smtClean="0"/>
-              <a:t>Third level</a:t>
+              <a:rPr lang="ko-KR" altLang="en-US"/>
+              <a:t>세 번째 수준</a:t>
             </a:r>
           </a:p>
           <a:p>
             <a:pPr lvl="3"/>
             <a:r>
-              <a:rPr lang="en-US" smtClean="0"/>
-              <a:t>Fourth level</a:t>
+              <a:rPr lang="ko-KR" altLang="en-US"/>
+              <a:t>네 번째 수준</a:t>
             </a:r>
           </a:p>
           <a:p>
             <a:pPr lvl="4"/>
             <a:r>
-              <a:rPr lang="en-US" smtClean="0"/>
-              <a:t>Fifth level</a:t>
-            </a:r>
-            <a:endParaRPr lang="en-US"/>
-          </a:p>
-        </p:txBody>
-      </p:sp>
-      <p:sp>
-        <p:nvSpPr>
-          <p:cNvPr id="6" name="Footer Placeholder 5"/>
+              <a:rPr lang="ko-KR" altLang="en-US"/>
+              <a:t>다섯 번째 수준</a:t>
+            </a:r>
+          </a:p>
+        </p:txBody>
+      </p:sp>
+      <p:sp>
+        <p:nvSpPr>
+          <p:cNvPr id="6" name="바닥글 개체 틀 5"/>
           <p:cNvSpPr>
             <a:spLocks noGrp="1"/>
           </p:cNvSpPr>
@@ -352,7 +370,7 @@
         <p:spPr>
           <a:xfrm>
             <a:off x="0" y="8685213"/>
-            <a:ext cx="2971800" cy="457200"/>
+            <a:ext cx="2971800" cy="458787"/>
           </a:xfrm>
           <a:prstGeom prst="rect">
             <a:avLst/>
@@ -366,13 +384,13 @@
             </a:lvl1pPr>
           </a:lstStyle>
           <a:p>
-            <a:endParaRPr lang="en-US"/>
-          </a:p>
-        </p:txBody>
-      </p:sp>
-      <p:sp>
-        <p:nvSpPr>
-          <p:cNvPr id="7" name="Slide Number Placeholder 6"/>
+            <a:endParaRPr lang="ko-KR" altLang="en-US"/>
+          </a:p>
+        </p:txBody>
+      </p:sp>
+      <p:sp>
+        <p:nvSpPr>
+          <p:cNvPr id="7" name="슬라이드 번호 개체 틀 6"/>
           <p:cNvSpPr>
             <a:spLocks noGrp="1"/>
           </p:cNvSpPr>
@@ -383,7 +401,7 @@
         <p:spPr>
           <a:xfrm>
             <a:off x="3884613" y="8685213"/>
-            <a:ext cx="2971800" cy="457200"/>
+            <a:ext cx="2971800" cy="458787"/>
           </a:xfrm>
           <a:prstGeom prst="rect">
             <a:avLst/>
@@ -397,24 +415,24 @@
             </a:lvl1pPr>
           </a:lstStyle>
           <a:p>
-            <a:fld id="{BB5E49A5-4136-284D-997B-48E1D791AD67}" type="slidenum">
-              <a:rPr lang="en-US" smtClean="0"/>
+            <a:fld id="{9063E5E1-8FBA-4254-9F34-616025EDDE61}" type="slidenum">
+              <a:rPr lang="ko-KR" altLang="en-US" smtClean="0"/>
               <a:t>‹#›</a:t>
             </a:fld>
-            <a:endParaRPr lang="en-US"/>
+            <a:endParaRPr lang="ko-KR" altLang="en-US"/>
           </a:p>
         </p:txBody>
       </p:sp>
     </p:spTree>
     <p:extLst>
       <p:ext uri="{BB962C8B-B14F-4D97-AF65-F5344CB8AC3E}">
-        <p14:creationId xmlns:p14="http://schemas.microsoft.com/office/powerpoint/2010/main" val="2623252185"/>
+        <p14:creationId xmlns:p14="http://schemas.microsoft.com/office/powerpoint/2010/main" val="5980807"/>
       </p:ext>
     </p:extLst>
   </p:cSld>
   <p:clrMap bg1="lt1" tx1="dk1" bg2="lt2" tx2="dk2" accent1="accent1" accent2="accent2" accent3="accent3" accent4="accent4" accent5="accent5" accent6="accent6" hlink="hlink" folHlink="folHlink"/>
   <p:notesStyle>
-    <a:lvl1pPr marL="0" algn="l" defTabSz="457200" rtl="0" eaLnBrk="1" latinLnBrk="0" hangingPunct="1">
+    <a:lvl1pPr marL="0" algn="l" defTabSz="914400" rtl="0" eaLnBrk="1" latinLnBrk="1" hangingPunct="1">
       <a:defRPr sz="1200" kern="1200">
         <a:solidFill>
           <a:schemeClr val="tx1"/>
@@ -424,7 +442,7 @@
         <a:cs typeface="+mn-cs"/>
       </a:defRPr>
     </a:lvl1pPr>
-    <a:lvl2pPr marL="457200" algn="l" defTabSz="457200" rtl="0" eaLnBrk="1" latinLnBrk="0" hangingPunct="1">
+    <a:lvl2pPr marL="457200" algn="l" defTabSz="914400" rtl="0" eaLnBrk="1" latinLnBrk="1" hangingPunct="1">
       <a:defRPr sz="1200" kern="1200">
         <a:solidFill>
           <a:schemeClr val="tx1"/>
@@ -434,7 +452,7 @@
         <a:cs typeface="+mn-cs"/>
       </a:defRPr>
     </a:lvl2pPr>
-    <a:lvl3pPr marL="914400" algn="l" defTabSz="457200" rtl="0" eaLnBrk="1" latinLnBrk="0" hangingPunct="1">
+    <a:lvl3pPr marL="914400" algn="l" defTabSz="914400" rtl="0" eaLnBrk="1" latinLnBrk="1" hangingPunct="1">
       <a:defRPr sz="1200" kern="1200">
         <a:solidFill>
           <a:schemeClr val="tx1"/>
@@ -444,7 +462,7 @@
         <a:cs typeface="+mn-cs"/>
       </a:defRPr>
     </a:lvl3pPr>
-    <a:lvl4pPr marL="1371600" algn="l" defTabSz="457200" rtl="0" eaLnBrk="1" latinLnBrk="0" hangingPunct="1">
+    <a:lvl4pPr marL="1371600" algn="l" defTabSz="914400" rtl="0" eaLnBrk="1" latinLnBrk="1" hangingPunct="1">
       <a:defRPr sz="1200" kern="1200">
         <a:solidFill>
           <a:schemeClr val="tx1"/>
@@ -454,7 +472,7 @@
         <a:cs typeface="+mn-cs"/>
       </a:defRPr>
     </a:lvl4pPr>
-    <a:lvl5pPr marL="1828800" algn="l" defTabSz="457200" rtl="0" eaLnBrk="1" latinLnBrk="0" hangingPunct="1">
+    <a:lvl5pPr marL="1828800" algn="l" defTabSz="914400" rtl="0" eaLnBrk="1" latinLnBrk="1" hangingPunct="1">
       <a:defRPr sz="1200" kern="1200">
         <a:solidFill>
           <a:schemeClr val="tx1"/>
@@ -464,7 +482,7 @@
         <a:cs typeface="+mn-cs"/>
       </a:defRPr>
     </a:lvl5pPr>
-    <a:lvl6pPr marL="2286000" algn="l" defTabSz="457200" rtl="0" eaLnBrk="1" latinLnBrk="0" hangingPunct="1">
+    <a:lvl6pPr marL="2286000" algn="l" defTabSz="914400" rtl="0" eaLnBrk="1" latinLnBrk="1" hangingPunct="1">
       <a:defRPr sz="1200" kern="1200">
         <a:solidFill>
           <a:schemeClr val="tx1"/>
@@ -474,7 +492,7 @@
         <a:cs typeface="+mn-cs"/>
       </a:defRPr>
     </a:lvl6pPr>
-    <a:lvl7pPr marL="2743200" algn="l" defTabSz="457200" rtl="0" eaLnBrk="1" latinLnBrk="0" hangingPunct="1">
+    <a:lvl7pPr marL="2743200" algn="l" defTabSz="914400" rtl="0" eaLnBrk="1" latinLnBrk="1" hangingPunct="1">
       <a:defRPr sz="1200" kern="1200">
         <a:solidFill>
           <a:schemeClr val="tx1"/>
@@ -484,7 +502,7 @@
         <a:cs typeface="+mn-cs"/>
       </a:defRPr>
     </a:lvl7pPr>
-    <a:lvl8pPr marL="3200400" algn="l" defTabSz="457200" rtl="0" eaLnBrk="1" latinLnBrk="0" hangingPunct="1">
+    <a:lvl8pPr marL="3200400" algn="l" defTabSz="914400" rtl="0" eaLnBrk="1" latinLnBrk="1" hangingPunct="1">
       <a:defRPr sz="1200" kern="1200">
         <a:solidFill>
           <a:schemeClr val="tx1"/>
@@ -494,7 +512,7 @@
         <a:cs typeface="+mn-cs"/>
       </a:defRPr>
     </a:lvl8pPr>
-    <a:lvl9pPr marL="3657600" algn="l" defTabSz="457200" rtl="0" eaLnBrk="1" latinLnBrk="0" hangingPunct="1">
+    <a:lvl9pPr marL="3657600" algn="l" defTabSz="914400" rtl="0" eaLnBrk="1" latinLnBrk="1" hangingPunct="1">
       <a:defRPr sz="1200" kern="1200">
         <a:solidFill>
           <a:schemeClr val="tx1"/>
@@ -509,7 +527,7 @@
 </file>
 
 <file path=ppt/notesSlides/notesSlide1.xml><?xml version="1.0" encoding="utf-8"?>
-<p:notes xmlns:a="http://schemas.openxmlformats.org/drawingml/2006/main" xmlns:p="http://schemas.openxmlformats.org/presentationml/2006/main" xmlns:r="http://schemas.openxmlformats.org/officeDocument/2006/relationships">
+<p:notes xmlns:a="http://schemas.openxmlformats.org/drawingml/2006/main" xmlns:r="http://schemas.openxmlformats.org/officeDocument/2006/relationships" xmlns:p="http://schemas.openxmlformats.org/presentationml/2006/main">
   <p:cSld>
     <p:spTree>
       <p:nvGrpSpPr>
@@ -529,7 +547,7 @@
         <p:nvSpPr>
           <p:cNvPr id="2" name="Slide Image Placeholder 1"/>
           <p:cNvSpPr>
-            <a:spLocks noGrp="1"/>
+            <a:spLocks noGrp="1" noRot="1" noChangeAspect="1"/>
           </p:cNvSpPr>
           <p:nvPr>
             <p:ph type="sldImg" idx="2"/>
@@ -544,7 +562,7 @@
             <a:spLocks noGrp="1"/>
           </p:cNvSpPr>
           <p:nvPr>
-            <p:ph type="body" idx="3" sz="quarter"/>
+            <p:ph type="body" sz="quarter" idx="3"/>
           </p:nvPr>
         </p:nvSpPr>
         <p:spPr/>
@@ -565,7 +583,7 @@
             <a:spLocks noGrp="1"/>
           </p:cNvSpPr>
           <p:nvPr>
-            <p:ph type="sldNum" idx="5" sz="quarter"/>
+            <p:ph type="sldNum" sz="quarter" idx="5"/>
           </p:nvPr>
         </p:nvSpPr>
         <p:spPr/>
@@ -579,7 +597,7 @@
 </file>
 
 <file path=ppt/notesSlides/notesSlide10.xml><?xml version="1.0" encoding="utf-8"?>
-<p:notes xmlns:a="http://schemas.openxmlformats.org/drawingml/2006/main" xmlns:p="http://schemas.openxmlformats.org/presentationml/2006/main" xmlns:r="http://schemas.openxmlformats.org/officeDocument/2006/relationships">
+<p:notes xmlns:a="http://schemas.openxmlformats.org/drawingml/2006/main" xmlns:r="http://schemas.openxmlformats.org/officeDocument/2006/relationships" xmlns:p="http://schemas.openxmlformats.org/presentationml/2006/main">
   <p:cSld>
     <p:spTree>
       <p:nvGrpSpPr>
@@ -599,7 +617,7 @@
         <p:nvSpPr>
           <p:cNvPr id="2" name="Slide Image Placeholder 1"/>
           <p:cNvSpPr>
-            <a:spLocks noGrp="1"/>
+            <a:spLocks noGrp="1" noRot="1" noChangeAspect="1"/>
           </p:cNvSpPr>
           <p:nvPr>
             <p:ph type="sldImg" idx="2"/>
@@ -614,7 +632,7 @@
             <a:spLocks noGrp="1"/>
           </p:cNvSpPr>
           <p:nvPr>
-            <p:ph type="body" idx="3" sz="quarter"/>
+            <p:ph type="body" sz="quarter" idx="3"/>
           </p:nvPr>
         </p:nvSpPr>
         <p:spPr/>
@@ -635,7 +653,7 @@
             <a:spLocks noGrp="1"/>
           </p:cNvSpPr>
           <p:nvPr>
-            <p:ph type="sldNum" idx="5" sz="quarter"/>
+            <p:ph type="sldNum" sz="quarter" idx="5"/>
           </p:nvPr>
         </p:nvSpPr>
         <p:spPr/>
@@ -649,7 +667,7 @@
 </file>
 
 <file path=ppt/notesSlides/notesSlide11.xml><?xml version="1.0" encoding="utf-8"?>
-<p:notes xmlns:a="http://schemas.openxmlformats.org/drawingml/2006/main" xmlns:p="http://schemas.openxmlformats.org/presentationml/2006/main" xmlns:r="http://schemas.openxmlformats.org/officeDocument/2006/relationships">
+<p:notes xmlns:a="http://schemas.openxmlformats.org/drawingml/2006/main" xmlns:r="http://schemas.openxmlformats.org/officeDocument/2006/relationships" xmlns:p="http://schemas.openxmlformats.org/presentationml/2006/main">
   <p:cSld>
     <p:spTree>
       <p:nvGrpSpPr>
@@ -669,7 +687,7 @@
         <p:nvSpPr>
           <p:cNvPr id="2" name="Slide Image Placeholder 1"/>
           <p:cNvSpPr>
-            <a:spLocks noGrp="1"/>
+            <a:spLocks noGrp="1" noRot="1" noChangeAspect="1"/>
           </p:cNvSpPr>
           <p:nvPr>
             <p:ph type="sldImg" idx="2"/>
@@ -684,7 +702,7 @@
             <a:spLocks noGrp="1"/>
           </p:cNvSpPr>
           <p:nvPr>
-            <p:ph type="body" idx="3" sz="quarter"/>
+            <p:ph type="body" sz="quarter" idx="3"/>
           </p:nvPr>
         </p:nvSpPr>
         <p:spPr/>
@@ -705,7 +723,7 @@
             <a:spLocks noGrp="1"/>
           </p:cNvSpPr>
           <p:nvPr>
-            <p:ph type="sldNum" idx="5" sz="quarter"/>
+            <p:ph type="sldNum" sz="quarter" idx="5"/>
           </p:nvPr>
         </p:nvSpPr>
         <p:spPr/>
@@ -719,7 +737,7 @@
 </file>
 
 <file path=ppt/notesSlides/notesSlide12.xml><?xml version="1.0" encoding="utf-8"?>
-<p:notes xmlns:a="http://schemas.openxmlformats.org/drawingml/2006/main" xmlns:p="http://schemas.openxmlformats.org/presentationml/2006/main" xmlns:r="http://schemas.openxmlformats.org/officeDocument/2006/relationships">
+<p:notes xmlns:a="http://schemas.openxmlformats.org/drawingml/2006/main" xmlns:r="http://schemas.openxmlformats.org/officeDocument/2006/relationships" xmlns:p="http://schemas.openxmlformats.org/presentationml/2006/main">
   <p:cSld>
     <p:spTree>
       <p:nvGrpSpPr>
@@ -739,7 +757,7 @@
         <p:nvSpPr>
           <p:cNvPr id="2" name="Slide Image Placeholder 1"/>
           <p:cNvSpPr>
-            <a:spLocks noGrp="1"/>
+            <a:spLocks noGrp="1" noRot="1" noChangeAspect="1"/>
           </p:cNvSpPr>
           <p:nvPr>
             <p:ph type="sldImg" idx="2"/>
@@ -754,7 +772,7 @@
             <a:spLocks noGrp="1"/>
           </p:cNvSpPr>
           <p:nvPr>
-            <p:ph type="body" idx="3" sz="quarter"/>
+            <p:ph type="body" sz="quarter" idx="3"/>
           </p:nvPr>
         </p:nvSpPr>
         <p:spPr/>
@@ -775,7 +793,7 @@
             <a:spLocks noGrp="1"/>
           </p:cNvSpPr>
           <p:nvPr>
-            <p:ph type="sldNum" idx="5" sz="quarter"/>
+            <p:ph type="sldNum" sz="quarter" idx="5"/>
           </p:nvPr>
         </p:nvSpPr>
         <p:spPr/>
@@ -789,7 +807,7 @@
 </file>
 
 <file path=ppt/notesSlides/notesSlide13.xml><?xml version="1.0" encoding="utf-8"?>
-<p:notes xmlns:a="http://schemas.openxmlformats.org/drawingml/2006/main" xmlns:p="http://schemas.openxmlformats.org/presentationml/2006/main" xmlns:r="http://schemas.openxmlformats.org/officeDocument/2006/relationships">
+<p:notes xmlns:a="http://schemas.openxmlformats.org/drawingml/2006/main" xmlns:r="http://schemas.openxmlformats.org/officeDocument/2006/relationships" xmlns:p="http://schemas.openxmlformats.org/presentationml/2006/main">
   <p:cSld>
     <p:spTree>
       <p:nvGrpSpPr>
@@ -809,7 +827,7 @@
         <p:nvSpPr>
           <p:cNvPr id="2" name="Slide Image Placeholder 1"/>
           <p:cNvSpPr>
-            <a:spLocks noGrp="1"/>
+            <a:spLocks noGrp="1" noRot="1" noChangeAspect="1"/>
           </p:cNvSpPr>
           <p:nvPr>
             <p:ph type="sldImg" idx="2"/>
@@ -824,7 +842,7 @@
             <a:spLocks noGrp="1"/>
           </p:cNvSpPr>
           <p:nvPr>
-            <p:ph type="body" idx="3" sz="quarter"/>
+            <p:ph type="body" sz="quarter" idx="3"/>
           </p:nvPr>
         </p:nvSpPr>
         <p:spPr/>
@@ -845,7 +863,7 @@
             <a:spLocks noGrp="1"/>
           </p:cNvSpPr>
           <p:nvPr>
-            <p:ph type="sldNum" idx="5" sz="quarter"/>
+            <p:ph type="sldNum" sz="quarter" idx="5"/>
           </p:nvPr>
         </p:nvSpPr>
         <p:spPr/>
@@ -859,7 +877,7 @@
 </file>
 
 <file path=ppt/notesSlides/notesSlide14.xml><?xml version="1.0" encoding="utf-8"?>
-<p:notes xmlns:a="http://schemas.openxmlformats.org/drawingml/2006/main" xmlns:p="http://schemas.openxmlformats.org/presentationml/2006/main" xmlns:r="http://schemas.openxmlformats.org/officeDocument/2006/relationships">
+<p:notes xmlns:a="http://schemas.openxmlformats.org/drawingml/2006/main" xmlns:r="http://schemas.openxmlformats.org/officeDocument/2006/relationships" xmlns:p="http://schemas.openxmlformats.org/presentationml/2006/main">
   <p:cSld>
     <p:spTree>
       <p:nvGrpSpPr>
@@ -879,7 +897,7 @@
         <p:nvSpPr>
           <p:cNvPr id="2" name="Slide Image Placeholder 1"/>
           <p:cNvSpPr>
-            <a:spLocks noGrp="1"/>
+            <a:spLocks noGrp="1" noRot="1" noChangeAspect="1"/>
           </p:cNvSpPr>
           <p:nvPr>
             <p:ph type="sldImg" idx="2"/>
@@ -894,7 +912,7 @@
             <a:spLocks noGrp="1"/>
           </p:cNvSpPr>
           <p:nvPr>
-            <p:ph type="body" idx="3" sz="quarter"/>
+            <p:ph type="body" sz="quarter" idx="3"/>
           </p:nvPr>
         </p:nvSpPr>
         <p:spPr/>
@@ -915,7 +933,7 @@
             <a:spLocks noGrp="1"/>
           </p:cNvSpPr>
           <p:nvPr>
-            <p:ph type="sldNum" idx="5" sz="quarter"/>
+            <p:ph type="sldNum" sz="quarter" idx="5"/>
           </p:nvPr>
         </p:nvSpPr>
         <p:spPr/>
@@ -929,7 +947,7 @@
 </file>
 
 <file path=ppt/notesSlides/notesSlide15.xml><?xml version="1.0" encoding="utf-8"?>
-<p:notes xmlns:a="http://schemas.openxmlformats.org/drawingml/2006/main" xmlns:p="http://schemas.openxmlformats.org/presentationml/2006/main" xmlns:r="http://schemas.openxmlformats.org/officeDocument/2006/relationships">
+<p:notes xmlns:a="http://schemas.openxmlformats.org/drawingml/2006/main" xmlns:r="http://schemas.openxmlformats.org/officeDocument/2006/relationships" xmlns:p="http://schemas.openxmlformats.org/presentationml/2006/main">
   <p:cSld>
     <p:spTree>
       <p:nvGrpSpPr>
@@ -949,7 +967,7 @@
         <p:nvSpPr>
           <p:cNvPr id="2" name="Slide Image Placeholder 1"/>
           <p:cNvSpPr>
-            <a:spLocks noGrp="1"/>
+            <a:spLocks noGrp="1" noRot="1" noChangeAspect="1"/>
           </p:cNvSpPr>
           <p:nvPr>
             <p:ph type="sldImg" idx="2"/>
@@ -964,7 +982,7 @@
             <a:spLocks noGrp="1"/>
           </p:cNvSpPr>
           <p:nvPr>
-            <p:ph type="body" idx="3" sz="quarter"/>
+            <p:ph type="body" sz="quarter" idx="3"/>
           </p:nvPr>
         </p:nvSpPr>
         <p:spPr/>
@@ -985,7 +1003,7 @@
             <a:spLocks noGrp="1"/>
           </p:cNvSpPr>
           <p:nvPr>
-            <p:ph type="sldNum" idx="5" sz="quarter"/>
+            <p:ph type="sldNum" sz="quarter" idx="5"/>
           </p:nvPr>
         </p:nvSpPr>
         <p:spPr/>
@@ -999,7 +1017,7 @@
 </file>
 
 <file path=ppt/notesSlides/notesSlide16.xml><?xml version="1.0" encoding="utf-8"?>
-<p:notes xmlns:a="http://schemas.openxmlformats.org/drawingml/2006/main" xmlns:p="http://schemas.openxmlformats.org/presentationml/2006/main" xmlns:r="http://schemas.openxmlformats.org/officeDocument/2006/relationships">
+<p:notes xmlns:a="http://schemas.openxmlformats.org/drawingml/2006/main" xmlns:r="http://schemas.openxmlformats.org/officeDocument/2006/relationships" xmlns:p="http://schemas.openxmlformats.org/presentationml/2006/main">
   <p:cSld>
     <p:spTree>
       <p:nvGrpSpPr>
@@ -1019,7 +1037,7 @@
         <p:nvSpPr>
           <p:cNvPr id="2" name="Slide Image Placeholder 1"/>
           <p:cNvSpPr>
-            <a:spLocks noGrp="1"/>
+            <a:spLocks noGrp="1" noRot="1" noChangeAspect="1"/>
           </p:cNvSpPr>
           <p:nvPr>
             <p:ph type="sldImg" idx="2"/>
@@ -1034,7 +1052,7 @@
             <a:spLocks noGrp="1"/>
           </p:cNvSpPr>
           <p:nvPr>
-            <p:ph type="body" idx="3" sz="quarter"/>
+            <p:ph type="body" sz="quarter" idx="3"/>
           </p:nvPr>
         </p:nvSpPr>
         <p:spPr/>
@@ -1055,7 +1073,7 @@
             <a:spLocks noGrp="1"/>
           </p:cNvSpPr>
           <p:nvPr>
-            <p:ph type="sldNum" idx="5" sz="quarter"/>
+            <p:ph type="sldNum" sz="quarter" idx="5"/>
           </p:nvPr>
         </p:nvSpPr>
         <p:spPr/>
@@ -1069,7 +1087,7 @@
 </file>
 
 <file path=ppt/notesSlides/notesSlide17.xml><?xml version="1.0" encoding="utf-8"?>
-<p:notes xmlns:a="http://schemas.openxmlformats.org/drawingml/2006/main" xmlns:p="http://schemas.openxmlformats.org/presentationml/2006/main" xmlns:r="http://schemas.openxmlformats.org/officeDocument/2006/relationships">
+<p:notes xmlns:a="http://schemas.openxmlformats.org/drawingml/2006/main" xmlns:r="http://schemas.openxmlformats.org/officeDocument/2006/relationships" xmlns:p="http://schemas.openxmlformats.org/presentationml/2006/main">
   <p:cSld>
     <p:spTree>
       <p:nvGrpSpPr>
@@ -1089,7 +1107,7 @@
         <p:nvSpPr>
           <p:cNvPr id="2" name="Slide Image Placeholder 1"/>
           <p:cNvSpPr>
-            <a:spLocks noGrp="1"/>
+            <a:spLocks noGrp="1" noRot="1" noChangeAspect="1"/>
           </p:cNvSpPr>
           <p:nvPr>
             <p:ph type="sldImg" idx="2"/>
@@ -1104,7 +1122,7 @@
             <a:spLocks noGrp="1"/>
           </p:cNvSpPr>
           <p:nvPr>
-            <p:ph type="body" idx="3" sz="quarter"/>
+            <p:ph type="body" sz="quarter" idx="3"/>
           </p:nvPr>
         </p:nvSpPr>
         <p:spPr/>
@@ -1125,7 +1143,7 @@
             <a:spLocks noGrp="1"/>
           </p:cNvSpPr>
           <p:nvPr>
-            <p:ph type="sldNum" idx="5" sz="quarter"/>
+            <p:ph type="sldNum" sz="quarter" idx="5"/>
           </p:nvPr>
         </p:nvSpPr>
         <p:spPr/>
@@ -1139,7 +1157,7 @@
 </file>
 
 <file path=ppt/notesSlides/notesSlide18.xml><?xml version="1.0" encoding="utf-8"?>
-<p:notes xmlns:a="http://schemas.openxmlformats.org/drawingml/2006/main" xmlns:p="http://schemas.openxmlformats.org/presentationml/2006/main" xmlns:r="http://schemas.openxmlformats.org/officeDocument/2006/relationships">
+<p:notes xmlns:a="http://schemas.openxmlformats.org/drawingml/2006/main" xmlns:r="http://schemas.openxmlformats.org/officeDocument/2006/relationships" xmlns:p="http://schemas.openxmlformats.org/presentationml/2006/main">
   <p:cSld>
     <p:spTree>
       <p:nvGrpSpPr>
@@ -1159,7 +1177,7 @@
         <p:nvSpPr>
           <p:cNvPr id="2" name="Slide Image Placeholder 1"/>
           <p:cNvSpPr>
-            <a:spLocks noGrp="1"/>
+            <a:spLocks noGrp="1" noRot="1" noChangeAspect="1"/>
           </p:cNvSpPr>
           <p:nvPr>
             <p:ph type="sldImg" idx="2"/>
@@ -1174,7 +1192,7 @@
             <a:spLocks noGrp="1"/>
           </p:cNvSpPr>
           <p:nvPr>
-            <p:ph type="body" idx="3" sz="quarter"/>
+            <p:ph type="body" sz="quarter" idx="3"/>
           </p:nvPr>
         </p:nvSpPr>
         <p:spPr/>
@@ -1195,7 +1213,7 @@
             <a:spLocks noGrp="1"/>
           </p:cNvSpPr>
           <p:nvPr>
-            <p:ph type="sldNum" idx="5" sz="quarter"/>
+            <p:ph type="sldNum" sz="quarter" idx="5"/>
           </p:nvPr>
         </p:nvSpPr>
         <p:spPr/>
@@ -1209,7 +1227,7 @@
 </file>
 
 <file path=ppt/notesSlides/notesSlide19.xml><?xml version="1.0" encoding="utf-8"?>
-<p:notes xmlns:a="http://schemas.openxmlformats.org/drawingml/2006/main" xmlns:p="http://schemas.openxmlformats.org/presentationml/2006/main" xmlns:r="http://schemas.openxmlformats.org/officeDocument/2006/relationships">
+<p:notes xmlns:a="http://schemas.openxmlformats.org/drawingml/2006/main" xmlns:r="http://schemas.openxmlformats.org/officeDocument/2006/relationships" xmlns:p="http://schemas.openxmlformats.org/presentationml/2006/main">
   <p:cSld>
     <p:spTree>
       <p:nvGrpSpPr>
@@ -1229,7 +1247,7 @@
         <p:nvSpPr>
           <p:cNvPr id="2" name="Slide Image Placeholder 1"/>
           <p:cNvSpPr>
-            <a:spLocks noGrp="1"/>
+            <a:spLocks noGrp="1" noRot="1" noChangeAspect="1"/>
           </p:cNvSpPr>
           <p:nvPr>
             <p:ph type="sldImg" idx="2"/>
@@ -1244,7 +1262,7 @@
             <a:spLocks noGrp="1"/>
           </p:cNvSpPr>
           <p:nvPr>
-            <p:ph type="body" idx="3" sz="quarter"/>
+            <p:ph type="body" sz="quarter" idx="3"/>
           </p:nvPr>
         </p:nvSpPr>
         <p:spPr/>
@@ -1265,7 +1283,7 @@
             <a:spLocks noGrp="1"/>
           </p:cNvSpPr>
           <p:nvPr>
-            <p:ph type="sldNum" idx="5" sz="quarter"/>
+            <p:ph type="sldNum" sz="quarter" idx="5"/>
           </p:nvPr>
         </p:nvSpPr>
         <p:spPr/>
@@ -1279,7 +1297,7 @@
 </file>
 
 <file path=ppt/notesSlides/notesSlide2.xml><?xml version="1.0" encoding="utf-8"?>
-<p:notes xmlns:a="http://schemas.openxmlformats.org/drawingml/2006/main" xmlns:p="http://schemas.openxmlformats.org/presentationml/2006/main" xmlns:r="http://schemas.openxmlformats.org/officeDocument/2006/relationships">
+<p:notes xmlns:a="http://schemas.openxmlformats.org/drawingml/2006/main" xmlns:r="http://schemas.openxmlformats.org/officeDocument/2006/relationships" xmlns:p="http://schemas.openxmlformats.org/presentationml/2006/main">
   <p:cSld>
     <p:spTree>
       <p:nvGrpSpPr>
@@ -1299,7 +1317,7 @@
         <p:nvSpPr>
           <p:cNvPr id="2" name="Slide Image Placeholder 1"/>
           <p:cNvSpPr>
-            <a:spLocks noGrp="1"/>
+            <a:spLocks noGrp="1" noRot="1" noChangeAspect="1"/>
           </p:cNvSpPr>
           <p:nvPr>
             <p:ph type="sldImg" idx="2"/>
@@ -1314,7 +1332,7 @@
             <a:spLocks noGrp="1"/>
           </p:cNvSpPr>
           <p:nvPr>
-            <p:ph type="body" idx="3" sz="quarter"/>
+            <p:ph type="body" sz="quarter" idx="3"/>
           </p:nvPr>
         </p:nvSpPr>
         <p:spPr/>
@@ -1335,7 +1353,7 @@
             <a:spLocks noGrp="1"/>
           </p:cNvSpPr>
           <p:nvPr>
-            <p:ph type="sldNum" idx="5" sz="quarter"/>
+            <p:ph type="sldNum" sz="quarter" idx="5"/>
           </p:nvPr>
         </p:nvSpPr>
         <p:spPr/>
@@ -1349,7 +1367,7 @@
 </file>
 
 <file path=ppt/notesSlides/notesSlide20.xml><?xml version="1.0" encoding="utf-8"?>
-<p:notes xmlns:a="http://schemas.openxmlformats.org/drawingml/2006/main" xmlns:p="http://schemas.openxmlformats.org/presentationml/2006/main" xmlns:r="http://schemas.openxmlformats.org/officeDocument/2006/relationships">
+<p:notes xmlns:a="http://schemas.openxmlformats.org/drawingml/2006/main" xmlns:r="http://schemas.openxmlformats.org/officeDocument/2006/relationships" xmlns:p="http://schemas.openxmlformats.org/presentationml/2006/main">
   <p:cSld>
     <p:spTree>
       <p:nvGrpSpPr>
@@ -1369,7 +1387,7 @@
         <p:nvSpPr>
           <p:cNvPr id="2" name="Slide Image Placeholder 1"/>
           <p:cNvSpPr>
-            <a:spLocks noGrp="1"/>
+            <a:spLocks noGrp="1" noRot="1" noChangeAspect="1"/>
           </p:cNvSpPr>
           <p:nvPr>
             <p:ph type="sldImg" idx="2"/>
@@ -1384,7 +1402,7 @@
             <a:spLocks noGrp="1"/>
           </p:cNvSpPr>
           <p:nvPr>
-            <p:ph type="body" idx="3" sz="quarter"/>
+            <p:ph type="body" sz="quarter" idx="3"/>
           </p:nvPr>
         </p:nvSpPr>
         <p:spPr/>
@@ -1405,7 +1423,7 @@
             <a:spLocks noGrp="1"/>
           </p:cNvSpPr>
           <p:nvPr>
-            <p:ph type="sldNum" idx="5" sz="quarter"/>
+            <p:ph type="sldNum" sz="quarter" idx="5"/>
           </p:nvPr>
         </p:nvSpPr>
         <p:spPr/>
@@ -1419,7 +1437,7 @@
 </file>
 
 <file path=ppt/notesSlides/notesSlide21.xml><?xml version="1.0" encoding="utf-8"?>
-<p:notes xmlns:a="http://schemas.openxmlformats.org/drawingml/2006/main" xmlns:p="http://schemas.openxmlformats.org/presentationml/2006/main" xmlns:r="http://schemas.openxmlformats.org/officeDocument/2006/relationships">
+<p:notes xmlns:a="http://schemas.openxmlformats.org/drawingml/2006/main" xmlns:r="http://schemas.openxmlformats.org/officeDocument/2006/relationships" xmlns:p="http://schemas.openxmlformats.org/presentationml/2006/main">
   <p:cSld>
     <p:spTree>
       <p:nvGrpSpPr>
@@ -1439,7 +1457,7 @@
         <p:nvSpPr>
           <p:cNvPr id="2" name="Slide Image Placeholder 1"/>
           <p:cNvSpPr>
-            <a:spLocks noGrp="1"/>
+            <a:spLocks noGrp="1" noRot="1" noChangeAspect="1"/>
           </p:cNvSpPr>
           <p:nvPr>
             <p:ph type="sldImg" idx="2"/>
@@ -1454,7 +1472,7 @@
             <a:spLocks noGrp="1"/>
           </p:cNvSpPr>
           <p:nvPr>
-            <p:ph type="body" idx="3" sz="quarter"/>
+            <p:ph type="body" sz="quarter" idx="3"/>
           </p:nvPr>
         </p:nvSpPr>
         <p:spPr/>
@@ -1475,7 +1493,7 @@
             <a:spLocks noGrp="1"/>
           </p:cNvSpPr>
           <p:nvPr>
-            <p:ph type="sldNum" idx="5" sz="quarter"/>
+            <p:ph type="sldNum" sz="quarter" idx="5"/>
           </p:nvPr>
         </p:nvSpPr>
         <p:spPr/>
@@ -1489,7 +1507,7 @@
 </file>
 
 <file path=ppt/notesSlides/notesSlide22.xml><?xml version="1.0" encoding="utf-8"?>
-<p:notes xmlns:a="http://schemas.openxmlformats.org/drawingml/2006/main" xmlns:p="http://schemas.openxmlformats.org/presentationml/2006/main" xmlns:r="http://schemas.openxmlformats.org/officeDocument/2006/relationships">
+<p:notes xmlns:a="http://schemas.openxmlformats.org/drawingml/2006/main" xmlns:r="http://schemas.openxmlformats.org/officeDocument/2006/relationships" xmlns:p="http://schemas.openxmlformats.org/presentationml/2006/main">
   <p:cSld>
     <p:spTree>
       <p:nvGrpSpPr>
@@ -1509,7 +1527,7 @@
         <p:nvSpPr>
           <p:cNvPr id="2" name="Slide Image Placeholder 1"/>
           <p:cNvSpPr>
-            <a:spLocks noGrp="1"/>
+            <a:spLocks noGrp="1" noRot="1" noChangeAspect="1"/>
           </p:cNvSpPr>
           <p:nvPr>
             <p:ph type="sldImg" idx="2"/>
@@ -1524,7 +1542,7 @@
             <a:spLocks noGrp="1"/>
           </p:cNvSpPr>
           <p:nvPr>
-            <p:ph type="body" idx="3" sz="quarter"/>
+            <p:ph type="body" sz="quarter" idx="3"/>
           </p:nvPr>
         </p:nvSpPr>
         <p:spPr/>
@@ -1545,7 +1563,7 @@
             <a:spLocks noGrp="1"/>
           </p:cNvSpPr>
           <p:nvPr>
-            <p:ph type="sldNum" idx="5" sz="quarter"/>
+            <p:ph type="sldNum" sz="quarter" idx="5"/>
           </p:nvPr>
         </p:nvSpPr>
         <p:spPr/>
@@ -1559,7 +1577,7 @@
 </file>
 
 <file path=ppt/notesSlides/notesSlide23.xml><?xml version="1.0" encoding="utf-8"?>
-<p:notes xmlns:a="http://schemas.openxmlformats.org/drawingml/2006/main" xmlns:p="http://schemas.openxmlformats.org/presentationml/2006/main" xmlns:r="http://schemas.openxmlformats.org/officeDocument/2006/relationships">
+<p:notes xmlns:a="http://schemas.openxmlformats.org/drawingml/2006/main" xmlns:r="http://schemas.openxmlformats.org/officeDocument/2006/relationships" xmlns:p="http://schemas.openxmlformats.org/presentationml/2006/main">
   <p:cSld>
     <p:spTree>
       <p:nvGrpSpPr>
@@ -1579,7 +1597,7 @@
         <p:nvSpPr>
           <p:cNvPr id="2" name="Slide Image Placeholder 1"/>
           <p:cNvSpPr>
-            <a:spLocks noGrp="1"/>
+            <a:spLocks noGrp="1" noRot="1" noChangeAspect="1"/>
           </p:cNvSpPr>
           <p:nvPr>
             <p:ph type="sldImg" idx="2"/>
@@ -1594,7 +1612,7 @@
             <a:spLocks noGrp="1"/>
           </p:cNvSpPr>
           <p:nvPr>
-            <p:ph type="body" idx="3" sz="quarter"/>
+            <p:ph type="body" sz="quarter" idx="3"/>
           </p:nvPr>
         </p:nvSpPr>
         <p:spPr/>
@@ -1615,7 +1633,7 @@
             <a:spLocks noGrp="1"/>
           </p:cNvSpPr>
           <p:nvPr>
-            <p:ph type="sldNum" idx="5" sz="quarter"/>
+            <p:ph type="sldNum" sz="quarter" idx="5"/>
           </p:nvPr>
         </p:nvSpPr>
         <p:spPr/>
@@ -1629,7 +1647,7 @@
 </file>
 
 <file path=ppt/notesSlides/notesSlide24.xml><?xml version="1.0" encoding="utf-8"?>
-<p:notes xmlns:a="http://schemas.openxmlformats.org/drawingml/2006/main" xmlns:p="http://schemas.openxmlformats.org/presentationml/2006/main" xmlns:r="http://schemas.openxmlformats.org/officeDocument/2006/relationships">
+<p:notes xmlns:a="http://schemas.openxmlformats.org/drawingml/2006/main" xmlns:r="http://schemas.openxmlformats.org/officeDocument/2006/relationships" xmlns:p="http://schemas.openxmlformats.org/presentationml/2006/main">
   <p:cSld>
     <p:spTree>
       <p:nvGrpSpPr>
@@ -1649,7 +1667,7 @@
         <p:nvSpPr>
           <p:cNvPr id="2" name="Slide Image Placeholder 1"/>
           <p:cNvSpPr>
-            <a:spLocks noGrp="1"/>
+            <a:spLocks noGrp="1" noRot="1" noChangeAspect="1"/>
           </p:cNvSpPr>
           <p:nvPr>
             <p:ph type="sldImg" idx="2"/>
@@ -1664,7 +1682,7 @@
             <a:spLocks noGrp="1"/>
           </p:cNvSpPr>
           <p:nvPr>
-            <p:ph type="body" idx="3" sz="quarter"/>
+            <p:ph type="body" sz="quarter" idx="3"/>
           </p:nvPr>
         </p:nvSpPr>
         <p:spPr/>
@@ -1685,7 +1703,7 @@
             <a:spLocks noGrp="1"/>
           </p:cNvSpPr>
           <p:nvPr>
-            <p:ph type="sldNum" idx="5" sz="quarter"/>
+            <p:ph type="sldNum" sz="quarter" idx="5"/>
           </p:nvPr>
         </p:nvSpPr>
         <p:spPr/>
@@ -1699,7 +1717,7 @@
 </file>
 
 <file path=ppt/notesSlides/notesSlide25.xml><?xml version="1.0" encoding="utf-8"?>
-<p:notes xmlns:a="http://schemas.openxmlformats.org/drawingml/2006/main" xmlns:p="http://schemas.openxmlformats.org/presentationml/2006/main" xmlns:r="http://schemas.openxmlformats.org/officeDocument/2006/relationships">
+<p:notes xmlns:a="http://schemas.openxmlformats.org/drawingml/2006/main" xmlns:r="http://schemas.openxmlformats.org/officeDocument/2006/relationships" xmlns:p="http://schemas.openxmlformats.org/presentationml/2006/main">
   <p:cSld>
     <p:spTree>
       <p:nvGrpSpPr>
@@ -1719,7 +1737,7 @@
         <p:nvSpPr>
           <p:cNvPr id="2" name="Slide Image Placeholder 1"/>
           <p:cNvSpPr>
-            <a:spLocks noGrp="1"/>
+            <a:spLocks noGrp="1" noRot="1" noChangeAspect="1"/>
           </p:cNvSpPr>
           <p:nvPr>
             <p:ph type="sldImg" idx="2"/>
@@ -1734,7 +1752,7 @@
             <a:spLocks noGrp="1"/>
           </p:cNvSpPr>
           <p:nvPr>
-            <p:ph type="body" idx="3" sz="quarter"/>
+            <p:ph type="body" sz="quarter" idx="3"/>
           </p:nvPr>
         </p:nvSpPr>
         <p:spPr/>
@@ -1755,7 +1773,7 @@
             <a:spLocks noGrp="1"/>
           </p:cNvSpPr>
           <p:nvPr>
-            <p:ph type="sldNum" idx="5" sz="quarter"/>
+            <p:ph type="sldNum" sz="quarter" idx="5"/>
           </p:nvPr>
         </p:nvSpPr>
         <p:spPr/>
@@ -1769,7 +1787,7 @@
 </file>
 
 <file path=ppt/notesSlides/notesSlide26.xml><?xml version="1.0" encoding="utf-8"?>
-<p:notes xmlns:a="http://schemas.openxmlformats.org/drawingml/2006/main" xmlns:p="http://schemas.openxmlformats.org/presentationml/2006/main" xmlns:r="http://schemas.openxmlformats.org/officeDocument/2006/relationships">
+<p:notes xmlns:a="http://schemas.openxmlformats.org/drawingml/2006/main" xmlns:r="http://schemas.openxmlformats.org/officeDocument/2006/relationships" xmlns:p="http://schemas.openxmlformats.org/presentationml/2006/main">
   <p:cSld>
     <p:spTree>
       <p:nvGrpSpPr>
@@ -1789,7 +1807,7 @@
         <p:nvSpPr>
           <p:cNvPr id="2" name="Slide Image Placeholder 1"/>
           <p:cNvSpPr>
-            <a:spLocks noGrp="1"/>
+            <a:spLocks noGrp="1" noRot="1" noChangeAspect="1"/>
           </p:cNvSpPr>
           <p:nvPr>
             <p:ph type="sldImg" idx="2"/>
@@ -1804,7 +1822,7 @@
             <a:spLocks noGrp="1"/>
           </p:cNvSpPr>
           <p:nvPr>
-            <p:ph type="body" idx="3" sz="quarter"/>
+            <p:ph type="body" sz="quarter" idx="3"/>
           </p:nvPr>
         </p:nvSpPr>
         <p:spPr/>
@@ -1825,7 +1843,7 @@
             <a:spLocks noGrp="1"/>
           </p:cNvSpPr>
           <p:nvPr>
-            <p:ph type="sldNum" idx="5" sz="quarter"/>
+            <p:ph type="sldNum" sz="quarter" idx="5"/>
           </p:nvPr>
         </p:nvSpPr>
         <p:spPr/>
@@ -1839,7 +1857,7 @@
 </file>
 
 <file path=ppt/notesSlides/notesSlide27.xml><?xml version="1.0" encoding="utf-8"?>
-<p:notes xmlns:a="http://schemas.openxmlformats.org/drawingml/2006/main" xmlns:p="http://schemas.openxmlformats.org/presentationml/2006/main" xmlns:r="http://schemas.openxmlformats.org/officeDocument/2006/relationships">
+<p:notes xmlns:a="http://schemas.openxmlformats.org/drawingml/2006/main" xmlns:r="http://schemas.openxmlformats.org/officeDocument/2006/relationships" xmlns:p="http://schemas.openxmlformats.org/presentationml/2006/main">
   <p:cSld>
     <p:spTree>
       <p:nvGrpSpPr>
@@ -1859,7 +1877,7 @@
         <p:nvSpPr>
           <p:cNvPr id="2" name="Slide Image Placeholder 1"/>
           <p:cNvSpPr>
-            <a:spLocks noGrp="1"/>
+            <a:spLocks noGrp="1" noRot="1" noChangeAspect="1"/>
           </p:cNvSpPr>
           <p:nvPr>
             <p:ph type="sldImg" idx="2"/>
@@ -1874,7 +1892,7 @@
             <a:spLocks noGrp="1"/>
           </p:cNvSpPr>
           <p:nvPr>
-            <p:ph type="body" idx="3" sz="quarter"/>
+            <p:ph type="body" sz="quarter" idx="3"/>
           </p:nvPr>
         </p:nvSpPr>
         <p:spPr/>
@@ -1895,7 +1913,7 @@
             <a:spLocks noGrp="1"/>
           </p:cNvSpPr>
           <p:nvPr>
-            <p:ph type="sldNum" idx="5" sz="quarter"/>
+            <p:ph type="sldNum" sz="quarter" idx="5"/>
           </p:nvPr>
         </p:nvSpPr>
         <p:spPr/>
@@ -1909,7 +1927,7 @@
 </file>
 
 <file path=ppt/notesSlides/notesSlide28.xml><?xml version="1.0" encoding="utf-8"?>
-<p:notes xmlns:a="http://schemas.openxmlformats.org/drawingml/2006/main" xmlns:p="http://schemas.openxmlformats.org/presentationml/2006/main" xmlns:r="http://schemas.openxmlformats.org/officeDocument/2006/relationships">
+<p:notes xmlns:a="http://schemas.openxmlformats.org/drawingml/2006/main" xmlns:r="http://schemas.openxmlformats.org/officeDocument/2006/relationships" xmlns:p="http://schemas.openxmlformats.org/presentationml/2006/main">
   <p:cSld>
     <p:spTree>
       <p:nvGrpSpPr>
@@ -1929,7 +1947,7 @@
         <p:nvSpPr>
           <p:cNvPr id="2" name="Slide Image Placeholder 1"/>
           <p:cNvSpPr>
-            <a:spLocks noGrp="1"/>
+            <a:spLocks noGrp="1" noRot="1" noChangeAspect="1"/>
           </p:cNvSpPr>
           <p:nvPr>
             <p:ph type="sldImg" idx="2"/>
@@ -1944,7 +1962,7 @@
             <a:spLocks noGrp="1"/>
           </p:cNvSpPr>
           <p:nvPr>
-            <p:ph type="body" idx="3" sz="quarter"/>
+            <p:ph type="body" sz="quarter" idx="3"/>
           </p:nvPr>
         </p:nvSpPr>
         <p:spPr/>
@@ -1965,7 +1983,7 @@
             <a:spLocks noGrp="1"/>
           </p:cNvSpPr>
           <p:nvPr>
-            <p:ph type="sldNum" idx="5" sz="quarter"/>
+            <p:ph type="sldNum" sz="quarter" idx="5"/>
           </p:nvPr>
         </p:nvSpPr>
         <p:spPr/>
@@ -1979,7 +1997,7 @@
 </file>
 
 <file path=ppt/notesSlides/notesSlide29.xml><?xml version="1.0" encoding="utf-8"?>
-<p:notes xmlns:a="http://schemas.openxmlformats.org/drawingml/2006/main" xmlns:p="http://schemas.openxmlformats.org/presentationml/2006/main" xmlns:r="http://schemas.openxmlformats.org/officeDocument/2006/relationships">
+<p:notes xmlns:a="http://schemas.openxmlformats.org/drawingml/2006/main" xmlns:r="http://schemas.openxmlformats.org/officeDocument/2006/relationships" xmlns:p="http://schemas.openxmlformats.org/presentationml/2006/main">
   <p:cSld>
     <p:spTree>
       <p:nvGrpSpPr>
@@ -1999,7 +2017,7 @@
         <p:nvSpPr>
           <p:cNvPr id="2" name="Slide Image Placeholder 1"/>
           <p:cNvSpPr>
-            <a:spLocks noGrp="1"/>
+            <a:spLocks noGrp="1" noRot="1" noChangeAspect="1"/>
           </p:cNvSpPr>
           <p:nvPr>
             <p:ph type="sldImg" idx="2"/>
@@ -2014,7 +2032,7 @@
             <a:spLocks noGrp="1"/>
           </p:cNvSpPr>
           <p:nvPr>
-            <p:ph type="body" idx="3" sz="quarter"/>
+            <p:ph type="body" sz="quarter" idx="3"/>
           </p:nvPr>
         </p:nvSpPr>
         <p:spPr/>
@@ -2035,7 +2053,7 @@
             <a:spLocks noGrp="1"/>
           </p:cNvSpPr>
           <p:nvPr>
-            <p:ph type="sldNum" idx="5" sz="quarter"/>
+            <p:ph type="sldNum" sz="quarter" idx="5"/>
           </p:nvPr>
         </p:nvSpPr>
         <p:spPr/>
@@ -2049,7 +2067,7 @@
 </file>
 
 <file path=ppt/notesSlides/notesSlide3.xml><?xml version="1.0" encoding="utf-8"?>
-<p:notes xmlns:a="http://schemas.openxmlformats.org/drawingml/2006/main" xmlns:p="http://schemas.openxmlformats.org/presentationml/2006/main" xmlns:r="http://schemas.openxmlformats.org/officeDocument/2006/relationships">
+<p:notes xmlns:a="http://schemas.openxmlformats.org/drawingml/2006/main" xmlns:r="http://schemas.openxmlformats.org/officeDocument/2006/relationships" xmlns:p="http://schemas.openxmlformats.org/presentationml/2006/main">
   <p:cSld>
     <p:spTree>
       <p:nvGrpSpPr>
@@ -2069,7 +2087,7 @@
         <p:nvSpPr>
           <p:cNvPr id="2" name="Slide Image Placeholder 1"/>
           <p:cNvSpPr>
-            <a:spLocks noGrp="1"/>
+            <a:spLocks noGrp="1" noRot="1" noChangeAspect="1"/>
           </p:cNvSpPr>
           <p:nvPr>
             <p:ph type="sldImg" idx="2"/>
@@ -2084,7 +2102,7 @@
             <a:spLocks noGrp="1"/>
           </p:cNvSpPr>
           <p:nvPr>
-            <p:ph type="body" idx="3" sz="quarter"/>
+            <p:ph type="body" sz="quarter" idx="3"/>
           </p:nvPr>
         </p:nvSpPr>
         <p:spPr/>
@@ -2105,7 +2123,7 @@
             <a:spLocks noGrp="1"/>
           </p:cNvSpPr>
           <p:nvPr>
-            <p:ph type="sldNum" idx="5" sz="quarter"/>
+            <p:ph type="sldNum" sz="quarter" idx="5"/>
           </p:nvPr>
         </p:nvSpPr>
         <p:spPr/>
@@ -2119,7 +2137,7 @@
 </file>
 
 <file path=ppt/notesSlides/notesSlide30.xml><?xml version="1.0" encoding="utf-8"?>
-<p:notes xmlns:a="http://schemas.openxmlformats.org/drawingml/2006/main" xmlns:p="http://schemas.openxmlformats.org/presentationml/2006/main" xmlns:r="http://schemas.openxmlformats.org/officeDocument/2006/relationships">
+<p:notes xmlns:a="http://schemas.openxmlformats.org/drawingml/2006/main" xmlns:r="http://schemas.openxmlformats.org/officeDocument/2006/relationships" xmlns:p="http://schemas.openxmlformats.org/presentationml/2006/main">
   <p:cSld>
     <p:spTree>
       <p:nvGrpSpPr>
@@ -2139,7 +2157,7 @@
         <p:nvSpPr>
           <p:cNvPr id="2" name="Slide Image Placeholder 1"/>
           <p:cNvSpPr>
-            <a:spLocks noGrp="1"/>
+            <a:spLocks noGrp="1" noRot="1" noChangeAspect="1"/>
           </p:cNvSpPr>
           <p:nvPr>
             <p:ph type="sldImg" idx="2"/>
@@ -2154,7 +2172,7 @@
             <a:spLocks noGrp="1"/>
           </p:cNvSpPr>
           <p:nvPr>
-            <p:ph type="body" idx="3" sz="quarter"/>
+            <p:ph type="body" sz="quarter" idx="3"/>
           </p:nvPr>
         </p:nvSpPr>
         <p:spPr/>
@@ -2175,7 +2193,7 @@
             <a:spLocks noGrp="1"/>
           </p:cNvSpPr>
           <p:nvPr>
-            <p:ph type="sldNum" idx="5" sz="quarter"/>
+            <p:ph type="sldNum" sz="quarter" idx="5"/>
           </p:nvPr>
         </p:nvSpPr>
         <p:spPr/>
@@ -2189,7 +2207,7 @@
 </file>
 
 <file path=ppt/notesSlides/notesSlide31.xml><?xml version="1.0" encoding="utf-8"?>
-<p:notes xmlns:a="http://schemas.openxmlformats.org/drawingml/2006/main" xmlns:p="http://schemas.openxmlformats.org/presentationml/2006/main" xmlns:r="http://schemas.openxmlformats.org/officeDocument/2006/relationships">
+<p:notes xmlns:a="http://schemas.openxmlformats.org/drawingml/2006/main" xmlns:r="http://schemas.openxmlformats.org/officeDocument/2006/relationships" xmlns:p="http://schemas.openxmlformats.org/presentationml/2006/main">
   <p:cSld>
     <p:spTree>
       <p:nvGrpSpPr>
@@ -2209,7 +2227,7 @@
         <p:nvSpPr>
           <p:cNvPr id="2" name="Slide Image Placeholder 1"/>
           <p:cNvSpPr>
-            <a:spLocks noGrp="1"/>
+            <a:spLocks noGrp="1" noRot="1" noChangeAspect="1"/>
           </p:cNvSpPr>
           <p:nvPr>
             <p:ph type="sldImg" idx="2"/>
@@ -2224,7 +2242,7 @@
             <a:spLocks noGrp="1"/>
           </p:cNvSpPr>
           <p:nvPr>
-            <p:ph type="body" idx="3" sz="quarter"/>
+            <p:ph type="body" sz="quarter" idx="3"/>
           </p:nvPr>
         </p:nvSpPr>
         <p:spPr/>
@@ -2245,7 +2263,7 @@
             <a:spLocks noGrp="1"/>
           </p:cNvSpPr>
           <p:nvPr>
-            <p:ph type="sldNum" idx="5" sz="quarter"/>
+            <p:ph type="sldNum" sz="quarter" idx="5"/>
           </p:nvPr>
         </p:nvSpPr>
         <p:spPr/>
@@ -2259,7 +2277,7 @@
 </file>
 
 <file path=ppt/notesSlides/notesSlide32.xml><?xml version="1.0" encoding="utf-8"?>
-<p:notes xmlns:a="http://schemas.openxmlformats.org/drawingml/2006/main" xmlns:p="http://schemas.openxmlformats.org/presentationml/2006/main" xmlns:r="http://schemas.openxmlformats.org/officeDocument/2006/relationships">
+<p:notes xmlns:a="http://schemas.openxmlformats.org/drawingml/2006/main" xmlns:r="http://schemas.openxmlformats.org/officeDocument/2006/relationships" xmlns:p="http://schemas.openxmlformats.org/presentationml/2006/main">
   <p:cSld>
     <p:spTree>
       <p:nvGrpSpPr>
@@ -2279,7 +2297,7 @@
         <p:nvSpPr>
           <p:cNvPr id="2" name="Slide Image Placeholder 1"/>
           <p:cNvSpPr>
-            <a:spLocks noGrp="1"/>
+            <a:spLocks noGrp="1" noRot="1" noChangeAspect="1"/>
           </p:cNvSpPr>
           <p:nvPr>
             <p:ph type="sldImg" idx="2"/>
@@ -2294,7 +2312,7 @@
             <a:spLocks noGrp="1"/>
           </p:cNvSpPr>
           <p:nvPr>
-            <p:ph type="body" idx="3" sz="quarter"/>
+            <p:ph type="body" sz="quarter" idx="3"/>
           </p:nvPr>
         </p:nvSpPr>
         <p:spPr/>
@@ -2315,7 +2333,7 @@
             <a:spLocks noGrp="1"/>
           </p:cNvSpPr>
           <p:nvPr>
-            <p:ph type="sldNum" idx="5" sz="quarter"/>
+            <p:ph type="sldNum" sz="quarter" idx="5"/>
           </p:nvPr>
         </p:nvSpPr>
         <p:spPr/>
@@ -2329,7 +2347,7 @@
 </file>
 
 <file path=ppt/notesSlides/notesSlide33.xml><?xml version="1.0" encoding="utf-8"?>
-<p:notes xmlns:a="http://schemas.openxmlformats.org/drawingml/2006/main" xmlns:p="http://schemas.openxmlformats.org/presentationml/2006/main" xmlns:r="http://schemas.openxmlformats.org/officeDocument/2006/relationships">
+<p:notes xmlns:a="http://schemas.openxmlformats.org/drawingml/2006/main" xmlns:r="http://schemas.openxmlformats.org/officeDocument/2006/relationships" xmlns:p="http://schemas.openxmlformats.org/presentationml/2006/main">
   <p:cSld>
     <p:spTree>
       <p:nvGrpSpPr>
@@ -2349,7 +2367,7 @@
         <p:nvSpPr>
           <p:cNvPr id="2" name="Slide Image Placeholder 1"/>
           <p:cNvSpPr>
-            <a:spLocks noGrp="1"/>
+            <a:spLocks noGrp="1" noRot="1" noChangeAspect="1"/>
           </p:cNvSpPr>
           <p:nvPr>
             <p:ph type="sldImg" idx="2"/>
@@ -2364,7 +2382,7 @@
             <a:spLocks noGrp="1"/>
           </p:cNvSpPr>
           <p:nvPr>
-            <p:ph type="body" idx="3" sz="quarter"/>
+            <p:ph type="body" sz="quarter" idx="3"/>
           </p:nvPr>
         </p:nvSpPr>
         <p:spPr/>
@@ -2385,7 +2403,7 @@
             <a:spLocks noGrp="1"/>
           </p:cNvSpPr>
           <p:nvPr>
-            <p:ph type="sldNum" idx="5" sz="quarter"/>
+            <p:ph type="sldNum" sz="quarter" idx="5"/>
           </p:nvPr>
         </p:nvSpPr>
         <p:spPr/>
@@ -2399,7 +2417,7 @@
 </file>
 
 <file path=ppt/notesSlides/notesSlide34.xml><?xml version="1.0" encoding="utf-8"?>
-<p:notes xmlns:a="http://schemas.openxmlformats.org/drawingml/2006/main" xmlns:p="http://schemas.openxmlformats.org/presentationml/2006/main" xmlns:r="http://schemas.openxmlformats.org/officeDocument/2006/relationships">
+<p:notes xmlns:a="http://schemas.openxmlformats.org/drawingml/2006/main" xmlns:r="http://schemas.openxmlformats.org/officeDocument/2006/relationships" xmlns:p="http://schemas.openxmlformats.org/presentationml/2006/main">
   <p:cSld>
     <p:spTree>
       <p:nvGrpSpPr>
@@ -2419,7 +2437,7 @@
         <p:nvSpPr>
           <p:cNvPr id="2" name="Slide Image Placeholder 1"/>
           <p:cNvSpPr>
-            <a:spLocks noGrp="1"/>
+            <a:spLocks noGrp="1" noRot="1" noChangeAspect="1"/>
           </p:cNvSpPr>
           <p:nvPr>
             <p:ph type="sldImg" idx="2"/>
@@ -2434,7 +2452,7 @@
             <a:spLocks noGrp="1"/>
           </p:cNvSpPr>
           <p:nvPr>
-            <p:ph type="body" idx="3" sz="quarter"/>
+            <p:ph type="body" sz="quarter" idx="3"/>
           </p:nvPr>
         </p:nvSpPr>
         <p:spPr/>
@@ -2455,7 +2473,7 @@
             <a:spLocks noGrp="1"/>
           </p:cNvSpPr>
           <p:nvPr>
-            <p:ph type="sldNum" idx="5" sz="quarter"/>
+            <p:ph type="sldNum" sz="quarter" idx="5"/>
           </p:nvPr>
         </p:nvSpPr>
         <p:spPr/>
@@ -2469,7 +2487,7 @@
 </file>
 
 <file path=ppt/notesSlides/notesSlide35.xml><?xml version="1.0" encoding="utf-8"?>
-<p:notes xmlns:a="http://schemas.openxmlformats.org/drawingml/2006/main" xmlns:p="http://schemas.openxmlformats.org/presentationml/2006/main" xmlns:r="http://schemas.openxmlformats.org/officeDocument/2006/relationships">
+<p:notes xmlns:a="http://schemas.openxmlformats.org/drawingml/2006/main" xmlns:r="http://schemas.openxmlformats.org/officeDocument/2006/relationships" xmlns:p="http://schemas.openxmlformats.org/presentationml/2006/main">
   <p:cSld>
     <p:spTree>
       <p:nvGrpSpPr>
@@ -2489,7 +2507,7 @@
         <p:nvSpPr>
           <p:cNvPr id="2" name="Slide Image Placeholder 1"/>
           <p:cNvSpPr>
-            <a:spLocks noGrp="1"/>
+            <a:spLocks noGrp="1" noRot="1" noChangeAspect="1"/>
           </p:cNvSpPr>
           <p:nvPr>
             <p:ph type="sldImg" idx="2"/>
@@ -2504,7 +2522,7 @@
             <a:spLocks noGrp="1"/>
           </p:cNvSpPr>
           <p:nvPr>
-            <p:ph type="body" idx="3" sz="quarter"/>
+            <p:ph type="body" sz="quarter" idx="3"/>
           </p:nvPr>
         </p:nvSpPr>
         <p:spPr/>
@@ -2525,7 +2543,7 @@
             <a:spLocks noGrp="1"/>
           </p:cNvSpPr>
           <p:nvPr>
-            <p:ph type="sldNum" idx="5" sz="quarter"/>
+            <p:ph type="sldNum" sz="quarter" idx="5"/>
           </p:nvPr>
         </p:nvSpPr>
         <p:spPr/>
@@ -2539,7 +2557,7 @@
 </file>
 
 <file path=ppt/notesSlides/notesSlide36.xml><?xml version="1.0" encoding="utf-8"?>
-<p:notes xmlns:a="http://schemas.openxmlformats.org/drawingml/2006/main" xmlns:p="http://schemas.openxmlformats.org/presentationml/2006/main" xmlns:r="http://schemas.openxmlformats.org/officeDocument/2006/relationships">
+<p:notes xmlns:a="http://schemas.openxmlformats.org/drawingml/2006/main" xmlns:r="http://schemas.openxmlformats.org/officeDocument/2006/relationships" xmlns:p="http://schemas.openxmlformats.org/presentationml/2006/main">
   <p:cSld>
     <p:spTree>
       <p:nvGrpSpPr>
@@ -2559,7 +2577,7 @@
         <p:nvSpPr>
           <p:cNvPr id="2" name="Slide Image Placeholder 1"/>
           <p:cNvSpPr>
-            <a:spLocks noGrp="1"/>
+            <a:spLocks noGrp="1" noRot="1" noChangeAspect="1"/>
           </p:cNvSpPr>
           <p:nvPr>
             <p:ph type="sldImg" idx="2"/>
@@ -2574,7 +2592,7 @@
             <a:spLocks noGrp="1"/>
           </p:cNvSpPr>
           <p:nvPr>
-            <p:ph type="body" idx="3" sz="quarter"/>
+            <p:ph type="body" sz="quarter" idx="3"/>
           </p:nvPr>
         </p:nvSpPr>
         <p:spPr/>
@@ -2595,7 +2613,7 @@
             <a:spLocks noGrp="1"/>
           </p:cNvSpPr>
           <p:nvPr>
-            <p:ph type="sldNum" idx="5" sz="quarter"/>
+            <p:ph type="sldNum" sz="quarter" idx="5"/>
           </p:nvPr>
         </p:nvSpPr>
         <p:spPr/>
@@ -2609,7 +2627,7 @@
 </file>
 
 <file path=ppt/notesSlides/notesSlide37.xml><?xml version="1.0" encoding="utf-8"?>
-<p:notes xmlns:a="http://schemas.openxmlformats.org/drawingml/2006/main" xmlns:p="http://schemas.openxmlformats.org/presentationml/2006/main" xmlns:r="http://schemas.openxmlformats.org/officeDocument/2006/relationships">
+<p:notes xmlns:a="http://schemas.openxmlformats.org/drawingml/2006/main" xmlns:r="http://schemas.openxmlformats.org/officeDocument/2006/relationships" xmlns:p="http://schemas.openxmlformats.org/presentationml/2006/main">
   <p:cSld>
     <p:spTree>
       <p:nvGrpSpPr>
@@ -2629,7 +2647,7 @@
         <p:nvSpPr>
           <p:cNvPr id="2" name="Slide Image Placeholder 1"/>
           <p:cNvSpPr>
-            <a:spLocks noGrp="1"/>
+            <a:spLocks noGrp="1" noRot="1" noChangeAspect="1"/>
           </p:cNvSpPr>
           <p:nvPr>
             <p:ph type="sldImg" idx="2"/>
@@ -2644,7 +2662,7 @@
             <a:spLocks noGrp="1"/>
           </p:cNvSpPr>
           <p:nvPr>
-            <p:ph type="body" idx="3" sz="quarter"/>
+            <p:ph type="body" sz="quarter" idx="3"/>
           </p:nvPr>
         </p:nvSpPr>
         <p:spPr/>
@@ -2665,7 +2683,7 @@
             <a:spLocks noGrp="1"/>
           </p:cNvSpPr>
           <p:nvPr>
-            <p:ph type="sldNum" idx="5" sz="quarter"/>
+            <p:ph type="sldNum" sz="quarter" idx="5"/>
           </p:nvPr>
         </p:nvSpPr>
         <p:spPr/>
@@ -2679,7 +2697,7 @@
 </file>
 
 <file path=ppt/notesSlides/notesSlide38.xml><?xml version="1.0" encoding="utf-8"?>
-<p:notes xmlns:a="http://schemas.openxmlformats.org/drawingml/2006/main" xmlns:p="http://schemas.openxmlformats.org/presentationml/2006/main" xmlns:r="http://schemas.openxmlformats.org/officeDocument/2006/relationships">
+<p:notes xmlns:a="http://schemas.openxmlformats.org/drawingml/2006/main" xmlns:r="http://schemas.openxmlformats.org/officeDocument/2006/relationships" xmlns:p="http://schemas.openxmlformats.org/presentationml/2006/main">
   <p:cSld>
     <p:spTree>
       <p:nvGrpSpPr>
@@ -2699,7 +2717,7 @@
         <p:nvSpPr>
           <p:cNvPr id="2" name="Slide Image Placeholder 1"/>
           <p:cNvSpPr>
-            <a:spLocks noGrp="1"/>
+            <a:spLocks noGrp="1" noRot="1" noChangeAspect="1"/>
           </p:cNvSpPr>
           <p:nvPr>
             <p:ph type="sldImg" idx="2"/>
@@ -2714,7 +2732,7 @@
             <a:spLocks noGrp="1"/>
           </p:cNvSpPr>
           <p:nvPr>
-            <p:ph type="body" idx="3" sz="quarter"/>
+            <p:ph type="body" sz="quarter" idx="3"/>
           </p:nvPr>
         </p:nvSpPr>
         <p:spPr/>
@@ -2735,7 +2753,7 @@
             <a:spLocks noGrp="1"/>
           </p:cNvSpPr>
           <p:nvPr>
-            <p:ph type="sldNum" idx="5" sz="quarter"/>
+            <p:ph type="sldNum" sz="quarter" idx="5"/>
           </p:nvPr>
         </p:nvSpPr>
         <p:spPr/>
@@ -2749,7 +2767,7 @@
 </file>
 
 <file path=ppt/notesSlides/notesSlide39.xml><?xml version="1.0" encoding="utf-8"?>
-<p:notes xmlns:a="http://schemas.openxmlformats.org/drawingml/2006/main" xmlns:p="http://schemas.openxmlformats.org/presentationml/2006/main" xmlns:r="http://schemas.openxmlformats.org/officeDocument/2006/relationships">
+<p:notes xmlns:a="http://schemas.openxmlformats.org/drawingml/2006/main" xmlns:r="http://schemas.openxmlformats.org/officeDocument/2006/relationships" xmlns:p="http://schemas.openxmlformats.org/presentationml/2006/main">
   <p:cSld>
     <p:spTree>
       <p:nvGrpSpPr>
@@ -2769,7 +2787,7 @@
         <p:nvSpPr>
           <p:cNvPr id="2" name="Slide Image Placeholder 1"/>
           <p:cNvSpPr>
-            <a:spLocks noGrp="1"/>
+            <a:spLocks noGrp="1" noRot="1" noChangeAspect="1"/>
           </p:cNvSpPr>
           <p:nvPr>
             <p:ph type="sldImg" idx="2"/>
@@ -2784,7 +2802,7 @@
             <a:spLocks noGrp="1"/>
           </p:cNvSpPr>
           <p:nvPr>
-            <p:ph type="body" idx="3" sz="quarter"/>
+            <p:ph type="body" sz="quarter" idx="3"/>
           </p:nvPr>
         </p:nvSpPr>
         <p:spPr/>
@@ -2805,7 +2823,7 @@
             <a:spLocks noGrp="1"/>
           </p:cNvSpPr>
           <p:nvPr>
-            <p:ph type="sldNum" idx="5" sz="quarter"/>
+            <p:ph type="sldNum" sz="quarter" idx="5"/>
           </p:nvPr>
         </p:nvSpPr>
         <p:spPr/>
@@ -2819,7 +2837,7 @@
 </file>
 
 <file path=ppt/notesSlides/notesSlide4.xml><?xml version="1.0" encoding="utf-8"?>
-<p:notes xmlns:a="http://schemas.openxmlformats.org/drawingml/2006/main" xmlns:p="http://schemas.openxmlformats.org/presentationml/2006/main" xmlns:r="http://schemas.openxmlformats.org/officeDocument/2006/relationships">
+<p:notes xmlns:a="http://schemas.openxmlformats.org/drawingml/2006/main" xmlns:r="http://schemas.openxmlformats.org/officeDocument/2006/relationships" xmlns:p="http://schemas.openxmlformats.org/presentationml/2006/main">
   <p:cSld>
     <p:spTree>
       <p:nvGrpSpPr>
@@ -2839,7 +2857,7 @@
         <p:nvSpPr>
           <p:cNvPr id="2" name="Slide Image Placeholder 1"/>
           <p:cNvSpPr>
-            <a:spLocks noGrp="1"/>
+            <a:spLocks noGrp="1" noRot="1" noChangeAspect="1"/>
           </p:cNvSpPr>
           <p:nvPr>
             <p:ph type="sldImg" idx="2"/>
@@ -2854,7 +2872,7 @@
             <a:spLocks noGrp="1"/>
           </p:cNvSpPr>
           <p:nvPr>
-            <p:ph type="body" idx="3" sz="quarter"/>
+            <p:ph type="body" sz="quarter" idx="3"/>
           </p:nvPr>
         </p:nvSpPr>
         <p:spPr/>
@@ -2875,7 +2893,7 @@
             <a:spLocks noGrp="1"/>
           </p:cNvSpPr>
           <p:nvPr>
-            <p:ph type="sldNum" idx="5" sz="quarter"/>
+            <p:ph type="sldNum" sz="quarter" idx="5"/>
           </p:nvPr>
         </p:nvSpPr>
         <p:spPr/>
@@ -2889,7 +2907,7 @@
 </file>
 
 <file path=ppt/notesSlides/notesSlide40.xml><?xml version="1.0" encoding="utf-8"?>
-<p:notes xmlns:a="http://schemas.openxmlformats.org/drawingml/2006/main" xmlns:p="http://schemas.openxmlformats.org/presentationml/2006/main" xmlns:r="http://schemas.openxmlformats.org/officeDocument/2006/relationships">
+<p:notes xmlns:a="http://schemas.openxmlformats.org/drawingml/2006/main" xmlns:r="http://schemas.openxmlformats.org/officeDocument/2006/relationships" xmlns:p="http://schemas.openxmlformats.org/presentationml/2006/main">
   <p:cSld>
     <p:spTree>
       <p:nvGrpSpPr>
@@ -2909,7 +2927,7 @@
         <p:nvSpPr>
           <p:cNvPr id="2" name="Slide Image Placeholder 1"/>
           <p:cNvSpPr>
-            <a:spLocks noGrp="1"/>
+            <a:spLocks noGrp="1" noRot="1" noChangeAspect="1"/>
           </p:cNvSpPr>
           <p:nvPr>
             <p:ph type="sldImg" idx="2"/>
@@ -2924,7 +2942,7 @@
             <a:spLocks noGrp="1"/>
           </p:cNvSpPr>
           <p:nvPr>
-            <p:ph type="body" idx="3" sz="quarter"/>
+            <p:ph type="body" sz="quarter" idx="3"/>
           </p:nvPr>
         </p:nvSpPr>
         <p:spPr/>
@@ -2945,7 +2963,7 @@
             <a:spLocks noGrp="1"/>
           </p:cNvSpPr>
           <p:nvPr>
-            <p:ph type="sldNum" idx="5" sz="quarter"/>
+            <p:ph type="sldNum" sz="quarter" idx="5"/>
           </p:nvPr>
         </p:nvSpPr>
         <p:spPr/>
@@ -2959,7 +2977,7 @@
 </file>
 
 <file path=ppt/notesSlides/notesSlide5.xml><?xml version="1.0" encoding="utf-8"?>
-<p:notes xmlns:a="http://schemas.openxmlformats.org/drawingml/2006/main" xmlns:p="http://schemas.openxmlformats.org/presentationml/2006/main" xmlns:r="http://schemas.openxmlformats.org/officeDocument/2006/relationships">
+<p:notes xmlns:a="http://schemas.openxmlformats.org/drawingml/2006/main" xmlns:r="http://schemas.openxmlformats.org/officeDocument/2006/relationships" xmlns:p="http://schemas.openxmlformats.org/presentationml/2006/main">
   <p:cSld>
     <p:spTree>
       <p:nvGrpSpPr>
@@ -2979,7 +2997,7 @@
         <p:nvSpPr>
           <p:cNvPr id="2" name="Slide Image Placeholder 1"/>
           <p:cNvSpPr>
-            <a:spLocks noGrp="1"/>
+            <a:spLocks noGrp="1" noRot="1" noChangeAspect="1"/>
           </p:cNvSpPr>
           <p:nvPr>
             <p:ph type="sldImg" idx="2"/>
@@ -2994,7 +3012,7 @@
             <a:spLocks noGrp="1"/>
           </p:cNvSpPr>
           <p:nvPr>
-            <p:ph type="body" idx="3" sz="quarter"/>
+            <p:ph type="body" sz="quarter" idx="3"/>
           </p:nvPr>
         </p:nvSpPr>
         <p:spPr/>
@@ -3015,7 +3033,7 @@
             <a:spLocks noGrp="1"/>
           </p:cNvSpPr>
           <p:nvPr>
-            <p:ph type="sldNum" idx="5" sz="quarter"/>
+            <p:ph type="sldNum" sz="quarter" idx="5"/>
           </p:nvPr>
         </p:nvSpPr>
         <p:spPr/>
@@ -3029,7 +3047,7 @@
 </file>
 
 <file path=ppt/notesSlides/notesSlide6.xml><?xml version="1.0" encoding="utf-8"?>
-<p:notes xmlns:a="http://schemas.openxmlformats.org/drawingml/2006/main" xmlns:p="http://schemas.openxmlformats.org/presentationml/2006/main" xmlns:r="http://schemas.openxmlformats.org/officeDocument/2006/relationships">
+<p:notes xmlns:a="http://schemas.openxmlformats.org/drawingml/2006/main" xmlns:r="http://schemas.openxmlformats.org/officeDocument/2006/relationships" xmlns:p="http://schemas.openxmlformats.org/presentationml/2006/main">
   <p:cSld>
     <p:spTree>
       <p:nvGrpSpPr>
@@ -3049,7 +3067,7 @@
         <p:nvSpPr>
           <p:cNvPr id="2" name="Slide Image Placeholder 1"/>
           <p:cNvSpPr>
-            <a:spLocks noGrp="1"/>
+            <a:spLocks noGrp="1" noRot="1" noChangeAspect="1"/>
           </p:cNvSpPr>
           <p:nvPr>
             <p:ph type="sldImg" idx="2"/>
@@ -3064,7 +3082,7 @@
             <a:spLocks noGrp="1"/>
           </p:cNvSpPr>
           <p:nvPr>
-            <p:ph type="body" idx="3" sz="quarter"/>
+            <p:ph type="body" sz="quarter" idx="3"/>
           </p:nvPr>
         </p:nvSpPr>
         <p:spPr/>
@@ -3085,7 +3103,7 @@
             <a:spLocks noGrp="1"/>
           </p:cNvSpPr>
           <p:nvPr>
-            <p:ph type="sldNum" idx="5" sz="quarter"/>
+            <p:ph type="sldNum" sz="quarter" idx="5"/>
           </p:nvPr>
         </p:nvSpPr>
         <p:spPr/>
@@ -3099,7 +3117,7 @@
 </file>
 
 <file path=ppt/notesSlides/notesSlide7.xml><?xml version="1.0" encoding="utf-8"?>
-<p:notes xmlns:a="http://schemas.openxmlformats.org/drawingml/2006/main" xmlns:p="http://schemas.openxmlformats.org/presentationml/2006/main" xmlns:r="http://schemas.openxmlformats.org/officeDocument/2006/relationships">
+<p:notes xmlns:a="http://schemas.openxmlformats.org/drawingml/2006/main" xmlns:r="http://schemas.openxmlformats.org/officeDocument/2006/relationships" xmlns:p="http://schemas.openxmlformats.org/presentationml/2006/main">
   <p:cSld>
     <p:spTree>
       <p:nvGrpSpPr>
@@ -3119,7 +3137,7 @@
         <p:nvSpPr>
           <p:cNvPr id="2" name="Slide Image Placeholder 1"/>
           <p:cNvSpPr>
-            <a:spLocks noGrp="1"/>
+            <a:spLocks noGrp="1" noRot="1" noChangeAspect="1"/>
           </p:cNvSpPr>
           <p:nvPr>
             <p:ph type="sldImg" idx="2"/>
@@ -3134,7 +3152,7 @@
             <a:spLocks noGrp="1"/>
           </p:cNvSpPr>
           <p:nvPr>
-            <p:ph type="body" idx="3" sz="quarter"/>
+            <p:ph type="body" sz="quarter" idx="3"/>
           </p:nvPr>
         </p:nvSpPr>
         <p:spPr/>
@@ -3155,7 +3173,7 @@
             <a:spLocks noGrp="1"/>
           </p:cNvSpPr>
           <p:nvPr>
-            <p:ph type="sldNum" idx="5" sz="quarter"/>
+            <p:ph type="sldNum" sz="quarter" idx="5"/>
           </p:nvPr>
         </p:nvSpPr>
         <p:spPr/>
@@ -3169,7 +3187,7 @@
 </file>
 
 <file path=ppt/notesSlides/notesSlide8.xml><?xml version="1.0" encoding="utf-8"?>
-<p:notes xmlns:a="http://schemas.openxmlformats.org/drawingml/2006/main" xmlns:p="http://schemas.openxmlformats.org/presentationml/2006/main" xmlns:r="http://schemas.openxmlformats.org/officeDocument/2006/relationships">
+<p:notes xmlns:a="http://schemas.openxmlformats.org/drawingml/2006/main" xmlns:r="http://schemas.openxmlformats.org/officeDocument/2006/relationships" xmlns:p="http://schemas.openxmlformats.org/presentationml/2006/main">
   <p:cSld>
     <p:spTree>
       <p:nvGrpSpPr>
@@ -3189,7 +3207,7 @@
         <p:nvSpPr>
           <p:cNvPr id="2" name="Slide Image Placeholder 1"/>
           <p:cNvSpPr>
-            <a:spLocks noGrp="1"/>
+            <a:spLocks noGrp="1" noRot="1" noChangeAspect="1"/>
           </p:cNvSpPr>
           <p:nvPr>
             <p:ph type="sldImg" idx="2"/>
@@ -3204,7 +3222,7 @@
             <a:spLocks noGrp="1"/>
           </p:cNvSpPr>
           <p:nvPr>
-            <p:ph type="body" idx="3" sz="quarter"/>
+            <p:ph type="body" sz="quarter" idx="3"/>
           </p:nvPr>
         </p:nvSpPr>
         <p:spPr/>
@@ -3225,7 +3243,7 @@
             <a:spLocks noGrp="1"/>
           </p:cNvSpPr>
           <p:nvPr>
-            <p:ph type="sldNum" idx="5" sz="quarter"/>
+            <p:ph type="sldNum" sz="quarter" idx="5"/>
           </p:nvPr>
         </p:nvSpPr>
         <p:spPr/>
@@ -3239,7 +3257,7 @@
 </file>
 
 <file path=ppt/notesSlides/notesSlide9.xml><?xml version="1.0" encoding="utf-8"?>
-<p:notes xmlns:a="http://schemas.openxmlformats.org/drawingml/2006/main" xmlns:p="http://schemas.openxmlformats.org/presentationml/2006/main" xmlns:r="http://schemas.openxmlformats.org/officeDocument/2006/relationships">
+<p:notes xmlns:a="http://schemas.openxmlformats.org/drawingml/2006/main" xmlns:r="http://schemas.openxmlformats.org/officeDocument/2006/relationships" xmlns:p="http://schemas.openxmlformats.org/presentationml/2006/main">
   <p:cSld>
     <p:spTree>
       <p:nvGrpSpPr>
@@ -3259,7 +3277,7 @@
         <p:nvSpPr>
           <p:cNvPr id="2" name="Slide Image Placeholder 1"/>
           <p:cNvSpPr>
-            <a:spLocks noGrp="1"/>
+            <a:spLocks noGrp="1" noRot="1" noChangeAspect="1"/>
           </p:cNvSpPr>
           <p:nvPr>
             <p:ph type="sldImg" idx="2"/>
@@ -3274,7 +3292,7 @@
             <a:spLocks noGrp="1"/>
           </p:cNvSpPr>
           <p:nvPr>
-            <p:ph type="body" idx="3" sz="quarter"/>
+            <p:ph type="body" sz="quarter" idx="3"/>
           </p:nvPr>
         </p:nvSpPr>
         <p:spPr/>
@@ -3295,7 +3313,7 @@
             <a:spLocks noGrp="1"/>
           </p:cNvSpPr>
           <p:nvPr>
-            <p:ph type="sldNum" idx="5" sz="quarter"/>
+            <p:ph type="sldNum" sz="quarter" idx="5"/>
           </p:nvPr>
         </p:nvSpPr>
         <p:spPr/>
@@ -3346,10 +3364,9 @@
           <a:lstStyle/>
           <a:p>
             <a:r>
-              <a:rPr lang="en-US" smtClean="0"/>
+              <a:rPr lang="en-US"/>
               <a:t>Click to edit Master title style</a:t>
             </a:r>
-            <a:endParaRPr lang="en-US"/>
           </a:p>
         </p:txBody>
       </p:sp>
@@ -3465,10 +3482,9 @@
           </a:lstStyle>
           <a:p>
             <a:r>
-              <a:rPr lang="en-US" smtClean="0"/>
+              <a:rPr lang="en-US"/>
               <a:t>Click to edit Master subtitle style</a:t>
             </a:r>
-            <a:endParaRPr lang="en-US"/>
           </a:p>
         </p:txBody>
       </p:sp>
@@ -3489,7 +3505,7 @@
           <a:p>
             <a:fld id="{5BCAD085-E8A6-8845-BD4E-CB4CCA059FC4}" type="datetimeFigureOut">
               <a:rPr lang="en-US" smtClean="0"/>
-              <a:t>1/27/13</a:t>
+              <a:t>10/29/2026</a:t>
             </a:fld>
             <a:endParaRPr lang="en-US"/>
           </a:p>
@@ -3583,10 +3599,9 @@
           <a:lstStyle/>
           <a:p>
             <a:r>
-              <a:rPr lang="en-US" smtClean="0"/>
+              <a:rPr lang="en-US"/>
               <a:t>Click to edit Master title style</a:t>
             </a:r>
-            <a:endParaRPr lang="en-US"/>
           </a:p>
         </p:txBody>
       </p:sp>
@@ -3607,38 +3622,37 @@
           <a:p>
             <a:pPr lvl="0"/>
             <a:r>
-              <a:rPr lang="en-US" smtClean="0"/>
+              <a:rPr lang="en-US"/>
               <a:t>Click to edit Master text styles</a:t>
             </a:r>
           </a:p>
           <a:p>
             <a:pPr lvl="1"/>
             <a:r>
-              <a:rPr lang="en-US" smtClean="0"/>
+              <a:rPr lang="en-US"/>
               <a:t>Second level</a:t>
             </a:r>
           </a:p>
           <a:p>
             <a:pPr lvl="2"/>
             <a:r>
-              <a:rPr lang="en-US" smtClean="0"/>
+              <a:rPr lang="en-US"/>
               <a:t>Third level</a:t>
             </a:r>
           </a:p>
           <a:p>
             <a:pPr lvl="3"/>
             <a:r>
-              <a:rPr lang="en-US" smtClean="0"/>
+              <a:rPr lang="en-US"/>
               <a:t>Fourth level</a:t>
             </a:r>
           </a:p>
           <a:p>
             <a:pPr lvl="4"/>
             <a:r>
-              <a:rPr lang="en-US" smtClean="0"/>
+              <a:rPr lang="en-US"/>
               <a:t>Fifth level</a:t>
             </a:r>
-            <a:endParaRPr lang="en-US"/>
           </a:p>
         </p:txBody>
       </p:sp>
@@ -3659,7 +3673,7 @@
           <a:p>
             <a:fld id="{5BCAD085-E8A6-8845-BD4E-CB4CCA059FC4}" type="datetimeFigureOut">
               <a:rPr lang="en-US" smtClean="0"/>
-              <a:t>1/27/13</a:t>
+              <a:t>10/29/2026</a:t>
             </a:fld>
             <a:endParaRPr lang="en-US"/>
           </a:p>
@@ -3758,10 +3772,9 @@
           <a:lstStyle/>
           <a:p>
             <a:r>
-              <a:rPr lang="en-US" smtClean="0"/>
+              <a:rPr lang="en-US"/>
               <a:t>Click to edit Master title style</a:t>
             </a:r>
-            <a:endParaRPr lang="en-US"/>
           </a:p>
         </p:txBody>
       </p:sp>
@@ -3787,38 +3800,37 @@
           <a:p>
             <a:pPr lvl="0"/>
             <a:r>
-              <a:rPr lang="en-US" smtClean="0"/>
+              <a:rPr lang="en-US"/>
               <a:t>Click to edit Master text styles</a:t>
             </a:r>
           </a:p>
           <a:p>
             <a:pPr lvl="1"/>
             <a:r>
-              <a:rPr lang="en-US" smtClean="0"/>
+              <a:rPr lang="en-US"/>
               <a:t>Second level</a:t>
             </a:r>
           </a:p>
           <a:p>
             <a:pPr lvl="2"/>
             <a:r>
-              <a:rPr lang="en-US" smtClean="0"/>
+              <a:rPr lang="en-US"/>
               <a:t>Third level</a:t>
             </a:r>
           </a:p>
           <a:p>
             <a:pPr lvl="3"/>
             <a:r>
-              <a:rPr lang="en-US" smtClean="0"/>
+              <a:rPr lang="en-US"/>
               <a:t>Fourth level</a:t>
             </a:r>
           </a:p>
           <a:p>
             <a:pPr lvl="4"/>
             <a:r>
-              <a:rPr lang="en-US" smtClean="0"/>
+              <a:rPr lang="en-US"/>
               <a:t>Fifth level</a:t>
             </a:r>
-            <a:endParaRPr lang="en-US"/>
           </a:p>
         </p:txBody>
       </p:sp>
@@ -3839,7 +3851,7 @@
           <a:p>
             <a:fld id="{5BCAD085-E8A6-8845-BD4E-CB4CCA059FC4}" type="datetimeFigureOut">
               <a:rPr lang="en-US" smtClean="0"/>
-              <a:t>1/27/13</a:t>
+              <a:t>10/29/2026</a:t>
             </a:fld>
             <a:endParaRPr lang="en-US"/>
           </a:p>
@@ -3933,10 +3945,9 @@
           <a:lstStyle/>
           <a:p>
             <a:r>
-              <a:rPr lang="en-US" smtClean="0"/>
+              <a:rPr lang="en-US"/>
               <a:t>Click to edit Master title style</a:t>
             </a:r>
-            <a:endParaRPr lang="en-US"/>
           </a:p>
         </p:txBody>
       </p:sp>
@@ -3957,38 +3968,37 @@
           <a:p>
             <a:pPr lvl="0"/>
             <a:r>
-              <a:rPr lang="en-US" smtClean="0"/>
+              <a:rPr lang="en-US"/>
               <a:t>Click to edit Master text styles</a:t>
             </a:r>
           </a:p>
           <a:p>
             <a:pPr lvl="1"/>
             <a:r>
-              <a:rPr lang="en-US" smtClean="0"/>
+              <a:rPr lang="en-US"/>
               <a:t>Second level</a:t>
             </a:r>
           </a:p>
           <a:p>
             <a:pPr lvl="2"/>
             <a:r>
-              <a:rPr lang="en-US" smtClean="0"/>
+              <a:rPr lang="en-US"/>
               <a:t>Third level</a:t>
             </a:r>
           </a:p>
           <a:p>
             <a:pPr lvl="3"/>
             <a:r>
-              <a:rPr lang="en-US" smtClean="0"/>
+              <a:rPr lang="en-US"/>
               <a:t>Fourth level</a:t>
             </a:r>
           </a:p>
           <a:p>
             <a:pPr lvl="4"/>
             <a:r>
-              <a:rPr lang="en-US" smtClean="0"/>
+              <a:rPr lang="en-US"/>
               <a:t>Fifth level</a:t>
             </a:r>
-            <a:endParaRPr lang="en-US"/>
           </a:p>
         </p:txBody>
       </p:sp>
@@ -4009,7 +4019,7 @@
           <a:p>
             <a:fld id="{5BCAD085-E8A6-8845-BD4E-CB4CCA059FC4}" type="datetimeFigureOut">
               <a:rPr lang="en-US" smtClean="0"/>
-              <a:t>1/27/13</a:t>
+              <a:t>10/29/2026</a:t>
             </a:fld>
             <a:endParaRPr lang="en-US"/>
           </a:p>
@@ -4112,10 +4122,9 @@
           </a:lstStyle>
           <a:p>
             <a:r>
-              <a:rPr lang="en-US" smtClean="0"/>
+              <a:rPr lang="en-US"/>
               <a:t>Click to edit Master title style</a:t>
             </a:r>
-            <a:endParaRPr lang="en-US"/>
           </a:p>
         </p:txBody>
       </p:sp>
@@ -4232,7 +4241,7 @@
           <a:p>
             <a:pPr lvl="0"/>
             <a:r>
-              <a:rPr lang="en-US" smtClean="0"/>
+              <a:rPr lang="en-US"/>
               <a:t>Click to edit Master text styles</a:t>
             </a:r>
           </a:p>
@@ -4255,7 +4264,7 @@
           <a:p>
             <a:fld id="{5BCAD085-E8A6-8845-BD4E-CB4CCA059FC4}" type="datetimeFigureOut">
               <a:rPr lang="en-US" smtClean="0"/>
-              <a:t>1/27/13</a:t>
+              <a:t>10/29/2026</a:t>
             </a:fld>
             <a:endParaRPr lang="en-US"/>
           </a:p>
@@ -4349,10 +4358,9 @@
           <a:lstStyle/>
           <a:p>
             <a:r>
-              <a:rPr lang="en-US" smtClean="0"/>
+              <a:rPr lang="en-US"/>
               <a:t>Click to edit Master title style</a:t>
             </a:r>
-            <a:endParaRPr lang="en-US"/>
           </a:p>
         </p:txBody>
       </p:sp>
@@ -4406,38 +4414,37 @@
           <a:p>
             <a:pPr lvl="0"/>
             <a:r>
-              <a:rPr lang="en-US" smtClean="0"/>
+              <a:rPr lang="en-US"/>
               <a:t>Click to edit Master text styles</a:t>
             </a:r>
           </a:p>
           <a:p>
             <a:pPr lvl="1"/>
             <a:r>
-              <a:rPr lang="en-US" smtClean="0"/>
+              <a:rPr lang="en-US"/>
               <a:t>Second level</a:t>
             </a:r>
           </a:p>
           <a:p>
             <a:pPr lvl="2"/>
             <a:r>
-              <a:rPr lang="en-US" smtClean="0"/>
+              <a:rPr lang="en-US"/>
               <a:t>Third level</a:t>
             </a:r>
           </a:p>
           <a:p>
             <a:pPr lvl="3"/>
             <a:r>
-              <a:rPr lang="en-US" smtClean="0"/>
+              <a:rPr lang="en-US"/>
               <a:t>Fourth level</a:t>
             </a:r>
           </a:p>
           <a:p>
             <a:pPr lvl="4"/>
             <a:r>
-              <a:rPr lang="en-US" smtClean="0"/>
+              <a:rPr lang="en-US"/>
               <a:t>Fifth level</a:t>
             </a:r>
-            <a:endParaRPr lang="en-US"/>
           </a:p>
         </p:txBody>
       </p:sp>
@@ -4491,38 +4498,37 @@
           <a:p>
             <a:pPr lvl="0"/>
             <a:r>
-              <a:rPr lang="en-US" smtClean="0"/>
+              <a:rPr lang="en-US"/>
               <a:t>Click to edit Master text styles</a:t>
             </a:r>
           </a:p>
           <a:p>
             <a:pPr lvl="1"/>
             <a:r>
-              <a:rPr lang="en-US" smtClean="0"/>
+              <a:rPr lang="en-US"/>
               <a:t>Second level</a:t>
             </a:r>
           </a:p>
           <a:p>
             <a:pPr lvl="2"/>
             <a:r>
-              <a:rPr lang="en-US" smtClean="0"/>
+              <a:rPr lang="en-US"/>
               <a:t>Third level</a:t>
             </a:r>
           </a:p>
           <a:p>
             <a:pPr lvl="3"/>
             <a:r>
-              <a:rPr lang="en-US" smtClean="0"/>
+              <a:rPr lang="en-US"/>
               <a:t>Fourth level</a:t>
             </a:r>
           </a:p>
           <a:p>
             <a:pPr lvl="4"/>
             <a:r>
-              <a:rPr lang="en-US" smtClean="0"/>
+              <a:rPr lang="en-US"/>
               <a:t>Fifth level</a:t>
             </a:r>
-            <a:endParaRPr lang="en-US"/>
           </a:p>
         </p:txBody>
       </p:sp>
@@ -4543,7 +4549,7 @@
           <a:p>
             <a:fld id="{5BCAD085-E8A6-8845-BD4E-CB4CCA059FC4}" type="datetimeFigureOut">
               <a:rPr lang="en-US" smtClean="0"/>
-              <a:t>1/27/13</a:t>
+              <a:t>10/29/2026</a:t>
             </a:fld>
             <a:endParaRPr lang="en-US"/>
           </a:p>
@@ -4641,10 +4647,9 @@
           </a:lstStyle>
           <a:p>
             <a:r>
-              <a:rPr lang="en-US" smtClean="0"/>
+              <a:rPr lang="en-US"/>
               <a:t>Click to edit Master title style</a:t>
             </a:r>
-            <a:endParaRPr lang="en-US"/>
           </a:p>
         </p:txBody>
       </p:sp>
@@ -4707,7 +4712,7 @@
           <a:p>
             <a:pPr lvl="0"/>
             <a:r>
-              <a:rPr lang="en-US" smtClean="0"/>
+              <a:rPr lang="en-US"/>
               <a:t>Click to edit Master text styles</a:t>
             </a:r>
           </a:p>
@@ -4763,38 +4768,37 @@
           <a:p>
             <a:pPr lvl="0"/>
             <a:r>
-              <a:rPr lang="en-US" smtClean="0"/>
+              <a:rPr lang="en-US"/>
               <a:t>Click to edit Master text styles</a:t>
             </a:r>
           </a:p>
           <a:p>
             <a:pPr lvl="1"/>
             <a:r>
-              <a:rPr lang="en-US" smtClean="0"/>
+              <a:rPr lang="en-US"/>
               <a:t>Second level</a:t>
             </a:r>
           </a:p>
           <a:p>
             <a:pPr lvl="2"/>
             <a:r>
-              <a:rPr lang="en-US" smtClean="0"/>
+              <a:rPr lang="en-US"/>
               <a:t>Third level</a:t>
             </a:r>
           </a:p>
           <a:p>
             <a:pPr lvl="3"/>
             <a:r>
-              <a:rPr lang="en-US" smtClean="0"/>
+              <a:rPr lang="en-US"/>
               <a:t>Fourth level</a:t>
             </a:r>
           </a:p>
           <a:p>
             <a:pPr lvl="4"/>
             <a:r>
-              <a:rPr lang="en-US" smtClean="0"/>
+              <a:rPr lang="en-US"/>
               <a:t>Fifth level</a:t>
             </a:r>
-            <a:endParaRPr lang="en-US"/>
           </a:p>
         </p:txBody>
       </p:sp>
@@ -4857,7 +4861,7 @@
           <a:p>
             <a:pPr lvl="0"/>
             <a:r>
-              <a:rPr lang="en-US" smtClean="0"/>
+              <a:rPr lang="en-US"/>
               <a:t>Click to edit Master text styles</a:t>
             </a:r>
           </a:p>
@@ -4913,38 +4917,37 @@
           <a:p>
             <a:pPr lvl="0"/>
             <a:r>
-              <a:rPr lang="en-US" smtClean="0"/>
+              <a:rPr lang="en-US"/>
               <a:t>Click to edit Master text styles</a:t>
             </a:r>
           </a:p>
           <a:p>
             <a:pPr lvl="1"/>
             <a:r>
-              <a:rPr lang="en-US" smtClean="0"/>
+              <a:rPr lang="en-US"/>
               <a:t>Second level</a:t>
             </a:r>
           </a:p>
           <a:p>
             <a:pPr lvl="2"/>
             <a:r>
-              <a:rPr lang="en-US" smtClean="0"/>
+              <a:rPr lang="en-US"/>
               <a:t>Third level</a:t>
             </a:r>
           </a:p>
           <a:p>
             <a:pPr lvl="3"/>
             <a:r>
-              <a:rPr lang="en-US" smtClean="0"/>
+              <a:rPr lang="en-US"/>
               <a:t>Fourth level</a:t>
             </a:r>
           </a:p>
           <a:p>
             <a:pPr lvl="4"/>
             <a:r>
-              <a:rPr lang="en-US" smtClean="0"/>
+              <a:rPr lang="en-US"/>
               <a:t>Fifth level</a:t>
             </a:r>
-            <a:endParaRPr lang="en-US"/>
           </a:p>
         </p:txBody>
       </p:sp>
@@ -4965,7 +4968,7 @@
           <a:p>
             <a:fld id="{5BCAD085-E8A6-8845-BD4E-CB4CCA059FC4}" type="datetimeFigureOut">
               <a:rPr lang="en-US" smtClean="0"/>
-              <a:t>1/27/13</a:t>
+              <a:t>10/29/2026</a:t>
             </a:fld>
             <a:endParaRPr lang="en-US"/>
           </a:p>
@@ -5059,10 +5062,9 @@
           <a:lstStyle/>
           <a:p>
             <a:r>
-              <a:rPr lang="en-US" smtClean="0"/>
+              <a:rPr lang="en-US"/>
               <a:t>Click to edit Master title style</a:t>
             </a:r>
-            <a:endParaRPr lang="en-US"/>
           </a:p>
         </p:txBody>
       </p:sp>
@@ -5083,7 +5085,7 @@
           <a:p>
             <a:fld id="{5BCAD085-E8A6-8845-BD4E-CB4CCA059FC4}" type="datetimeFigureOut">
               <a:rPr lang="en-US" smtClean="0"/>
-              <a:t>1/27/13</a:t>
+              <a:t>10/29/2026</a:t>
             </a:fld>
             <a:endParaRPr lang="en-US"/>
           </a:p>
@@ -5178,7 +5180,7 @@
           <a:p>
             <a:fld id="{5BCAD085-E8A6-8845-BD4E-CB4CCA059FC4}" type="datetimeFigureOut">
               <a:rPr lang="en-US" smtClean="0"/>
-              <a:t>1/27/13</a:t>
+              <a:t>10/29/2026</a:t>
             </a:fld>
             <a:endParaRPr lang="en-US"/>
           </a:p>
@@ -5281,10 +5283,9 @@
           </a:lstStyle>
           <a:p>
             <a:r>
-              <a:rPr lang="en-US" smtClean="0"/>
+              <a:rPr lang="en-US"/>
               <a:t>Click to edit Master title style</a:t>
             </a:r>
-            <a:endParaRPr lang="en-US"/>
           </a:p>
         </p:txBody>
       </p:sp>
@@ -5338,38 +5339,37 @@
           <a:p>
             <a:pPr lvl="0"/>
             <a:r>
-              <a:rPr lang="en-US" smtClean="0"/>
+              <a:rPr lang="en-US"/>
               <a:t>Click to edit Master text styles</a:t>
             </a:r>
           </a:p>
           <a:p>
             <a:pPr lvl="1"/>
             <a:r>
-              <a:rPr lang="en-US" smtClean="0"/>
+              <a:rPr lang="en-US"/>
               <a:t>Second level</a:t>
             </a:r>
           </a:p>
           <a:p>
             <a:pPr lvl="2"/>
             <a:r>
-              <a:rPr lang="en-US" smtClean="0"/>
+              <a:rPr lang="en-US"/>
               <a:t>Third level</a:t>
             </a:r>
           </a:p>
           <a:p>
             <a:pPr lvl="3"/>
             <a:r>
-              <a:rPr lang="en-US" smtClean="0"/>
+              <a:rPr lang="en-US"/>
               <a:t>Fourth level</a:t>
             </a:r>
           </a:p>
           <a:p>
             <a:pPr lvl="4"/>
             <a:r>
-              <a:rPr lang="en-US" smtClean="0"/>
+              <a:rPr lang="en-US"/>
               <a:t>Fifth level</a:t>
             </a:r>
-            <a:endParaRPr lang="en-US"/>
           </a:p>
         </p:txBody>
       </p:sp>
@@ -5432,7 +5432,7 @@
           <a:p>
             <a:pPr lvl="0"/>
             <a:r>
-              <a:rPr lang="en-US" smtClean="0"/>
+              <a:rPr lang="en-US"/>
               <a:t>Click to edit Master text styles</a:t>
             </a:r>
           </a:p>
@@ -5455,7 +5455,7 @@
           <a:p>
             <a:fld id="{5BCAD085-E8A6-8845-BD4E-CB4CCA059FC4}" type="datetimeFigureOut">
               <a:rPr lang="en-US" smtClean="0"/>
-              <a:t>1/27/13</a:t>
+              <a:t>10/29/2026</a:t>
             </a:fld>
             <a:endParaRPr lang="en-US"/>
           </a:p>
@@ -5558,10 +5558,9 @@
           </a:lstStyle>
           <a:p>
             <a:r>
-              <a:rPr lang="en-US" smtClean="0"/>
+              <a:rPr lang="en-US"/>
               <a:t>Click to edit Master title style</a:t>
             </a:r>
-            <a:endParaRPr lang="en-US"/>
           </a:p>
         </p:txBody>
       </p:sp>
@@ -5685,7 +5684,7 @@
           <a:p>
             <a:pPr lvl="0"/>
             <a:r>
-              <a:rPr lang="en-US" smtClean="0"/>
+              <a:rPr lang="en-US"/>
               <a:t>Click to edit Master text styles</a:t>
             </a:r>
           </a:p>
@@ -5708,7 +5707,7 @@
           <a:p>
             <a:fld id="{5BCAD085-E8A6-8845-BD4E-CB4CCA059FC4}" type="datetimeFigureOut">
               <a:rPr lang="en-US" smtClean="0"/>
-              <a:t>1/27/13</a:t>
+              <a:t>10/29/2026</a:t>
             </a:fld>
             <a:endParaRPr lang="en-US"/>
           </a:p>
@@ -5817,10 +5816,9 @@
           <a:lstStyle/>
           <a:p>
             <a:r>
-              <a:rPr lang="en-US" smtClean="0"/>
+              <a:rPr lang="en-US"/>
               <a:t>Click to edit Master title style</a:t>
             </a:r>
-            <a:endParaRPr lang="en-US"/>
           </a:p>
         </p:txBody>
       </p:sp>
@@ -5851,38 +5849,37 @@
           <a:p>
             <a:pPr lvl="0"/>
             <a:r>
-              <a:rPr lang="en-US" smtClean="0"/>
+              <a:rPr lang="en-US"/>
               <a:t>Click to edit Master text styles</a:t>
             </a:r>
           </a:p>
           <a:p>
             <a:pPr lvl="1"/>
             <a:r>
-              <a:rPr lang="en-US" smtClean="0"/>
+              <a:rPr lang="en-US"/>
               <a:t>Second level</a:t>
             </a:r>
           </a:p>
           <a:p>
             <a:pPr lvl="2"/>
             <a:r>
-              <a:rPr lang="en-US" smtClean="0"/>
+              <a:rPr lang="en-US"/>
               <a:t>Third level</a:t>
             </a:r>
           </a:p>
           <a:p>
             <a:pPr lvl="3"/>
             <a:r>
-              <a:rPr lang="en-US" smtClean="0"/>
+              <a:rPr lang="en-US"/>
               <a:t>Fourth level</a:t>
             </a:r>
           </a:p>
           <a:p>
             <a:pPr lvl="4"/>
             <a:r>
-              <a:rPr lang="en-US" smtClean="0"/>
+              <a:rPr lang="en-US"/>
               <a:t>Fifth level</a:t>
             </a:r>
-            <a:endParaRPr lang="en-US"/>
           </a:p>
         </p:txBody>
       </p:sp>
@@ -5921,7 +5918,7 @@
           <a:p>
             <a:fld id="{5BCAD085-E8A6-8845-BD4E-CB4CCA059FC4}" type="datetimeFigureOut">
               <a:rPr lang="en-US" smtClean="0"/>
-              <a:t>1/27/13</a:t>
+              <a:t>10/29/2026</a:t>
             </a:fld>
             <a:endParaRPr lang="en-US"/>
           </a:p>
@@ -6280,7 +6277,7 @@
 </file>
 
 <file path=ppt/slides/slide1.xml><?xml version="1.0" encoding="utf-8"?>
-<p:sld xmlns:a="http://schemas.openxmlformats.org/drawingml/2006/main" xmlns:p="http://schemas.openxmlformats.org/presentationml/2006/main" xmlns:r="http://schemas.openxmlformats.org/officeDocument/2006/relationships">
+<p:sld xmlns:a="http://schemas.openxmlformats.org/drawingml/2006/main" xmlns:r="http://schemas.openxmlformats.org/officeDocument/2006/relationships" xmlns:p="http://schemas.openxmlformats.org/presentationml/2006/main">
   <p:cSld>
     <p:spTree>
       <p:nvGrpSpPr>
@@ -6288,7 +6285,14 @@
         <p:cNvGrpSpPr/>
         <p:nvPr/>
       </p:nvGrpSpPr>
-      <p:grpSpPr/>
+      <p:grpSpPr>
+        <a:xfrm>
+          <a:off x="0" y="0"/>
+          <a:ext cx="0" cy="0"/>
+          <a:chOff x="0" y="0"/>
+          <a:chExt cx="0" cy="0"/>
+        </a:xfrm>
+      </p:grpSpPr>
       <p:sp>
         <p:nvSpPr>
           <p:cNvPr id="2" name="Rectangle 1"/>
@@ -6330,6 +6334,7 @@
           <a:lstStyle/>
           <a:p>
             <a:pPr algn="ctr"/>
+            <a:endParaRPr/>
           </a:p>
         </p:txBody>
       </p:sp>
@@ -6374,6 +6379,7 @@
           <a:lstStyle/>
           <a:p>
             <a:pPr algn="ctr"/>
+            <a:endParaRPr/>
           </a:p>
         </p:txBody>
       </p:sp>
@@ -6418,6 +6424,7 @@
           <a:lstStyle/>
           <a:p>
             <a:pPr algn="ctr"/>
+            <a:endParaRPr/>
           </a:p>
         </p:txBody>
       </p:sp>
@@ -6469,7 +6476,7 @@
         <p:spPr>
           <a:xfrm>
             <a:off x="731520" y="2377440"/>
-            <a:ext cx="10698480" cy="1554480"/>
+            <a:ext cx="10698480" cy="615553"/>
           </a:xfrm>
           <a:prstGeom prst="rect">
             <a:avLst/>
@@ -6494,7 +6501,7 @@
                 </a:solidFill>
                 <a:latin typeface="맑은 고딕"/>
               </a:rPr>
-              <a:t>ASM 뷰와</a:t>
+              <a:t>ASM 뷰</a:t>
             </a:r>
           </a:p>
         </p:txBody>
@@ -6586,7 +6593,7 @@
 </file>
 
 <file path=ppt/slides/slide10.xml><?xml version="1.0" encoding="utf-8"?>
-<p:sld xmlns:a="http://schemas.openxmlformats.org/drawingml/2006/main" xmlns:p="http://schemas.openxmlformats.org/presentationml/2006/main" xmlns:r="http://schemas.openxmlformats.org/officeDocument/2006/relationships">
+<p:sld xmlns:a="http://schemas.openxmlformats.org/drawingml/2006/main" xmlns:r="http://schemas.openxmlformats.org/officeDocument/2006/relationships" xmlns:p="http://schemas.openxmlformats.org/presentationml/2006/main">
   <p:cSld>
     <p:spTree>
       <p:nvGrpSpPr>
@@ -6594,7 +6601,14 @@
         <p:cNvGrpSpPr/>
         <p:nvPr/>
       </p:nvGrpSpPr>
-      <p:grpSpPr/>
+      <p:grpSpPr>
+        <a:xfrm>
+          <a:off x="0" y="0"/>
+          <a:ext cx="0" cy="0"/>
+          <a:chOff x="0" y="0"/>
+          <a:chExt cx="0" cy="0"/>
+        </a:xfrm>
+      </p:grpSpPr>
       <p:sp>
         <p:nvSpPr>
           <p:cNvPr id="2" name="Rectangle 1"/>
@@ -6636,6 +6650,7 @@
           <a:lstStyle/>
           <a:p>
             <a:pPr algn="ctr"/>
+            <a:endParaRPr/>
           </a:p>
         </p:txBody>
       </p:sp>
@@ -6845,7 +6860,7 @@
 </file>
 
 <file path=ppt/slides/slide11.xml><?xml version="1.0" encoding="utf-8"?>
-<p:sld xmlns:a="http://schemas.openxmlformats.org/drawingml/2006/main" xmlns:p="http://schemas.openxmlformats.org/presentationml/2006/main" xmlns:r="http://schemas.openxmlformats.org/officeDocument/2006/relationships">
+<p:sld xmlns:a="http://schemas.openxmlformats.org/drawingml/2006/main" xmlns:r="http://schemas.openxmlformats.org/officeDocument/2006/relationships" xmlns:p="http://schemas.openxmlformats.org/presentationml/2006/main">
   <p:cSld>
     <p:spTree>
       <p:nvGrpSpPr>
@@ -6853,7 +6868,14 @@
         <p:cNvGrpSpPr/>
         <p:nvPr/>
       </p:nvGrpSpPr>
-      <p:grpSpPr/>
+      <p:grpSpPr>
+        <a:xfrm>
+          <a:off x="0" y="0"/>
+          <a:ext cx="0" cy="0"/>
+          <a:chOff x="0" y="0"/>
+          <a:chExt cx="0" cy="0"/>
+        </a:xfrm>
+      </p:grpSpPr>
       <p:sp>
         <p:nvSpPr>
           <p:cNvPr id="2" name="Rectangle 1"/>
@@ -6895,6 +6917,7 @@
           <a:lstStyle/>
           <a:p>
             <a:pPr algn="ctr"/>
+            <a:endParaRPr/>
           </a:p>
         </p:txBody>
       </p:sp>
@@ -7088,7 +7111,7 @@
 </file>
 
 <file path=ppt/slides/slide12.xml><?xml version="1.0" encoding="utf-8"?>
-<p:sld xmlns:a="http://schemas.openxmlformats.org/drawingml/2006/main" xmlns:p="http://schemas.openxmlformats.org/presentationml/2006/main" xmlns:r="http://schemas.openxmlformats.org/officeDocument/2006/relationships">
+<p:sld xmlns:a="http://schemas.openxmlformats.org/drawingml/2006/main" xmlns:r="http://schemas.openxmlformats.org/officeDocument/2006/relationships" xmlns:p="http://schemas.openxmlformats.org/presentationml/2006/main">
   <p:cSld>
     <p:spTree>
       <p:nvGrpSpPr>
@@ -7096,7 +7119,14 @@
         <p:cNvGrpSpPr/>
         <p:nvPr/>
       </p:nvGrpSpPr>
-      <p:grpSpPr/>
+      <p:grpSpPr>
+        <a:xfrm>
+          <a:off x="0" y="0"/>
+          <a:ext cx="0" cy="0"/>
+          <a:chOff x="0" y="0"/>
+          <a:chExt cx="0" cy="0"/>
+        </a:xfrm>
+      </p:grpSpPr>
       <p:sp>
         <p:nvSpPr>
           <p:cNvPr id="2" name="Rectangle 1"/>
@@ -7138,6 +7168,7 @@
           <a:lstStyle/>
           <a:p>
             <a:pPr algn="ctr"/>
+            <a:endParaRPr/>
           </a:p>
         </p:txBody>
       </p:sp>
@@ -7331,7 +7362,7 @@
 </file>
 
 <file path=ppt/slides/slide13.xml><?xml version="1.0" encoding="utf-8"?>
-<p:sld xmlns:a="http://schemas.openxmlformats.org/drawingml/2006/main" xmlns:p="http://schemas.openxmlformats.org/presentationml/2006/main" xmlns:r="http://schemas.openxmlformats.org/officeDocument/2006/relationships">
+<p:sld xmlns:a="http://schemas.openxmlformats.org/drawingml/2006/main" xmlns:r="http://schemas.openxmlformats.org/officeDocument/2006/relationships" xmlns:p="http://schemas.openxmlformats.org/presentationml/2006/main">
   <p:cSld>
     <p:spTree>
       <p:nvGrpSpPr>
@@ -7339,7 +7370,14 @@
         <p:cNvGrpSpPr/>
         <p:nvPr/>
       </p:nvGrpSpPr>
-      <p:grpSpPr/>
+      <p:grpSpPr>
+        <a:xfrm>
+          <a:off x="0" y="0"/>
+          <a:ext cx="0" cy="0"/>
+          <a:chOff x="0" y="0"/>
+          <a:chExt cx="0" cy="0"/>
+        </a:xfrm>
+      </p:grpSpPr>
       <p:sp>
         <p:nvSpPr>
           <p:cNvPr id="2" name="Rectangle 1"/>
@@ -7381,6 +7419,7 @@
           <a:lstStyle/>
           <a:p>
             <a:pPr algn="ctr"/>
+            <a:endParaRPr/>
           </a:p>
         </p:txBody>
       </p:sp>
@@ -7574,7 +7613,7 @@
 </file>
 
 <file path=ppt/slides/slide14.xml><?xml version="1.0" encoding="utf-8"?>
-<p:sld xmlns:a="http://schemas.openxmlformats.org/drawingml/2006/main" xmlns:p="http://schemas.openxmlformats.org/presentationml/2006/main" xmlns:r="http://schemas.openxmlformats.org/officeDocument/2006/relationships">
+<p:sld xmlns:a="http://schemas.openxmlformats.org/drawingml/2006/main" xmlns:r="http://schemas.openxmlformats.org/officeDocument/2006/relationships" xmlns:p="http://schemas.openxmlformats.org/presentationml/2006/main">
   <p:cSld>
     <p:spTree>
       <p:nvGrpSpPr>
@@ -7582,7 +7621,14 @@
         <p:cNvGrpSpPr/>
         <p:nvPr/>
       </p:nvGrpSpPr>
-      <p:grpSpPr/>
+      <p:grpSpPr>
+        <a:xfrm>
+          <a:off x="0" y="0"/>
+          <a:ext cx="0" cy="0"/>
+          <a:chOff x="0" y="0"/>
+          <a:chExt cx="0" cy="0"/>
+        </a:xfrm>
+      </p:grpSpPr>
       <p:sp>
         <p:nvSpPr>
           <p:cNvPr id="2" name="Rectangle 1"/>
@@ -7624,6 +7670,7 @@
           <a:lstStyle/>
           <a:p>
             <a:pPr algn="ctr"/>
+            <a:endParaRPr/>
           </a:p>
         </p:txBody>
       </p:sp>
@@ -7801,7 +7848,7 @@
 </file>
 
 <file path=ppt/slides/slide15.xml><?xml version="1.0" encoding="utf-8"?>
-<p:sld xmlns:a="http://schemas.openxmlformats.org/drawingml/2006/main" xmlns:p="http://schemas.openxmlformats.org/presentationml/2006/main" xmlns:r="http://schemas.openxmlformats.org/officeDocument/2006/relationships">
+<p:sld xmlns:a="http://schemas.openxmlformats.org/drawingml/2006/main" xmlns:r="http://schemas.openxmlformats.org/officeDocument/2006/relationships" xmlns:p="http://schemas.openxmlformats.org/presentationml/2006/main">
   <p:cSld>
     <p:spTree>
       <p:nvGrpSpPr>
@@ -7809,7 +7856,14 @@
         <p:cNvGrpSpPr/>
         <p:nvPr/>
       </p:nvGrpSpPr>
-      <p:grpSpPr/>
+      <p:grpSpPr>
+        <a:xfrm>
+          <a:off x="0" y="0"/>
+          <a:ext cx="0" cy="0"/>
+          <a:chOff x="0" y="0"/>
+          <a:chExt cx="0" cy="0"/>
+        </a:xfrm>
+      </p:grpSpPr>
       <p:sp>
         <p:nvSpPr>
           <p:cNvPr id="2" name="Rectangle 1"/>
@@ -7851,6 +7905,7 @@
           <a:lstStyle/>
           <a:p>
             <a:pPr algn="ctr"/>
+            <a:endParaRPr/>
           </a:p>
         </p:txBody>
       </p:sp>
@@ -7973,6 +8028,7 @@
           <a:lstStyle/>
           <a:p>
             <a:pPr algn="ctr"/>
+            <a:endParaRPr/>
           </a:p>
         </p:txBody>
       </p:sp>
@@ -8040,7 +8096,7 @@
 </file>
 
 <file path=ppt/slides/slide16.xml><?xml version="1.0" encoding="utf-8"?>
-<p:sld xmlns:a="http://schemas.openxmlformats.org/drawingml/2006/main" xmlns:p="http://schemas.openxmlformats.org/presentationml/2006/main" xmlns:r="http://schemas.openxmlformats.org/officeDocument/2006/relationships">
+<p:sld xmlns:a="http://schemas.openxmlformats.org/drawingml/2006/main" xmlns:r="http://schemas.openxmlformats.org/officeDocument/2006/relationships" xmlns:p="http://schemas.openxmlformats.org/presentationml/2006/main">
   <p:cSld>
     <p:spTree>
       <p:nvGrpSpPr>
@@ -8048,7 +8104,14 @@
         <p:cNvGrpSpPr/>
         <p:nvPr/>
       </p:nvGrpSpPr>
-      <p:grpSpPr/>
+      <p:grpSpPr>
+        <a:xfrm>
+          <a:off x="0" y="0"/>
+          <a:ext cx="0" cy="0"/>
+          <a:chOff x="0" y="0"/>
+          <a:chExt cx="0" cy="0"/>
+        </a:xfrm>
+      </p:grpSpPr>
       <p:sp>
         <p:nvSpPr>
           <p:cNvPr id="2" name="Rectangle 1"/>
@@ -8090,6 +8153,7 @@
           <a:lstStyle/>
           <a:p>
             <a:pPr algn="ctr"/>
+            <a:endParaRPr/>
           </a:p>
         </p:txBody>
       </p:sp>
@@ -8267,7 +8331,7 @@
 </file>
 
 <file path=ppt/slides/slide17.xml><?xml version="1.0" encoding="utf-8"?>
-<p:sld xmlns:a="http://schemas.openxmlformats.org/drawingml/2006/main" xmlns:p="http://schemas.openxmlformats.org/presentationml/2006/main" xmlns:r="http://schemas.openxmlformats.org/officeDocument/2006/relationships">
+<p:sld xmlns:a="http://schemas.openxmlformats.org/drawingml/2006/main" xmlns:r="http://schemas.openxmlformats.org/officeDocument/2006/relationships" xmlns:p="http://schemas.openxmlformats.org/presentationml/2006/main">
   <p:cSld>
     <p:spTree>
       <p:nvGrpSpPr>
@@ -8275,7 +8339,14 @@
         <p:cNvGrpSpPr/>
         <p:nvPr/>
       </p:nvGrpSpPr>
-      <p:grpSpPr/>
+      <p:grpSpPr>
+        <a:xfrm>
+          <a:off x="0" y="0"/>
+          <a:ext cx="0" cy="0"/>
+          <a:chOff x="0" y="0"/>
+          <a:chExt cx="0" cy="0"/>
+        </a:xfrm>
+      </p:grpSpPr>
       <p:sp>
         <p:nvSpPr>
           <p:cNvPr id="2" name="Rectangle 1"/>
@@ -8317,6 +8388,7 @@
           <a:lstStyle/>
           <a:p>
             <a:pPr algn="ctr"/>
+            <a:endParaRPr/>
           </a:p>
         </p:txBody>
       </p:sp>
@@ -8494,7 +8566,7 @@
 </file>
 
 <file path=ppt/slides/slide18.xml><?xml version="1.0" encoding="utf-8"?>
-<p:sld xmlns:a="http://schemas.openxmlformats.org/drawingml/2006/main" xmlns:p="http://schemas.openxmlformats.org/presentationml/2006/main" xmlns:r="http://schemas.openxmlformats.org/officeDocument/2006/relationships">
+<p:sld xmlns:a="http://schemas.openxmlformats.org/drawingml/2006/main" xmlns:r="http://schemas.openxmlformats.org/officeDocument/2006/relationships" xmlns:p="http://schemas.openxmlformats.org/presentationml/2006/main">
   <p:cSld>
     <p:spTree>
       <p:nvGrpSpPr>
@@ -8502,7 +8574,14 @@
         <p:cNvGrpSpPr/>
         <p:nvPr/>
       </p:nvGrpSpPr>
-      <p:grpSpPr/>
+      <p:grpSpPr>
+        <a:xfrm>
+          <a:off x="0" y="0"/>
+          <a:ext cx="0" cy="0"/>
+          <a:chOff x="0" y="0"/>
+          <a:chExt cx="0" cy="0"/>
+        </a:xfrm>
+      </p:grpSpPr>
       <p:sp>
         <p:nvSpPr>
           <p:cNvPr id="2" name="Rectangle 1"/>
@@ -8544,6 +8623,7 @@
           <a:lstStyle/>
           <a:p>
             <a:pPr algn="ctr"/>
+            <a:endParaRPr/>
           </a:p>
         </p:txBody>
       </p:sp>
@@ -8737,7 +8817,7 @@
 </file>
 
 <file path=ppt/slides/slide19.xml><?xml version="1.0" encoding="utf-8"?>
-<p:sld xmlns:a="http://schemas.openxmlformats.org/drawingml/2006/main" xmlns:p="http://schemas.openxmlformats.org/presentationml/2006/main" xmlns:r="http://schemas.openxmlformats.org/officeDocument/2006/relationships">
+<p:sld xmlns:a="http://schemas.openxmlformats.org/drawingml/2006/main" xmlns:r="http://schemas.openxmlformats.org/officeDocument/2006/relationships" xmlns:p="http://schemas.openxmlformats.org/presentationml/2006/main">
   <p:cSld>
     <p:spTree>
       <p:nvGrpSpPr>
@@ -8745,7 +8825,14 @@
         <p:cNvGrpSpPr/>
         <p:nvPr/>
       </p:nvGrpSpPr>
-      <p:grpSpPr/>
+      <p:grpSpPr>
+        <a:xfrm>
+          <a:off x="0" y="0"/>
+          <a:ext cx="0" cy="0"/>
+          <a:chOff x="0" y="0"/>
+          <a:chExt cx="0" cy="0"/>
+        </a:xfrm>
+      </p:grpSpPr>
       <p:sp>
         <p:nvSpPr>
           <p:cNvPr id="2" name="Rectangle 1"/>
@@ -8787,6 +8874,7 @@
           <a:lstStyle/>
           <a:p>
             <a:pPr algn="ctr"/>
+            <a:endParaRPr/>
           </a:p>
         </p:txBody>
       </p:sp>
@@ -8980,7 +9068,7 @@
 </file>
 
 <file path=ppt/slides/slide2.xml><?xml version="1.0" encoding="utf-8"?>
-<p:sld xmlns:a="http://schemas.openxmlformats.org/drawingml/2006/main" xmlns:p="http://schemas.openxmlformats.org/presentationml/2006/main" xmlns:r="http://schemas.openxmlformats.org/officeDocument/2006/relationships">
+<p:sld xmlns:a="http://schemas.openxmlformats.org/drawingml/2006/main" xmlns:r="http://schemas.openxmlformats.org/officeDocument/2006/relationships" xmlns:p="http://schemas.openxmlformats.org/presentationml/2006/main">
   <p:cSld>
     <p:spTree>
       <p:nvGrpSpPr>
@@ -8988,7 +9076,14 @@
         <p:cNvGrpSpPr/>
         <p:nvPr/>
       </p:nvGrpSpPr>
-      <p:grpSpPr/>
+      <p:grpSpPr>
+        <a:xfrm>
+          <a:off x="0" y="0"/>
+          <a:ext cx="0" cy="0"/>
+          <a:chOff x="0" y="0"/>
+          <a:chExt cx="0" cy="0"/>
+        </a:xfrm>
+      </p:grpSpPr>
       <p:sp>
         <p:nvSpPr>
           <p:cNvPr id="2" name="Rectangle 1"/>
@@ -9030,6 +9125,7 @@
           <a:lstStyle/>
           <a:p>
             <a:pPr algn="ctr"/>
+            <a:endParaRPr/>
           </a:p>
         </p:txBody>
       </p:sp>
@@ -9200,7 +9296,7 @@
 </file>
 
 <file path=ppt/slides/slide20.xml><?xml version="1.0" encoding="utf-8"?>
-<p:sld xmlns:a="http://schemas.openxmlformats.org/drawingml/2006/main" xmlns:p="http://schemas.openxmlformats.org/presentationml/2006/main" xmlns:r="http://schemas.openxmlformats.org/officeDocument/2006/relationships">
+<p:sld xmlns:a="http://schemas.openxmlformats.org/drawingml/2006/main" xmlns:r="http://schemas.openxmlformats.org/officeDocument/2006/relationships" xmlns:p="http://schemas.openxmlformats.org/presentationml/2006/main">
   <p:cSld>
     <p:spTree>
       <p:nvGrpSpPr>
@@ -9208,7 +9304,14 @@
         <p:cNvGrpSpPr/>
         <p:nvPr/>
       </p:nvGrpSpPr>
-      <p:grpSpPr/>
+      <p:grpSpPr>
+        <a:xfrm>
+          <a:off x="0" y="0"/>
+          <a:ext cx="0" cy="0"/>
+          <a:chOff x="0" y="0"/>
+          <a:chExt cx="0" cy="0"/>
+        </a:xfrm>
+      </p:grpSpPr>
       <p:sp>
         <p:nvSpPr>
           <p:cNvPr id="2" name="Rectangle 1"/>
@@ -9250,6 +9353,7 @@
           <a:lstStyle/>
           <a:p>
             <a:pPr algn="ctr"/>
+            <a:endParaRPr/>
           </a:p>
         </p:txBody>
       </p:sp>
@@ -9372,6 +9476,7 @@
           <a:lstStyle/>
           <a:p>
             <a:pPr algn="ctr"/>
+            <a:endParaRPr/>
           </a:p>
         </p:txBody>
       </p:sp>
@@ -9439,7 +9544,7 @@
 </file>
 
 <file path=ppt/slides/slide21.xml><?xml version="1.0" encoding="utf-8"?>
-<p:sld xmlns:a="http://schemas.openxmlformats.org/drawingml/2006/main" xmlns:p="http://schemas.openxmlformats.org/presentationml/2006/main" xmlns:r="http://schemas.openxmlformats.org/officeDocument/2006/relationships">
+<p:sld xmlns:a="http://schemas.openxmlformats.org/drawingml/2006/main" xmlns:r="http://schemas.openxmlformats.org/officeDocument/2006/relationships" xmlns:p="http://schemas.openxmlformats.org/presentationml/2006/main">
   <p:cSld>
     <p:spTree>
       <p:nvGrpSpPr>
@@ -9447,7 +9552,14 @@
         <p:cNvGrpSpPr/>
         <p:nvPr/>
       </p:nvGrpSpPr>
-      <p:grpSpPr/>
+      <p:grpSpPr>
+        <a:xfrm>
+          <a:off x="0" y="0"/>
+          <a:ext cx="0" cy="0"/>
+          <a:chOff x="0" y="0"/>
+          <a:chExt cx="0" cy="0"/>
+        </a:xfrm>
+      </p:grpSpPr>
       <p:sp>
         <p:nvSpPr>
           <p:cNvPr id="2" name="Rectangle 1"/>
@@ -9489,6 +9601,7 @@
           <a:lstStyle/>
           <a:p>
             <a:pPr algn="ctr"/>
+            <a:endParaRPr/>
           </a:p>
         </p:txBody>
       </p:sp>
@@ -9666,7 +9779,7 @@
 </file>
 
 <file path=ppt/slides/slide22.xml><?xml version="1.0" encoding="utf-8"?>
-<p:sld xmlns:a="http://schemas.openxmlformats.org/drawingml/2006/main" xmlns:p="http://schemas.openxmlformats.org/presentationml/2006/main" xmlns:r="http://schemas.openxmlformats.org/officeDocument/2006/relationships">
+<p:sld xmlns:a="http://schemas.openxmlformats.org/drawingml/2006/main" xmlns:r="http://schemas.openxmlformats.org/officeDocument/2006/relationships" xmlns:p="http://schemas.openxmlformats.org/presentationml/2006/main">
   <p:cSld>
     <p:spTree>
       <p:nvGrpSpPr>
@@ -9674,7 +9787,14 @@
         <p:cNvGrpSpPr/>
         <p:nvPr/>
       </p:nvGrpSpPr>
-      <p:grpSpPr/>
+      <p:grpSpPr>
+        <a:xfrm>
+          <a:off x="0" y="0"/>
+          <a:ext cx="0" cy="0"/>
+          <a:chOff x="0" y="0"/>
+          <a:chExt cx="0" cy="0"/>
+        </a:xfrm>
+      </p:grpSpPr>
       <p:sp>
         <p:nvSpPr>
           <p:cNvPr id="2" name="Rectangle 1"/>
@@ -9716,6 +9836,7 @@
           <a:lstStyle/>
           <a:p>
             <a:pPr algn="ctr"/>
+            <a:endParaRPr/>
           </a:p>
         </p:txBody>
       </p:sp>
@@ -9893,7 +10014,7 @@
 </file>
 
 <file path=ppt/slides/slide23.xml><?xml version="1.0" encoding="utf-8"?>
-<p:sld xmlns:a="http://schemas.openxmlformats.org/drawingml/2006/main" xmlns:p="http://schemas.openxmlformats.org/presentationml/2006/main" xmlns:r="http://schemas.openxmlformats.org/officeDocument/2006/relationships">
+<p:sld xmlns:a="http://schemas.openxmlformats.org/drawingml/2006/main" xmlns:r="http://schemas.openxmlformats.org/officeDocument/2006/relationships" xmlns:p="http://schemas.openxmlformats.org/presentationml/2006/main">
   <p:cSld>
     <p:spTree>
       <p:nvGrpSpPr>
@@ -9901,7 +10022,14 @@
         <p:cNvGrpSpPr/>
         <p:nvPr/>
       </p:nvGrpSpPr>
-      <p:grpSpPr/>
+      <p:grpSpPr>
+        <a:xfrm>
+          <a:off x="0" y="0"/>
+          <a:ext cx="0" cy="0"/>
+          <a:chOff x="0" y="0"/>
+          <a:chExt cx="0" cy="0"/>
+        </a:xfrm>
+      </p:grpSpPr>
       <p:sp>
         <p:nvSpPr>
           <p:cNvPr id="2" name="Rectangle 1"/>
@@ -9943,6 +10071,7 @@
           <a:lstStyle/>
           <a:p>
             <a:pPr algn="ctr"/>
+            <a:endParaRPr/>
           </a:p>
         </p:txBody>
       </p:sp>
@@ -10136,7 +10265,7 @@
 </file>
 
 <file path=ppt/slides/slide24.xml><?xml version="1.0" encoding="utf-8"?>
-<p:sld xmlns:a="http://schemas.openxmlformats.org/drawingml/2006/main" xmlns:p="http://schemas.openxmlformats.org/presentationml/2006/main" xmlns:r="http://schemas.openxmlformats.org/officeDocument/2006/relationships">
+<p:sld xmlns:a="http://schemas.openxmlformats.org/drawingml/2006/main" xmlns:r="http://schemas.openxmlformats.org/officeDocument/2006/relationships" xmlns:p="http://schemas.openxmlformats.org/presentationml/2006/main">
   <p:cSld>
     <p:spTree>
       <p:nvGrpSpPr>
@@ -10144,7 +10273,14 @@
         <p:cNvGrpSpPr/>
         <p:nvPr/>
       </p:nvGrpSpPr>
-      <p:grpSpPr/>
+      <p:grpSpPr>
+        <a:xfrm>
+          <a:off x="0" y="0"/>
+          <a:ext cx="0" cy="0"/>
+          <a:chOff x="0" y="0"/>
+          <a:chExt cx="0" cy="0"/>
+        </a:xfrm>
+      </p:grpSpPr>
       <p:sp>
         <p:nvSpPr>
           <p:cNvPr id="2" name="Rectangle 1"/>
@@ -10186,6 +10322,7 @@
           <a:lstStyle/>
           <a:p>
             <a:pPr algn="ctr"/>
+            <a:endParaRPr/>
           </a:p>
         </p:txBody>
       </p:sp>
@@ -10363,7 +10500,7 @@
 </file>
 
 <file path=ppt/slides/slide25.xml><?xml version="1.0" encoding="utf-8"?>
-<p:sld xmlns:a="http://schemas.openxmlformats.org/drawingml/2006/main" xmlns:p="http://schemas.openxmlformats.org/presentationml/2006/main" xmlns:r="http://schemas.openxmlformats.org/officeDocument/2006/relationships">
+<p:sld xmlns:a="http://schemas.openxmlformats.org/drawingml/2006/main" xmlns:r="http://schemas.openxmlformats.org/officeDocument/2006/relationships" xmlns:p="http://schemas.openxmlformats.org/presentationml/2006/main">
   <p:cSld>
     <p:spTree>
       <p:nvGrpSpPr>
@@ -10371,7 +10508,14 @@
         <p:cNvGrpSpPr/>
         <p:nvPr/>
       </p:nvGrpSpPr>
-      <p:grpSpPr/>
+      <p:grpSpPr>
+        <a:xfrm>
+          <a:off x="0" y="0"/>
+          <a:ext cx="0" cy="0"/>
+          <a:chOff x="0" y="0"/>
+          <a:chExt cx="0" cy="0"/>
+        </a:xfrm>
+      </p:grpSpPr>
       <p:sp>
         <p:nvSpPr>
           <p:cNvPr id="2" name="Rectangle 1"/>
@@ -10413,6 +10557,7 @@
           <a:lstStyle/>
           <a:p>
             <a:pPr algn="ctr"/>
+            <a:endParaRPr/>
           </a:p>
         </p:txBody>
       </p:sp>
@@ -10590,7 +10735,7 @@
 </file>
 
 <file path=ppt/slides/slide26.xml><?xml version="1.0" encoding="utf-8"?>
-<p:sld xmlns:a="http://schemas.openxmlformats.org/drawingml/2006/main" xmlns:p="http://schemas.openxmlformats.org/presentationml/2006/main" xmlns:r="http://schemas.openxmlformats.org/officeDocument/2006/relationships">
+<p:sld xmlns:a="http://schemas.openxmlformats.org/drawingml/2006/main" xmlns:r="http://schemas.openxmlformats.org/officeDocument/2006/relationships" xmlns:p="http://schemas.openxmlformats.org/presentationml/2006/main">
   <p:cSld>
     <p:spTree>
       <p:nvGrpSpPr>
@@ -10598,7 +10743,14 @@
         <p:cNvGrpSpPr/>
         <p:nvPr/>
       </p:nvGrpSpPr>
-      <p:grpSpPr/>
+      <p:grpSpPr>
+        <a:xfrm>
+          <a:off x="0" y="0"/>
+          <a:ext cx="0" cy="0"/>
+          <a:chOff x="0" y="0"/>
+          <a:chExt cx="0" cy="0"/>
+        </a:xfrm>
+      </p:grpSpPr>
       <p:sp>
         <p:nvSpPr>
           <p:cNvPr id="2" name="Rectangle 1"/>
@@ -10640,6 +10792,7 @@
           <a:lstStyle/>
           <a:p>
             <a:pPr algn="ctr"/>
+            <a:endParaRPr/>
           </a:p>
         </p:txBody>
       </p:sp>
@@ -10833,7 +10986,7 @@
 </file>
 
 <file path=ppt/slides/slide27.xml><?xml version="1.0" encoding="utf-8"?>
-<p:sld xmlns:a="http://schemas.openxmlformats.org/drawingml/2006/main" xmlns:p="http://schemas.openxmlformats.org/presentationml/2006/main" xmlns:r="http://schemas.openxmlformats.org/officeDocument/2006/relationships">
+<p:sld xmlns:a="http://schemas.openxmlformats.org/drawingml/2006/main" xmlns:r="http://schemas.openxmlformats.org/officeDocument/2006/relationships" xmlns:p="http://schemas.openxmlformats.org/presentationml/2006/main">
   <p:cSld>
     <p:spTree>
       <p:nvGrpSpPr>
@@ -10841,7 +10994,14 @@
         <p:cNvGrpSpPr/>
         <p:nvPr/>
       </p:nvGrpSpPr>
-      <p:grpSpPr/>
+      <p:grpSpPr>
+        <a:xfrm>
+          <a:off x="0" y="0"/>
+          <a:ext cx="0" cy="0"/>
+          <a:chOff x="0" y="0"/>
+          <a:chExt cx="0" cy="0"/>
+        </a:xfrm>
+      </p:grpSpPr>
       <p:sp>
         <p:nvSpPr>
           <p:cNvPr id="2" name="Rectangle 1"/>
@@ -10883,6 +11043,7 @@
           <a:lstStyle/>
           <a:p>
             <a:pPr algn="ctr"/>
+            <a:endParaRPr/>
           </a:p>
         </p:txBody>
       </p:sp>
@@ -11060,7 +11221,7 @@
 </file>
 
 <file path=ppt/slides/slide28.xml><?xml version="1.0" encoding="utf-8"?>
-<p:sld xmlns:a="http://schemas.openxmlformats.org/drawingml/2006/main" xmlns:p="http://schemas.openxmlformats.org/presentationml/2006/main" xmlns:r="http://schemas.openxmlformats.org/officeDocument/2006/relationships">
+<p:sld xmlns:a="http://schemas.openxmlformats.org/drawingml/2006/main" xmlns:r="http://schemas.openxmlformats.org/officeDocument/2006/relationships" xmlns:p="http://schemas.openxmlformats.org/presentationml/2006/main">
   <p:cSld>
     <p:spTree>
       <p:nvGrpSpPr>
@@ -11068,7 +11229,14 @@
         <p:cNvGrpSpPr/>
         <p:nvPr/>
       </p:nvGrpSpPr>
-      <p:grpSpPr/>
+      <p:grpSpPr>
+        <a:xfrm>
+          <a:off x="0" y="0"/>
+          <a:ext cx="0" cy="0"/>
+          <a:chOff x="0" y="0"/>
+          <a:chExt cx="0" cy="0"/>
+        </a:xfrm>
+      </p:grpSpPr>
       <p:sp>
         <p:nvSpPr>
           <p:cNvPr id="2" name="Rectangle 1"/>
@@ -11110,6 +11278,7 @@
           <a:lstStyle/>
           <a:p>
             <a:pPr algn="ctr"/>
+            <a:endParaRPr/>
           </a:p>
         </p:txBody>
       </p:sp>
@@ -11232,6 +11401,7 @@
           <a:lstStyle/>
           <a:p>
             <a:pPr algn="ctr"/>
+            <a:endParaRPr/>
           </a:p>
         </p:txBody>
       </p:sp>
@@ -11315,7 +11485,7 @@
 </file>
 
 <file path=ppt/slides/slide29.xml><?xml version="1.0" encoding="utf-8"?>
-<p:sld xmlns:a="http://schemas.openxmlformats.org/drawingml/2006/main" xmlns:p="http://schemas.openxmlformats.org/presentationml/2006/main" xmlns:r="http://schemas.openxmlformats.org/officeDocument/2006/relationships">
+<p:sld xmlns:a="http://schemas.openxmlformats.org/drawingml/2006/main" xmlns:r="http://schemas.openxmlformats.org/officeDocument/2006/relationships" xmlns:p="http://schemas.openxmlformats.org/presentationml/2006/main">
   <p:cSld>
     <p:spTree>
       <p:nvGrpSpPr>
@@ -11323,7 +11493,14 @@
         <p:cNvGrpSpPr/>
         <p:nvPr/>
       </p:nvGrpSpPr>
-      <p:grpSpPr/>
+      <p:grpSpPr>
+        <a:xfrm>
+          <a:off x="0" y="0"/>
+          <a:ext cx="0" cy="0"/>
+          <a:chOff x="0" y="0"/>
+          <a:chExt cx="0" cy="0"/>
+        </a:xfrm>
+      </p:grpSpPr>
       <p:sp>
         <p:nvSpPr>
           <p:cNvPr id="2" name="Rectangle 1"/>
@@ -11365,6 +11542,7 @@
           <a:lstStyle/>
           <a:p>
             <a:pPr algn="ctr"/>
+            <a:endParaRPr/>
           </a:p>
         </p:txBody>
       </p:sp>
@@ -11542,7 +11720,7 @@
 </file>
 
 <file path=ppt/slides/slide3.xml><?xml version="1.0" encoding="utf-8"?>
-<p:sld xmlns:a="http://schemas.openxmlformats.org/drawingml/2006/main" xmlns:p="http://schemas.openxmlformats.org/presentationml/2006/main" xmlns:r="http://schemas.openxmlformats.org/officeDocument/2006/relationships">
+<p:sld xmlns:a="http://schemas.openxmlformats.org/drawingml/2006/main" xmlns:r="http://schemas.openxmlformats.org/officeDocument/2006/relationships" xmlns:p="http://schemas.openxmlformats.org/presentationml/2006/main">
   <p:cSld>
     <p:spTree>
       <p:nvGrpSpPr>
@@ -11550,7 +11728,14 @@
         <p:cNvGrpSpPr/>
         <p:nvPr/>
       </p:nvGrpSpPr>
-      <p:grpSpPr/>
+      <p:grpSpPr>
+        <a:xfrm>
+          <a:off x="0" y="0"/>
+          <a:ext cx="0" cy="0"/>
+          <a:chOff x="0" y="0"/>
+          <a:chExt cx="0" cy="0"/>
+        </a:xfrm>
+      </p:grpSpPr>
       <p:sp>
         <p:nvSpPr>
           <p:cNvPr id="2" name="Rectangle 1"/>
@@ -11592,6 +11777,7 @@
           <a:lstStyle/>
           <a:p>
             <a:pPr algn="ctr"/>
+            <a:endParaRPr/>
           </a:p>
         </p:txBody>
       </p:sp>
@@ -11778,7 +11964,7 @@
 </file>
 
 <file path=ppt/slides/slide30.xml><?xml version="1.0" encoding="utf-8"?>
-<p:sld xmlns:a="http://schemas.openxmlformats.org/drawingml/2006/main" xmlns:p="http://schemas.openxmlformats.org/presentationml/2006/main" xmlns:r="http://schemas.openxmlformats.org/officeDocument/2006/relationships">
+<p:sld xmlns:a="http://schemas.openxmlformats.org/drawingml/2006/main" xmlns:r="http://schemas.openxmlformats.org/officeDocument/2006/relationships" xmlns:p="http://schemas.openxmlformats.org/presentationml/2006/main">
   <p:cSld>
     <p:spTree>
       <p:nvGrpSpPr>
@@ -11786,7 +11972,14 @@
         <p:cNvGrpSpPr/>
         <p:nvPr/>
       </p:nvGrpSpPr>
-      <p:grpSpPr/>
+      <p:grpSpPr>
+        <a:xfrm>
+          <a:off x="0" y="0"/>
+          <a:ext cx="0" cy="0"/>
+          <a:chOff x="0" y="0"/>
+          <a:chExt cx="0" cy="0"/>
+        </a:xfrm>
+      </p:grpSpPr>
       <p:sp>
         <p:nvSpPr>
           <p:cNvPr id="2" name="Rectangle 1"/>
@@ -11828,6 +12021,7 @@
           <a:lstStyle/>
           <a:p>
             <a:pPr algn="ctr"/>
+            <a:endParaRPr/>
           </a:p>
         </p:txBody>
       </p:sp>
@@ -12021,7 +12215,7 @@
 </file>
 
 <file path=ppt/slides/slide31.xml><?xml version="1.0" encoding="utf-8"?>
-<p:sld xmlns:a="http://schemas.openxmlformats.org/drawingml/2006/main" xmlns:p="http://schemas.openxmlformats.org/presentationml/2006/main" xmlns:r="http://schemas.openxmlformats.org/officeDocument/2006/relationships">
+<p:sld xmlns:a="http://schemas.openxmlformats.org/drawingml/2006/main" xmlns:r="http://schemas.openxmlformats.org/officeDocument/2006/relationships" xmlns:p="http://schemas.openxmlformats.org/presentationml/2006/main">
   <p:cSld>
     <p:spTree>
       <p:nvGrpSpPr>
@@ -12029,7 +12223,14 @@
         <p:cNvGrpSpPr/>
         <p:nvPr/>
       </p:nvGrpSpPr>
-      <p:grpSpPr/>
+      <p:grpSpPr>
+        <a:xfrm>
+          <a:off x="0" y="0"/>
+          <a:ext cx="0" cy="0"/>
+          <a:chOff x="0" y="0"/>
+          <a:chExt cx="0" cy="0"/>
+        </a:xfrm>
+      </p:grpSpPr>
       <p:sp>
         <p:nvSpPr>
           <p:cNvPr id="2" name="Rectangle 1"/>
@@ -12071,6 +12272,7 @@
           <a:lstStyle/>
           <a:p>
             <a:pPr algn="ctr"/>
+            <a:endParaRPr/>
           </a:p>
         </p:txBody>
       </p:sp>
@@ -12264,7 +12466,7 @@
 </file>
 
 <file path=ppt/slides/slide32.xml><?xml version="1.0" encoding="utf-8"?>
-<p:sld xmlns:a="http://schemas.openxmlformats.org/drawingml/2006/main" xmlns:p="http://schemas.openxmlformats.org/presentationml/2006/main" xmlns:r="http://schemas.openxmlformats.org/officeDocument/2006/relationships">
+<p:sld xmlns:a="http://schemas.openxmlformats.org/drawingml/2006/main" xmlns:r="http://schemas.openxmlformats.org/officeDocument/2006/relationships" xmlns:p="http://schemas.openxmlformats.org/presentationml/2006/main">
   <p:cSld>
     <p:spTree>
       <p:nvGrpSpPr>
@@ -12272,7 +12474,14 @@
         <p:cNvGrpSpPr/>
         <p:nvPr/>
       </p:nvGrpSpPr>
-      <p:grpSpPr/>
+      <p:grpSpPr>
+        <a:xfrm>
+          <a:off x="0" y="0"/>
+          <a:ext cx="0" cy="0"/>
+          <a:chOff x="0" y="0"/>
+          <a:chExt cx="0" cy="0"/>
+        </a:xfrm>
+      </p:grpSpPr>
       <p:sp>
         <p:nvSpPr>
           <p:cNvPr id="2" name="Rectangle 1"/>
@@ -12314,6 +12523,7 @@
           <a:lstStyle/>
           <a:p>
             <a:pPr algn="ctr"/>
+            <a:endParaRPr/>
           </a:p>
         </p:txBody>
       </p:sp>
@@ -12507,7 +12717,7 @@
 </file>
 
 <file path=ppt/slides/slide33.xml><?xml version="1.0" encoding="utf-8"?>
-<p:sld xmlns:a="http://schemas.openxmlformats.org/drawingml/2006/main" xmlns:p="http://schemas.openxmlformats.org/presentationml/2006/main" xmlns:r="http://schemas.openxmlformats.org/officeDocument/2006/relationships">
+<p:sld xmlns:a="http://schemas.openxmlformats.org/drawingml/2006/main" xmlns:r="http://schemas.openxmlformats.org/officeDocument/2006/relationships" xmlns:p="http://schemas.openxmlformats.org/presentationml/2006/main">
   <p:cSld>
     <p:spTree>
       <p:nvGrpSpPr>
@@ -12515,7 +12725,14 @@
         <p:cNvGrpSpPr/>
         <p:nvPr/>
       </p:nvGrpSpPr>
-      <p:grpSpPr/>
+      <p:grpSpPr>
+        <a:xfrm>
+          <a:off x="0" y="0"/>
+          <a:ext cx="0" cy="0"/>
+          <a:chOff x="0" y="0"/>
+          <a:chExt cx="0" cy="0"/>
+        </a:xfrm>
+      </p:grpSpPr>
       <p:sp>
         <p:nvSpPr>
           <p:cNvPr id="2" name="Rectangle 1"/>
@@ -12557,6 +12774,7 @@
           <a:lstStyle/>
           <a:p>
             <a:pPr algn="ctr"/>
+            <a:endParaRPr/>
           </a:p>
         </p:txBody>
       </p:sp>
@@ -12750,7 +12968,7 @@
 </file>
 
 <file path=ppt/slides/slide34.xml><?xml version="1.0" encoding="utf-8"?>
-<p:sld xmlns:a="http://schemas.openxmlformats.org/drawingml/2006/main" xmlns:p="http://schemas.openxmlformats.org/presentationml/2006/main" xmlns:r="http://schemas.openxmlformats.org/officeDocument/2006/relationships">
+<p:sld xmlns:a="http://schemas.openxmlformats.org/drawingml/2006/main" xmlns:r="http://schemas.openxmlformats.org/officeDocument/2006/relationships" xmlns:p="http://schemas.openxmlformats.org/presentationml/2006/main">
   <p:cSld>
     <p:spTree>
       <p:nvGrpSpPr>
@@ -12758,7 +12976,14 @@
         <p:cNvGrpSpPr/>
         <p:nvPr/>
       </p:nvGrpSpPr>
-      <p:grpSpPr/>
+      <p:grpSpPr>
+        <a:xfrm>
+          <a:off x="0" y="0"/>
+          <a:ext cx="0" cy="0"/>
+          <a:chOff x="0" y="0"/>
+          <a:chExt cx="0" cy="0"/>
+        </a:xfrm>
+      </p:grpSpPr>
       <p:sp>
         <p:nvSpPr>
           <p:cNvPr id="2" name="Rectangle 1"/>
@@ -12800,6 +13025,7 @@
           <a:lstStyle/>
           <a:p>
             <a:pPr algn="ctr"/>
+            <a:endParaRPr/>
           </a:p>
         </p:txBody>
       </p:sp>
@@ -12922,6 +13148,7 @@
           <a:lstStyle/>
           <a:p>
             <a:pPr algn="ctr"/>
+            <a:endParaRPr/>
           </a:p>
         </p:txBody>
       </p:sp>
@@ -12989,7 +13216,7 @@
 </file>
 
 <file path=ppt/slides/slide35.xml><?xml version="1.0" encoding="utf-8"?>
-<p:sld xmlns:a="http://schemas.openxmlformats.org/drawingml/2006/main" xmlns:p="http://schemas.openxmlformats.org/presentationml/2006/main" xmlns:r="http://schemas.openxmlformats.org/officeDocument/2006/relationships">
+<p:sld xmlns:a="http://schemas.openxmlformats.org/drawingml/2006/main" xmlns:r="http://schemas.openxmlformats.org/officeDocument/2006/relationships" xmlns:p="http://schemas.openxmlformats.org/presentationml/2006/main">
   <p:cSld>
     <p:spTree>
       <p:nvGrpSpPr>
@@ -12997,7 +13224,14 @@
         <p:cNvGrpSpPr/>
         <p:nvPr/>
       </p:nvGrpSpPr>
-      <p:grpSpPr/>
+      <p:grpSpPr>
+        <a:xfrm>
+          <a:off x="0" y="0"/>
+          <a:ext cx="0" cy="0"/>
+          <a:chOff x="0" y="0"/>
+          <a:chExt cx="0" cy="0"/>
+        </a:xfrm>
+      </p:grpSpPr>
       <p:sp>
         <p:nvSpPr>
           <p:cNvPr id="2" name="Rectangle 1"/>
@@ -13039,6 +13273,7 @@
           <a:lstStyle/>
           <a:p>
             <a:pPr algn="ctr"/>
+            <a:endParaRPr/>
           </a:p>
         </p:txBody>
       </p:sp>
@@ -13216,7 +13451,7 @@
 </file>
 
 <file path=ppt/slides/slide36.xml><?xml version="1.0" encoding="utf-8"?>
-<p:sld xmlns:a="http://schemas.openxmlformats.org/drawingml/2006/main" xmlns:p="http://schemas.openxmlformats.org/presentationml/2006/main" xmlns:r="http://schemas.openxmlformats.org/officeDocument/2006/relationships">
+<p:sld xmlns:a="http://schemas.openxmlformats.org/drawingml/2006/main" xmlns:r="http://schemas.openxmlformats.org/officeDocument/2006/relationships" xmlns:p="http://schemas.openxmlformats.org/presentationml/2006/main">
   <p:cSld>
     <p:spTree>
       <p:nvGrpSpPr>
@@ -13224,7 +13459,14 @@
         <p:cNvGrpSpPr/>
         <p:nvPr/>
       </p:nvGrpSpPr>
-      <p:grpSpPr/>
+      <p:grpSpPr>
+        <a:xfrm>
+          <a:off x="0" y="0"/>
+          <a:ext cx="0" cy="0"/>
+          <a:chOff x="0" y="0"/>
+          <a:chExt cx="0" cy="0"/>
+        </a:xfrm>
+      </p:grpSpPr>
       <p:sp>
         <p:nvSpPr>
           <p:cNvPr id="2" name="Rectangle 1"/>
@@ -13266,6 +13508,7 @@
           <a:lstStyle/>
           <a:p>
             <a:pPr algn="ctr"/>
+            <a:endParaRPr/>
           </a:p>
         </p:txBody>
       </p:sp>
@@ -13459,7 +13702,7 @@
 </file>
 
 <file path=ppt/slides/slide37.xml><?xml version="1.0" encoding="utf-8"?>
-<p:sld xmlns:a="http://schemas.openxmlformats.org/drawingml/2006/main" xmlns:p="http://schemas.openxmlformats.org/presentationml/2006/main" xmlns:r="http://schemas.openxmlformats.org/officeDocument/2006/relationships">
+<p:sld xmlns:a="http://schemas.openxmlformats.org/drawingml/2006/main" xmlns:r="http://schemas.openxmlformats.org/officeDocument/2006/relationships" xmlns:p="http://schemas.openxmlformats.org/presentationml/2006/main">
   <p:cSld>
     <p:spTree>
       <p:nvGrpSpPr>
@@ -13467,7 +13710,14 @@
         <p:cNvGrpSpPr/>
         <p:nvPr/>
       </p:nvGrpSpPr>
-      <p:grpSpPr/>
+      <p:grpSpPr>
+        <a:xfrm>
+          <a:off x="0" y="0"/>
+          <a:ext cx="0" cy="0"/>
+          <a:chOff x="0" y="0"/>
+          <a:chExt cx="0" cy="0"/>
+        </a:xfrm>
+      </p:grpSpPr>
       <p:sp>
         <p:nvSpPr>
           <p:cNvPr id="2" name="Rectangle 1"/>
@@ -13509,6 +13759,7 @@
           <a:lstStyle/>
           <a:p>
             <a:pPr algn="ctr"/>
+            <a:endParaRPr/>
           </a:p>
         </p:txBody>
       </p:sp>
@@ -13702,7 +13953,7 @@
 </file>
 
 <file path=ppt/slides/slide38.xml><?xml version="1.0" encoding="utf-8"?>
-<p:sld xmlns:a="http://schemas.openxmlformats.org/drawingml/2006/main" xmlns:p="http://schemas.openxmlformats.org/presentationml/2006/main" xmlns:r="http://schemas.openxmlformats.org/officeDocument/2006/relationships">
+<p:sld xmlns:a="http://schemas.openxmlformats.org/drawingml/2006/main" xmlns:r="http://schemas.openxmlformats.org/officeDocument/2006/relationships" xmlns:p="http://schemas.openxmlformats.org/presentationml/2006/main">
   <p:cSld>
     <p:spTree>
       <p:nvGrpSpPr>
@@ -13710,7 +13961,14 @@
         <p:cNvGrpSpPr/>
         <p:nvPr/>
       </p:nvGrpSpPr>
-      <p:grpSpPr/>
+      <p:grpSpPr>
+        <a:xfrm>
+          <a:off x="0" y="0"/>
+          <a:ext cx="0" cy="0"/>
+          <a:chOff x="0" y="0"/>
+          <a:chExt cx="0" cy="0"/>
+        </a:xfrm>
+      </p:grpSpPr>
       <p:sp>
         <p:nvSpPr>
           <p:cNvPr id="2" name="Rectangle 1"/>
@@ -13752,6 +14010,7 @@
           <a:lstStyle/>
           <a:p>
             <a:pPr algn="ctr"/>
+            <a:endParaRPr/>
           </a:p>
         </p:txBody>
       </p:sp>
@@ -13929,7 +14188,7 @@
 </file>
 
 <file path=ppt/slides/slide39.xml><?xml version="1.0" encoding="utf-8"?>
-<p:sld xmlns:a="http://schemas.openxmlformats.org/drawingml/2006/main" xmlns:p="http://schemas.openxmlformats.org/presentationml/2006/main" xmlns:r="http://schemas.openxmlformats.org/officeDocument/2006/relationships">
+<p:sld xmlns:a="http://schemas.openxmlformats.org/drawingml/2006/main" xmlns:r="http://schemas.openxmlformats.org/officeDocument/2006/relationships" xmlns:p="http://schemas.openxmlformats.org/presentationml/2006/main">
   <p:cSld>
     <p:spTree>
       <p:nvGrpSpPr>
@@ -13937,7 +14196,14 @@
         <p:cNvGrpSpPr/>
         <p:nvPr/>
       </p:nvGrpSpPr>
-      <p:grpSpPr/>
+      <p:grpSpPr>
+        <a:xfrm>
+          <a:off x="0" y="0"/>
+          <a:ext cx="0" cy="0"/>
+          <a:chOff x="0" y="0"/>
+          <a:chExt cx="0" cy="0"/>
+        </a:xfrm>
+      </p:grpSpPr>
       <p:sp>
         <p:nvSpPr>
           <p:cNvPr id="2" name="Rectangle 1"/>
@@ -13979,6 +14245,7 @@
           <a:lstStyle/>
           <a:p>
             <a:pPr algn="ctr"/>
+            <a:endParaRPr/>
           </a:p>
         </p:txBody>
       </p:sp>
@@ -14172,7 +14439,7 @@
 </file>
 
 <file path=ppt/slides/slide4.xml><?xml version="1.0" encoding="utf-8"?>
-<p:sld xmlns:a="http://schemas.openxmlformats.org/drawingml/2006/main" xmlns:p="http://schemas.openxmlformats.org/presentationml/2006/main" xmlns:r="http://schemas.openxmlformats.org/officeDocument/2006/relationships">
+<p:sld xmlns:a="http://schemas.openxmlformats.org/drawingml/2006/main" xmlns:r="http://schemas.openxmlformats.org/officeDocument/2006/relationships" xmlns:p="http://schemas.openxmlformats.org/presentationml/2006/main">
   <p:cSld>
     <p:spTree>
       <p:nvGrpSpPr>
@@ -14180,7 +14447,14 @@
         <p:cNvGrpSpPr/>
         <p:nvPr/>
       </p:nvGrpSpPr>
-      <p:grpSpPr/>
+      <p:grpSpPr>
+        <a:xfrm>
+          <a:off x="0" y="0"/>
+          <a:ext cx="0" cy="0"/>
+          <a:chOff x="0" y="0"/>
+          <a:chExt cx="0" cy="0"/>
+        </a:xfrm>
+      </p:grpSpPr>
       <p:sp>
         <p:nvSpPr>
           <p:cNvPr id="2" name="Rectangle 1"/>
@@ -14222,6 +14496,7 @@
           <a:lstStyle/>
           <a:p>
             <a:pPr algn="ctr"/>
+            <a:endParaRPr/>
           </a:p>
         </p:txBody>
       </p:sp>
@@ -14415,7 +14690,7 @@
 </file>
 
 <file path=ppt/slides/slide40.xml><?xml version="1.0" encoding="utf-8"?>
-<p:sld xmlns:a="http://schemas.openxmlformats.org/drawingml/2006/main" xmlns:p="http://schemas.openxmlformats.org/presentationml/2006/main" xmlns:r="http://schemas.openxmlformats.org/officeDocument/2006/relationships">
+<p:sld xmlns:a="http://schemas.openxmlformats.org/drawingml/2006/main" xmlns:r="http://schemas.openxmlformats.org/officeDocument/2006/relationships" xmlns:p="http://schemas.openxmlformats.org/presentationml/2006/main">
   <p:cSld>
     <p:spTree>
       <p:nvGrpSpPr>
@@ -14423,7 +14698,14 @@
         <p:cNvGrpSpPr/>
         <p:nvPr/>
       </p:nvGrpSpPr>
-      <p:grpSpPr/>
+      <p:grpSpPr>
+        <a:xfrm>
+          <a:off x="0" y="0"/>
+          <a:ext cx="0" cy="0"/>
+          <a:chOff x="0" y="0"/>
+          <a:chExt cx="0" cy="0"/>
+        </a:xfrm>
+      </p:grpSpPr>
       <p:sp>
         <p:nvSpPr>
           <p:cNvPr id="2" name="Rectangle 1"/>
@@ -14465,6 +14747,7 @@
           <a:lstStyle/>
           <a:p>
             <a:pPr algn="ctr"/>
+            <a:endParaRPr/>
           </a:p>
         </p:txBody>
       </p:sp>
@@ -14587,6 +14870,7 @@
           <a:lstStyle/>
           <a:p>
             <a:pPr algn="ctr"/>
+            <a:endParaRPr/>
           </a:p>
         </p:txBody>
       </p:sp>
@@ -14670,7 +14954,7 @@
 </file>
 
 <file path=ppt/slides/slide41.xml><?xml version="1.0" encoding="utf-8"?>
-<p:sld xmlns:a="http://schemas.openxmlformats.org/drawingml/2006/main" xmlns:p="http://schemas.openxmlformats.org/presentationml/2006/main" xmlns:r="http://schemas.openxmlformats.org/officeDocument/2006/relationships">
+<p:sld xmlns:a="http://schemas.openxmlformats.org/drawingml/2006/main" xmlns:r="http://schemas.openxmlformats.org/officeDocument/2006/relationships" xmlns:p="http://schemas.openxmlformats.org/presentationml/2006/main">
   <p:cSld>
     <p:spTree>
       <p:nvGrpSpPr>
@@ -14678,7 +14962,14 @@
         <p:cNvGrpSpPr/>
         <p:nvPr/>
       </p:nvGrpSpPr>
-      <p:grpSpPr/>
+      <p:grpSpPr>
+        <a:xfrm>
+          <a:off x="0" y="0"/>
+          <a:ext cx="0" cy="0"/>
+          <a:chOff x="0" y="0"/>
+          <a:chExt cx="0" cy="0"/>
+        </a:xfrm>
+      </p:grpSpPr>
       <p:sp>
         <p:nvSpPr>
           <p:cNvPr id="2" name="Rectangle 1"/>
@@ -14720,6 +15011,7 @@
           <a:lstStyle/>
           <a:p>
             <a:pPr algn="ctr"/>
+            <a:endParaRPr/>
           </a:p>
         </p:txBody>
       </p:sp>
@@ -14913,7 +15205,7 @@
 </file>
 
 <file path=ppt/slides/slide42.xml><?xml version="1.0" encoding="utf-8"?>
-<p:sld xmlns:a="http://schemas.openxmlformats.org/drawingml/2006/main" xmlns:p="http://schemas.openxmlformats.org/presentationml/2006/main" xmlns:r="http://schemas.openxmlformats.org/officeDocument/2006/relationships">
+<p:sld xmlns:a="http://schemas.openxmlformats.org/drawingml/2006/main" xmlns:r="http://schemas.openxmlformats.org/officeDocument/2006/relationships" xmlns:p="http://schemas.openxmlformats.org/presentationml/2006/main">
   <p:cSld>
     <p:spTree>
       <p:nvGrpSpPr>
@@ -14921,7 +15213,14 @@
         <p:cNvGrpSpPr/>
         <p:nvPr/>
       </p:nvGrpSpPr>
-      <p:grpSpPr/>
+      <p:grpSpPr>
+        <a:xfrm>
+          <a:off x="0" y="0"/>
+          <a:ext cx="0" cy="0"/>
+          <a:chOff x="0" y="0"/>
+          <a:chExt cx="0" cy="0"/>
+        </a:xfrm>
+      </p:grpSpPr>
       <p:sp>
         <p:nvSpPr>
           <p:cNvPr id="2" name="Rectangle 1"/>
@@ -14963,6 +15262,7 @@
           <a:lstStyle/>
           <a:p>
             <a:pPr algn="ctr"/>
+            <a:endParaRPr/>
           </a:p>
         </p:txBody>
       </p:sp>
@@ -15140,7 +15440,7 @@
 </file>
 
 <file path=ppt/slides/slide43.xml><?xml version="1.0" encoding="utf-8"?>
-<p:sld xmlns:a="http://schemas.openxmlformats.org/drawingml/2006/main" xmlns:p="http://schemas.openxmlformats.org/presentationml/2006/main" xmlns:r="http://schemas.openxmlformats.org/officeDocument/2006/relationships">
+<p:sld xmlns:a="http://schemas.openxmlformats.org/drawingml/2006/main" xmlns:r="http://schemas.openxmlformats.org/officeDocument/2006/relationships" xmlns:p="http://schemas.openxmlformats.org/presentationml/2006/main">
   <p:cSld>
     <p:spTree>
       <p:nvGrpSpPr>
@@ -15148,7 +15448,14 @@
         <p:cNvGrpSpPr/>
         <p:nvPr/>
       </p:nvGrpSpPr>
-      <p:grpSpPr/>
+      <p:grpSpPr>
+        <a:xfrm>
+          <a:off x="0" y="0"/>
+          <a:ext cx="0" cy="0"/>
+          <a:chOff x="0" y="0"/>
+          <a:chExt cx="0" cy="0"/>
+        </a:xfrm>
+      </p:grpSpPr>
       <p:sp>
         <p:nvSpPr>
           <p:cNvPr id="2" name="Rectangle 1"/>
@@ -15190,6 +15497,7 @@
           <a:lstStyle/>
           <a:p>
             <a:pPr algn="ctr"/>
+            <a:endParaRPr/>
           </a:p>
         </p:txBody>
       </p:sp>
@@ -15383,7 +15691,7 @@
 </file>
 
 <file path=ppt/slides/slide44.xml><?xml version="1.0" encoding="utf-8"?>
-<p:sld xmlns:a="http://schemas.openxmlformats.org/drawingml/2006/main" xmlns:p="http://schemas.openxmlformats.org/presentationml/2006/main" xmlns:r="http://schemas.openxmlformats.org/officeDocument/2006/relationships">
+<p:sld xmlns:a="http://schemas.openxmlformats.org/drawingml/2006/main" xmlns:r="http://schemas.openxmlformats.org/officeDocument/2006/relationships" xmlns:p="http://schemas.openxmlformats.org/presentationml/2006/main">
   <p:cSld>
     <p:spTree>
       <p:nvGrpSpPr>
@@ -15391,7 +15699,14 @@
         <p:cNvGrpSpPr/>
         <p:nvPr/>
       </p:nvGrpSpPr>
-      <p:grpSpPr/>
+      <p:grpSpPr>
+        <a:xfrm>
+          <a:off x="0" y="0"/>
+          <a:ext cx="0" cy="0"/>
+          <a:chOff x="0" y="0"/>
+          <a:chExt cx="0" cy="0"/>
+        </a:xfrm>
+      </p:grpSpPr>
       <p:sp>
         <p:nvSpPr>
           <p:cNvPr id="2" name="Rectangle 1"/>
@@ -15433,6 +15748,7 @@
           <a:lstStyle/>
           <a:p>
             <a:pPr algn="ctr"/>
+            <a:endParaRPr/>
           </a:p>
         </p:txBody>
       </p:sp>
@@ -15626,7 +15942,7 @@
 </file>
 
 <file path=ppt/slides/slide45.xml><?xml version="1.0" encoding="utf-8"?>
-<p:sld xmlns:a="http://schemas.openxmlformats.org/drawingml/2006/main" xmlns:p="http://schemas.openxmlformats.org/presentationml/2006/main" xmlns:r="http://schemas.openxmlformats.org/officeDocument/2006/relationships">
+<p:sld xmlns:a="http://schemas.openxmlformats.org/drawingml/2006/main" xmlns:r="http://schemas.openxmlformats.org/officeDocument/2006/relationships" xmlns:p="http://schemas.openxmlformats.org/presentationml/2006/main">
   <p:cSld>
     <p:spTree>
       <p:nvGrpSpPr>
@@ -15634,7 +15950,14 @@
         <p:cNvGrpSpPr/>
         <p:nvPr/>
       </p:nvGrpSpPr>
-      <p:grpSpPr/>
+      <p:grpSpPr>
+        <a:xfrm>
+          <a:off x="0" y="0"/>
+          <a:ext cx="0" cy="0"/>
+          <a:chOff x="0" y="0"/>
+          <a:chExt cx="0" cy="0"/>
+        </a:xfrm>
+      </p:grpSpPr>
       <p:sp>
         <p:nvSpPr>
           <p:cNvPr id="2" name="Rectangle 1"/>
@@ -15676,6 +15999,7 @@
           <a:lstStyle/>
           <a:p>
             <a:pPr algn="ctr"/>
+            <a:endParaRPr/>
           </a:p>
         </p:txBody>
       </p:sp>
@@ -15869,7 +16193,7 @@
 </file>
 
 <file path=ppt/slides/slide46.xml><?xml version="1.0" encoding="utf-8"?>
-<p:sld xmlns:a="http://schemas.openxmlformats.org/drawingml/2006/main" xmlns:p="http://schemas.openxmlformats.org/presentationml/2006/main" xmlns:r="http://schemas.openxmlformats.org/officeDocument/2006/relationships">
+<p:sld xmlns:a="http://schemas.openxmlformats.org/drawingml/2006/main" xmlns:r="http://schemas.openxmlformats.org/officeDocument/2006/relationships" xmlns:p="http://schemas.openxmlformats.org/presentationml/2006/main">
   <p:cSld>
     <p:spTree>
       <p:nvGrpSpPr>
@@ -15877,7 +16201,14 @@
         <p:cNvGrpSpPr/>
         <p:nvPr/>
       </p:nvGrpSpPr>
-      <p:grpSpPr/>
+      <p:grpSpPr>
+        <a:xfrm>
+          <a:off x="0" y="0"/>
+          <a:ext cx="0" cy="0"/>
+          <a:chOff x="0" y="0"/>
+          <a:chExt cx="0" cy="0"/>
+        </a:xfrm>
+      </p:grpSpPr>
       <p:sp>
         <p:nvSpPr>
           <p:cNvPr id="2" name="Rectangle 1"/>
@@ -15919,6 +16250,7 @@
           <a:lstStyle/>
           <a:p>
             <a:pPr algn="ctr"/>
+            <a:endParaRPr/>
           </a:p>
         </p:txBody>
       </p:sp>
@@ -16112,7 +16444,7 @@
 </file>
 
 <file path=ppt/slides/slide47.xml><?xml version="1.0" encoding="utf-8"?>
-<p:sld xmlns:a="http://schemas.openxmlformats.org/drawingml/2006/main" xmlns:p="http://schemas.openxmlformats.org/presentationml/2006/main" xmlns:r="http://schemas.openxmlformats.org/officeDocument/2006/relationships">
+<p:sld xmlns:a="http://schemas.openxmlformats.org/drawingml/2006/main" xmlns:r="http://schemas.openxmlformats.org/officeDocument/2006/relationships" xmlns:p="http://schemas.openxmlformats.org/presentationml/2006/main">
   <p:cSld>
     <p:spTree>
       <p:nvGrpSpPr>
@@ -16120,7 +16452,14 @@
         <p:cNvGrpSpPr/>
         <p:nvPr/>
       </p:nvGrpSpPr>
-      <p:grpSpPr/>
+      <p:grpSpPr>
+        <a:xfrm>
+          <a:off x="0" y="0"/>
+          <a:ext cx="0" cy="0"/>
+          <a:chOff x="0" y="0"/>
+          <a:chExt cx="0" cy="0"/>
+        </a:xfrm>
+      </p:grpSpPr>
       <p:sp>
         <p:nvSpPr>
           <p:cNvPr id="2" name="Rectangle 1"/>
@@ -16162,6 +16501,7 @@
           <a:lstStyle/>
           <a:p>
             <a:pPr algn="ctr"/>
+            <a:endParaRPr/>
           </a:p>
         </p:txBody>
       </p:sp>
@@ -16355,7 +16695,7 @@
 </file>
 
 <file path=ppt/slides/slide48.xml><?xml version="1.0" encoding="utf-8"?>
-<p:sld xmlns:a="http://schemas.openxmlformats.org/drawingml/2006/main" xmlns:p="http://schemas.openxmlformats.org/presentationml/2006/main" xmlns:r="http://schemas.openxmlformats.org/officeDocument/2006/relationships">
+<p:sld xmlns:a="http://schemas.openxmlformats.org/drawingml/2006/main" xmlns:r="http://schemas.openxmlformats.org/officeDocument/2006/relationships" xmlns:p="http://schemas.openxmlformats.org/presentationml/2006/main">
   <p:cSld>
     <p:spTree>
       <p:nvGrpSpPr>
@@ -16363,7 +16703,14 @@
         <p:cNvGrpSpPr/>
         <p:nvPr/>
       </p:nvGrpSpPr>
-      <p:grpSpPr/>
+      <p:grpSpPr>
+        <a:xfrm>
+          <a:off x="0" y="0"/>
+          <a:ext cx="0" cy="0"/>
+          <a:chOff x="0" y="0"/>
+          <a:chExt cx="0" cy="0"/>
+        </a:xfrm>
+      </p:grpSpPr>
       <p:sp>
         <p:nvSpPr>
           <p:cNvPr id="2" name="Rectangle 1"/>
@@ -16405,6 +16752,7 @@
           <a:lstStyle/>
           <a:p>
             <a:pPr algn="ctr"/>
+            <a:endParaRPr/>
           </a:p>
         </p:txBody>
       </p:sp>
@@ -16527,6 +16875,7 @@
           <a:lstStyle/>
           <a:p>
             <a:pPr algn="ctr"/>
+            <a:endParaRPr/>
           </a:p>
         </p:txBody>
       </p:sp>
@@ -16594,7 +16943,7 @@
 </file>
 
 <file path=ppt/slides/slide49.xml><?xml version="1.0" encoding="utf-8"?>
-<p:sld xmlns:a="http://schemas.openxmlformats.org/drawingml/2006/main" xmlns:p="http://schemas.openxmlformats.org/presentationml/2006/main" xmlns:r="http://schemas.openxmlformats.org/officeDocument/2006/relationships">
+<p:sld xmlns:a="http://schemas.openxmlformats.org/drawingml/2006/main" xmlns:r="http://schemas.openxmlformats.org/officeDocument/2006/relationships" xmlns:p="http://schemas.openxmlformats.org/presentationml/2006/main">
   <p:cSld>
     <p:spTree>
       <p:nvGrpSpPr>
@@ -16602,7 +16951,14 @@
         <p:cNvGrpSpPr/>
         <p:nvPr/>
       </p:nvGrpSpPr>
-      <p:grpSpPr/>
+      <p:grpSpPr>
+        <a:xfrm>
+          <a:off x="0" y="0"/>
+          <a:ext cx="0" cy="0"/>
+          <a:chOff x="0" y="0"/>
+          <a:chExt cx="0" cy="0"/>
+        </a:xfrm>
+      </p:grpSpPr>
       <p:sp>
         <p:nvSpPr>
           <p:cNvPr id="2" name="Rectangle 1"/>
@@ -16644,6 +17000,7 @@
           <a:lstStyle/>
           <a:p>
             <a:pPr algn="ctr"/>
+            <a:endParaRPr/>
           </a:p>
         </p:txBody>
       </p:sp>
@@ -16821,7 +17178,7 @@
 </file>
 
 <file path=ppt/slides/slide5.xml><?xml version="1.0" encoding="utf-8"?>
-<p:sld xmlns:a="http://schemas.openxmlformats.org/drawingml/2006/main" xmlns:p="http://schemas.openxmlformats.org/presentationml/2006/main" xmlns:r="http://schemas.openxmlformats.org/officeDocument/2006/relationships">
+<p:sld xmlns:a="http://schemas.openxmlformats.org/drawingml/2006/main" xmlns:r="http://schemas.openxmlformats.org/officeDocument/2006/relationships" xmlns:p="http://schemas.openxmlformats.org/presentationml/2006/main">
   <p:cSld>
     <p:spTree>
       <p:nvGrpSpPr>
@@ -16829,7 +17186,14 @@
         <p:cNvGrpSpPr/>
         <p:nvPr/>
       </p:nvGrpSpPr>
-      <p:grpSpPr/>
+      <p:grpSpPr>
+        <a:xfrm>
+          <a:off x="0" y="0"/>
+          <a:ext cx="0" cy="0"/>
+          <a:chOff x="0" y="0"/>
+          <a:chExt cx="0" cy="0"/>
+        </a:xfrm>
+      </p:grpSpPr>
       <p:sp>
         <p:nvSpPr>
           <p:cNvPr id="2" name="Rectangle 1"/>
@@ -16871,6 +17235,7 @@
           <a:lstStyle/>
           <a:p>
             <a:pPr algn="ctr"/>
+            <a:endParaRPr/>
           </a:p>
         </p:txBody>
       </p:sp>
@@ -16993,6 +17358,7 @@
           <a:lstStyle/>
           <a:p>
             <a:pPr algn="ctr"/>
+            <a:endParaRPr/>
           </a:p>
         </p:txBody>
       </p:sp>
@@ -17060,7 +17426,7 @@
 </file>
 
 <file path=ppt/slides/slide50.xml><?xml version="1.0" encoding="utf-8"?>
-<p:sld xmlns:a="http://schemas.openxmlformats.org/drawingml/2006/main" xmlns:p="http://schemas.openxmlformats.org/presentationml/2006/main" xmlns:r="http://schemas.openxmlformats.org/officeDocument/2006/relationships">
+<p:sld xmlns:a="http://schemas.openxmlformats.org/drawingml/2006/main" xmlns:r="http://schemas.openxmlformats.org/officeDocument/2006/relationships" xmlns:p="http://schemas.openxmlformats.org/presentationml/2006/main">
   <p:cSld>
     <p:spTree>
       <p:nvGrpSpPr>
@@ -17068,7 +17434,14 @@
         <p:cNvGrpSpPr/>
         <p:nvPr/>
       </p:nvGrpSpPr>
-      <p:grpSpPr/>
+      <p:grpSpPr>
+        <a:xfrm>
+          <a:off x="0" y="0"/>
+          <a:ext cx="0" cy="0"/>
+          <a:chOff x="0" y="0"/>
+          <a:chExt cx="0" cy="0"/>
+        </a:xfrm>
+      </p:grpSpPr>
       <p:sp>
         <p:nvSpPr>
           <p:cNvPr id="2" name="Rectangle 1"/>
@@ -17110,6 +17483,7 @@
           <a:lstStyle/>
           <a:p>
             <a:pPr algn="ctr"/>
+            <a:endParaRPr/>
           </a:p>
         </p:txBody>
       </p:sp>
@@ -17287,7 +17661,7 @@
 </file>
 
 <file path=ppt/slides/slide51.xml><?xml version="1.0" encoding="utf-8"?>
-<p:sld xmlns:a="http://schemas.openxmlformats.org/drawingml/2006/main" xmlns:p="http://schemas.openxmlformats.org/presentationml/2006/main" xmlns:r="http://schemas.openxmlformats.org/officeDocument/2006/relationships">
+<p:sld xmlns:a="http://schemas.openxmlformats.org/drawingml/2006/main" xmlns:r="http://schemas.openxmlformats.org/officeDocument/2006/relationships" xmlns:p="http://schemas.openxmlformats.org/presentationml/2006/main">
   <p:cSld>
     <p:spTree>
       <p:nvGrpSpPr>
@@ -17295,7 +17669,14 @@
         <p:cNvGrpSpPr/>
         <p:nvPr/>
       </p:nvGrpSpPr>
-      <p:grpSpPr/>
+      <p:grpSpPr>
+        <a:xfrm>
+          <a:off x="0" y="0"/>
+          <a:ext cx="0" cy="0"/>
+          <a:chOff x="0" y="0"/>
+          <a:chExt cx="0" cy="0"/>
+        </a:xfrm>
+      </p:grpSpPr>
       <p:sp>
         <p:nvSpPr>
           <p:cNvPr id="2" name="Rectangle 1"/>
@@ -17337,6 +17718,7 @@
           <a:lstStyle/>
           <a:p>
             <a:pPr algn="ctr"/>
+            <a:endParaRPr/>
           </a:p>
         </p:txBody>
       </p:sp>
@@ -17530,7 +17912,7 @@
 </file>
 
 <file path=ppt/slides/slide52.xml><?xml version="1.0" encoding="utf-8"?>
-<p:sld xmlns:a="http://schemas.openxmlformats.org/drawingml/2006/main" xmlns:p="http://schemas.openxmlformats.org/presentationml/2006/main" xmlns:r="http://schemas.openxmlformats.org/officeDocument/2006/relationships">
+<p:sld xmlns:a="http://schemas.openxmlformats.org/drawingml/2006/main" xmlns:r="http://schemas.openxmlformats.org/officeDocument/2006/relationships" xmlns:p="http://schemas.openxmlformats.org/presentationml/2006/main">
   <p:cSld>
     <p:spTree>
       <p:nvGrpSpPr>
@@ -17538,7 +17920,14 @@
         <p:cNvGrpSpPr/>
         <p:nvPr/>
       </p:nvGrpSpPr>
-      <p:grpSpPr/>
+      <p:grpSpPr>
+        <a:xfrm>
+          <a:off x="0" y="0"/>
+          <a:ext cx="0" cy="0"/>
+          <a:chOff x="0" y="0"/>
+          <a:chExt cx="0" cy="0"/>
+        </a:xfrm>
+      </p:grpSpPr>
       <p:sp>
         <p:nvSpPr>
           <p:cNvPr id="2" name="Rectangle 1"/>
@@ -17580,6 +17969,7 @@
           <a:lstStyle/>
           <a:p>
             <a:pPr algn="ctr"/>
+            <a:endParaRPr/>
           </a:p>
         </p:txBody>
       </p:sp>
@@ -17814,7 +18204,7 @@
 </file>
 
 <file path=ppt/slides/slide6.xml><?xml version="1.0" encoding="utf-8"?>
-<p:sld xmlns:a="http://schemas.openxmlformats.org/drawingml/2006/main" xmlns:p="http://schemas.openxmlformats.org/presentationml/2006/main" xmlns:r="http://schemas.openxmlformats.org/officeDocument/2006/relationships">
+<p:sld xmlns:a="http://schemas.openxmlformats.org/drawingml/2006/main" xmlns:r="http://schemas.openxmlformats.org/officeDocument/2006/relationships" xmlns:p="http://schemas.openxmlformats.org/presentationml/2006/main">
   <p:cSld>
     <p:spTree>
       <p:nvGrpSpPr>
@@ -17822,7 +18212,14 @@
         <p:cNvGrpSpPr/>
         <p:nvPr/>
       </p:nvGrpSpPr>
-      <p:grpSpPr/>
+      <p:grpSpPr>
+        <a:xfrm>
+          <a:off x="0" y="0"/>
+          <a:ext cx="0" cy="0"/>
+          <a:chOff x="0" y="0"/>
+          <a:chExt cx="0" cy="0"/>
+        </a:xfrm>
+      </p:grpSpPr>
       <p:sp>
         <p:nvSpPr>
           <p:cNvPr id="2" name="Rectangle 1"/>
@@ -17864,6 +18261,7 @@
           <a:lstStyle/>
           <a:p>
             <a:pPr algn="ctr"/>
+            <a:endParaRPr/>
           </a:p>
         </p:txBody>
       </p:sp>
@@ -18057,7 +18455,7 @@
 </file>
 
 <file path=ppt/slides/slide7.xml><?xml version="1.0" encoding="utf-8"?>
-<p:sld xmlns:a="http://schemas.openxmlformats.org/drawingml/2006/main" xmlns:p="http://schemas.openxmlformats.org/presentationml/2006/main" xmlns:r="http://schemas.openxmlformats.org/officeDocument/2006/relationships">
+<p:sld xmlns:a="http://schemas.openxmlformats.org/drawingml/2006/main" xmlns:r="http://schemas.openxmlformats.org/officeDocument/2006/relationships" xmlns:p="http://schemas.openxmlformats.org/presentationml/2006/main">
   <p:cSld>
     <p:spTree>
       <p:nvGrpSpPr>
@@ -18065,7 +18463,14 @@
         <p:cNvGrpSpPr/>
         <p:nvPr/>
       </p:nvGrpSpPr>
-      <p:grpSpPr/>
+      <p:grpSpPr>
+        <a:xfrm>
+          <a:off x="0" y="0"/>
+          <a:ext cx="0" cy="0"/>
+          <a:chOff x="0" y="0"/>
+          <a:chExt cx="0" cy="0"/>
+        </a:xfrm>
+      </p:grpSpPr>
       <p:sp>
         <p:nvSpPr>
           <p:cNvPr id="2" name="Rectangle 1"/>
@@ -18107,6 +18512,7 @@
           <a:lstStyle/>
           <a:p>
             <a:pPr algn="ctr"/>
+            <a:endParaRPr/>
           </a:p>
         </p:txBody>
       </p:sp>
@@ -18284,7 +18690,7 @@
 </file>
 
 <file path=ppt/slides/slide8.xml><?xml version="1.0" encoding="utf-8"?>
-<p:sld xmlns:a="http://schemas.openxmlformats.org/drawingml/2006/main" xmlns:p="http://schemas.openxmlformats.org/presentationml/2006/main" xmlns:r="http://schemas.openxmlformats.org/officeDocument/2006/relationships">
+<p:sld xmlns:a="http://schemas.openxmlformats.org/drawingml/2006/main" xmlns:r="http://schemas.openxmlformats.org/officeDocument/2006/relationships" xmlns:p="http://schemas.openxmlformats.org/presentationml/2006/main">
   <p:cSld>
     <p:spTree>
       <p:nvGrpSpPr>
@@ -18292,7 +18698,14 @@
         <p:cNvGrpSpPr/>
         <p:nvPr/>
       </p:nvGrpSpPr>
-      <p:grpSpPr/>
+      <p:grpSpPr>
+        <a:xfrm>
+          <a:off x="0" y="0"/>
+          <a:ext cx="0" cy="0"/>
+          <a:chOff x="0" y="0"/>
+          <a:chExt cx="0" cy="0"/>
+        </a:xfrm>
+      </p:grpSpPr>
       <p:sp>
         <p:nvSpPr>
           <p:cNvPr id="2" name="Rectangle 1"/>
@@ -18334,6 +18747,7 @@
           <a:lstStyle/>
           <a:p>
             <a:pPr algn="ctr"/>
+            <a:endParaRPr/>
           </a:p>
         </p:txBody>
       </p:sp>
@@ -18527,7 +18941,7 @@
 </file>
 
 <file path=ppt/slides/slide9.xml><?xml version="1.0" encoding="utf-8"?>
-<p:sld xmlns:a="http://schemas.openxmlformats.org/drawingml/2006/main" xmlns:p="http://schemas.openxmlformats.org/presentationml/2006/main" xmlns:r="http://schemas.openxmlformats.org/officeDocument/2006/relationships">
+<p:sld xmlns:a="http://schemas.openxmlformats.org/drawingml/2006/main" xmlns:r="http://schemas.openxmlformats.org/officeDocument/2006/relationships" xmlns:p="http://schemas.openxmlformats.org/presentationml/2006/main">
   <p:cSld>
     <p:spTree>
       <p:nvGrpSpPr>
@@ -18535,7 +18949,14 @@
         <p:cNvGrpSpPr/>
         <p:nvPr/>
       </p:nvGrpSpPr>
-      <p:grpSpPr/>
+      <p:grpSpPr>
+        <a:xfrm>
+          <a:off x="0" y="0"/>
+          <a:ext cx="0" cy="0"/>
+          <a:chOff x="0" y="0"/>
+          <a:chExt cx="0" cy="0"/>
+        </a:xfrm>
+      </p:grpSpPr>
       <p:sp>
         <p:nvSpPr>
           <p:cNvPr id="2" name="Rectangle 1"/>
@@ -18577,6 +18998,7 @@
           <a:lstStyle/>
           <a:p>
             <a:pPr algn="ctr"/>
+            <a:endParaRPr/>
           </a:p>
         </p:txBody>
       </p:sp>
@@ -18699,6 +19121,7 @@
           <a:lstStyle/>
           <a:p>
             <a:pPr algn="ctr"/>
+            <a:endParaRPr/>
           </a:p>
         </p:txBody>
       </p:sp>
@@ -19102,7 +19525,7 @@
 </file>
 
 <file path=ppt/theme/theme2.xml><?xml version="1.0" encoding="utf-8"?>
-<a:theme xmlns:a="http://schemas.openxmlformats.org/drawingml/2006/main" name="Office Theme">
+<a:theme xmlns:a="http://schemas.openxmlformats.org/drawingml/2006/main" name="Office 테마">
   <a:themeElements>
     <a:clrScheme name="Office">
       <a:dk1>
@@ -19112,44 +19535,44 @@
         <a:sysClr val="window" lastClr="FFFFFF"/>
       </a:lt1>
       <a:dk2>
-        <a:srgbClr val="1F497D"/>
+        <a:srgbClr val="0E2841"/>
       </a:dk2>
       <a:lt2>
-        <a:srgbClr val="EEECE1"/>
+        <a:srgbClr val="E8E8E8"/>
       </a:lt2>
       <a:accent1>
-        <a:srgbClr val="4F81BD"/>
+        <a:srgbClr val="156082"/>
       </a:accent1>
       <a:accent2>
-        <a:srgbClr val="C0504D"/>
+        <a:srgbClr val="E97132"/>
       </a:accent2>
       <a:accent3>
-        <a:srgbClr val="9BBB59"/>
+        <a:srgbClr val="196B24"/>
       </a:accent3>
       <a:accent4>
-        <a:srgbClr val="8064A2"/>
+        <a:srgbClr val="0F9ED5"/>
       </a:accent4>
       <a:accent5>
-        <a:srgbClr val="4BACC6"/>
+        <a:srgbClr val="A02B93"/>
       </a:accent5>
       <a:accent6>
-        <a:srgbClr val="F79646"/>
+        <a:srgbClr val="4EA72E"/>
       </a:accent6>
       <a:hlink>
-        <a:srgbClr val="0000FF"/>
+        <a:srgbClr val="467886"/>
       </a:hlink>
       <a:folHlink>
-        <a:srgbClr val="800080"/>
+        <a:srgbClr val="96607D"/>
       </a:folHlink>
     </a:clrScheme>
     <a:fontScheme name="Office">
       <a:majorFont>
-        <a:latin typeface="Calibri"/>
+        <a:latin typeface="맑은 고딕" panose="02110004020202020204"/>
         <a:ea typeface=""/>
         <a:cs typeface=""/>
-        <a:font script="Jpan" typeface="ＭＳ Ｐゴシック"/>
+        <a:font script="Jpan" typeface="游ゴシック Light"/>
         <a:font script="Hang" typeface="맑은 고딕"/>
-        <a:font script="Hans" typeface="宋体"/>
+        <a:font script="Hans" typeface="等线 Light"/>
         <a:font script="Hant" typeface="新細明體"/>
         <a:font script="Arab" typeface="Times New Roman"/>
         <a:font script="Hebr" typeface="Times New Roman"/>
@@ -19177,14 +19600,31 @@
         <a:font script="Viet" typeface="Times New Roman"/>
         <a:font script="Uigh" typeface="Microsoft Uighur"/>
         <a:font script="Geor" typeface="Sylfaen"/>
+        <a:font script="Armn" typeface="Arial"/>
+        <a:font script="Bugi" typeface="Leelawadee UI"/>
+        <a:font script="Bopo" typeface="Microsoft JhengHei"/>
+        <a:font script="Java" typeface="Javanese Text"/>
+        <a:font script="Lisu" typeface="Segoe UI"/>
+        <a:font script="Mymr" typeface="Myanmar Text"/>
+        <a:font script="Nkoo" typeface="Ebrima"/>
+        <a:font script="Olck" typeface="Nirmala UI"/>
+        <a:font script="Osma" typeface="Ebrima"/>
+        <a:font script="Phag" typeface="Phagspa"/>
+        <a:font script="Syrn" typeface="Estrangelo Edessa"/>
+        <a:font script="Syrj" typeface="Estrangelo Edessa"/>
+        <a:font script="Syre" typeface="Estrangelo Edessa"/>
+        <a:font script="Sora" typeface="Nirmala UI"/>
+        <a:font script="Tale" typeface="Microsoft Tai Le"/>
+        <a:font script="Talu" typeface="Microsoft New Tai Lue"/>
+        <a:font script="Tfng" typeface="Ebrima"/>
       </a:majorFont>
       <a:minorFont>
-        <a:latin typeface="Calibri"/>
+        <a:latin typeface="맑은 고딕" panose="02110004020202020204"/>
         <a:ea typeface=""/>
         <a:cs typeface=""/>
-        <a:font script="Jpan" typeface="ＭＳ Ｐゴシック"/>
+        <a:font script="Jpan" typeface="游ゴシック"/>
         <a:font script="Hang" typeface="맑은 고딕"/>
-        <a:font script="Hans" typeface="宋体"/>
+        <a:font script="Hans" typeface="等线"/>
         <a:font script="Hant" typeface="新細明體"/>
         <a:font script="Arab" typeface="Arial"/>
         <a:font script="Hebr" typeface="Arial"/>
@@ -19212,6 +19652,23 @@
         <a:font script="Viet" typeface="Arial"/>
         <a:font script="Uigh" typeface="Microsoft Uighur"/>
         <a:font script="Geor" typeface="Sylfaen"/>
+        <a:font script="Armn" typeface="Arial"/>
+        <a:font script="Bugi" typeface="Leelawadee UI"/>
+        <a:font script="Bopo" typeface="Microsoft JhengHei"/>
+        <a:font script="Java" typeface="Javanese Text"/>
+        <a:font script="Lisu" typeface="Segoe UI"/>
+        <a:font script="Mymr" typeface="Myanmar Text"/>
+        <a:font script="Nkoo" typeface="Ebrima"/>
+        <a:font script="Olck" typeface="Nirmala UI"/>
+        <a:font script="Osma" typeface="Ebrima"/>
+        <a:font script="Phag" typeface="Phagspa"/>
+        <a:font script="Syrn" typeface="Estrangelo Edessa"/>
+        <a:font script="Syrj" typeface="Estrangelo Edessa"/>
+        <a:font script="Syre" typeface="Estrangelo Edessa"/>
+        <a:font script="Sora" typeface="Nirmala UI"/>
+        <a:font script="Tale" typeface="Microsoft Tai Le"/>
+        <a:font script="Talu" typeface="Microsoft New Tai Lue"/>
+        <a:font script="Tfng" typeface="Ebrima"/>
       </a:minorFont>
     </a:fontScheme>
     <a:fmtScheme name="Office">
@@ -19223,180 +19680,136 @@
           <a:gsLst>
             <a:gs pos="0">
               <a:schemeClr val="phClr">
-                <a:tint val="50000"/>
-                <a:satMod val="300000"/>
+                <a:lumMod val="110000"/>
+                <a:satMod val="105000"/>
+                <a:tint val="67000"/>
               </a:schemeClr>
             </a:gs>
-            <a:gs pos="35000">
+            <a:gs pos="50000">
               <a:schemeClr val="phClr">
-                <a:tint val="37000"/>
-                <a:satMod val="300000"/>
+                <a:lumMod val="105000"/>
+                <a:satMod val="103000"/>
+                <a:tint val="73000"/>
               </a:schemeClr>
             </a:gs>
             <a:gs pos="100000">
               <a:schemeClr val="phClr">
-                <a:tint val="15000"/>
-                <a:satMod val="350000"/>
+                <a:lumMod val="105000"/>
+                <a:satMod val="109000"/>
+                <a:tint val="81000"/>
               </a:schemeClr>
             </a:gs>
           </a:gsLst>
-          <a:lin ang="16200000" scaled="1"/>
+          <a:lin ang="5400000" scaled="0"/>
         </a:gradFill>
         <a:gradFill rotWithShape="1">
           <a:gsLst>
             <a:gs pos="0">
               <a:schemeClr val="phClr">
-                <a:tint val="100000"/>
+                <a:satMod val="103000"/>
+                <a:lumMod val="102000"/>
+                <a:tint val="94000"/>
+              </a:schemeClr>
+            </a:gs>
+            <a:gs pos="50000">
+              <a:schemeClr val="phClr">
+                <a:satMod val="110000"/>
+                <a:lumMod val="100000"/>
                 <a:shade val="100000"/>
-                <a:satMod val="130000"/>
               </a:schemeClr>
             </a:gs>
             <a:gs pos="100000">
               <a:schemeClr val="phClr">
-                <a:tint val="50000"/>
-                <a:shade val="100000"/>
-                <a:satMod val="350000"/>
+                <a:lumMod val="99000"/>
+                <a:satMod val="120000"/>
+                <a:shade val="78000"/>
               </a:schemeClr>
             </a:gs>
           </a:gsLst>
-          <a:lin ang="16200000" scaled="0"/>
+          <a:lin ang="5400000" scaled="0"/>
         </a:gradFill>
       </a:fillStyleLst>
       <a:lnStyleLst>
-        <a:ln w="9525" cap="flat" cmpd="sng" algn="ctr">
+        <a:ln w="12700" cap="flat" cmpd="sng" algn="ctr">
           <a:solidFill>
-            <a:schemeClr val="phClr">
-              <a:shade val="95000"/>
-              <a:satMod val="105000"/>
-            </a:schemeClr>
+            <a:schemeClr val="phClr"/>
           </a:solidFill>
           <a:prstDash val="solid"/>
+          <a:miter lim="800000"/>
+        </a:ln>
+        <a:ln w="19050" cap="flat" cmpd="sng" algn="ctr">
+          <a:solidFill>
+            <a:schemeClr val="phClr"/>
+          </a:solidFill>
+          <a:prstDash val="solid"/>
+          <a:miter lim="800000"/>
         </a:ln>
         <a:ln w="25400" cap="flat" cmpd="sng" algn="ctr">
           <a:solidFill>
             <a:schemeClr val="phClr"/>
           </a:solidFill>
           <a:prstDash val="solid"/>
-        </a:ln>
-        <a:ln w="38100" cap="flat" cmpd="sng" algn="ctr">
-          <a:solidFill>
-            <a:schemeClr val="phClr"/>
-          </a:solidFill>
-          <a:prstDash val="solid"/>
+          <a:miter lim="800000"/>
         </a:ln>
       </a:lnStyleLst>
       <a:effectStyleLst>
         <a:effectStyle>
+          <a:effectLst/>
+        </a:effectStyle>
+        <a:effectStyle>
+          <a:effectLst/>
+        </a:effectStyle>
+        <a:effectStyle>
           <a:effectLst>
-            <a:outerShdw blurRad="40000" dist="20000" dir="5400000" rotWithShape="0">
+            <a:outerShdw blurRad="57150" dist="19050" dir="5400000" algn="ctr" rotWithShape="0">
               <a:srgbClr val="000000">
-                <a:alpha val="38000"/>
+                <a:alpha val="63000"/>
               </a:srgbClr>
             </a:outerShdw>
           </a:effectLst>
-        </a:effectStyle>
-        <a:effectStyle>
-          <a:effectLst>
-            <a:outerShdw blurRad="40000" dist="23000" dir="5400000" rotWithShape="0">
-              <a:srgbClr val="000000">
-                <a:alpha val="35000"/>
-              </a:srgbClr>
-            </a:outerShdw>
-          </a:effectLst>
-        </a:effectStyle>
-        <a:effectStyle>
-          <a:effectLst>
-            <a:outerShdw blurRad="40000" dist="23000" dir="5400000" rotWithShape="0">
-              <a:srgbClr val="000000">
-                <a:alpha val="35000"/>
-              </a:srgbClr>
-            </a:outerShdw>
-          </a:effectLst>
-          <a:scene3d>
-            <a:camera prst="orthographicFront">
-              <a:rot lat="0" lon="0" rev="0"/>
-            </a:camera>
-            <a:lightRig rig="threePt" dir="t">
-              <a:rot lat="0" lon="0" rev="1200000"/>
-            </a:lightRig>
-          </a:scene3d>
-          <a:sp3d>
-            <a:bevelT w="63500" h="25400"/>
-          </a:sp3d>
         </a:effectStyle>
       </a:effectStyleLst>
       <a:bgFillStyleLst>
         <a:solidFill>
           <a:schemeClr val="phClr"/>
         </a:solidFill>
+        <a:solidFill>
+          <a:schemeClr val="phClr">
+            <a:tint val="95000"/>
+            <a:satMod val="170000"/>
+          </a:schemeClr>
+        </a:solidFill>
         <a:gradFill rotWithShape="1">
           <a:gsLst>
             <a:gs pos="0">
               <a:schemeClr val="phClr">
-                <a:tint val="40000"/>
-                <a:satMod val="350000"/>
+                <a:tint val="93000"/>
+                <a:satMod val="150000"/>
+                <a:shade val="98000"/>
+                <a:lumMod val="102000"/>
               </a:schemeClr>
             </a:gs>
-            <a:gs pos="40000">
+            <a:gs pos="50000">
               <a:schemeClr val="phClr">
-                <a:tint val="45000"/>
-                <a:shade val="99000"/>
-                <a:satMod val="350000"/>
+                <a:tint val="98000"/>
+                <a:satMod val="130000"/>
+                <a:shade val="90000"/>
+                <a:lumMod val="103000"/>
               </a:schemeClr>
             </a:gs>
             <a:gs pos="100000">
               <a:schemeClr val="phClr">
-                <a:shade val="20000"/>
-                <a:satMod val="255000"/>
+                <a:shade val="63000"/>
+                <a:satMod val="120000"/>
               </a:schemeClr>
             </a:gs>
           </a:gsLst>
-          <a:path path="circle">
-            <a:fillToRect l="50000" t="-80000" r="50000" b="180000"/>
-          </a:path>
-        </a:gradFill>
-        <a:gradFill rotWithShape="1">
-          <a:gsLst>
-            <a:gs pos="0">
-              <a:schemeClr val="phClr">
-                <a:tint val="80000"/>
-                <a:satMod val="300000"/>
-              </a:schemeClr>
-            </a:gs>
-            <a:gs pos="100000">
-              <a:schemeClr val="phClr">
-                <a:shade val="30000"/>
-                <a:satMod val="200000"/>
-              </a:schemeClr>
-            </a:gs>
-          </a:gsLst>
-          <a:path path="circle">
-            <a:fillToRect l="50000" t="50000" r="50000" b="50000"/>
-          </a:path>
+          <a:lin ang="5400000" scaled="0"/>
         </a:gradFill>
       </a:bgFillStyleLst>
     </a:fmtScheme>
   </a:themeElements>
   <a:objectDefaults>
-    <a:spDef>
-      <a:spPr/>
-      <a:bodyPr/>
-      <a:lstStyle/>
-      <a:style>
-        <a:lnRef idx="1">
-          <a:schemeClr val="accent1"/>
-        </a:lnRef>
-        <a:fillRef idx="3">
-          <a:schemeClr val="accent1"/>
-        </a:fillRef>
-        <a:effectRef idx="2">
-          <a:schemeClr val="accent1"/>
-        </a:effectRef>
-        <a:fontRef idx="minor">
-          <a:schemeClr val="lt1"/>
-        </a:fontRef>
-      </a:style>
-    </a:spDef>
     <a:lnDef>
       <a:spPr/>
       <a:bodyPr/>
@@ -19418,5 +19831,10 @@
     </a:lnDef>
   </a:objectDefaults>
   <a:extraClrSchemeLst/>
+  <a:extLst>
+    <a:ext uri="{05A4C25C-085E-4340-85A3-A5531E510DB2}">
+      <thm15:themeFamily xmlns:thm15="http://schemas.microsoft.com/office/thememl/2012/main" name="Office Theme" id="{2E142A2C-CD16-42D6-873A-C26D2A0506FA}" vid="{1BDDFF52-6CD6-40A5-AB3C-68EB2F1E4D0A}"/>
+    </a:ext>
+  </a:extLst>
 </a:theme>
 </file>